--- a/docs/통합CMS_ERP연계_고객사_안내자료.pptx
+++ b/docs/통합CMS_ERP연계_고객사_안내자료.pptx
@@ -3185,57 +3185,14 @@
       </p:sp>
       <p:sp>
         <p:nvSpPr>
-          <p:cNvPr id="4" name="Rounded Rectangle 3"/>
-          <p:cNvSpPr/>
-          <p:nvPr/>
-        </p:nvSpPr>
-        <p:spPr>
-          <a:xfrm>
-            <a:off x="432000" y="396000"/>
-            <a:ext cx="2376000" cy="223200"/>
-          </a:xfrm>
-          <a:prstGeom prst="roundRect">
-            <a:avLst/>
-          </a:prstGeom>
-          <a:solidFill>
-            <a:srgbClr val="00A888"/>
-          </a:solidFill>
-          <a:ln>
-            <a:noFill/>
-          </a:ln>
-        </p:spPr>
-        <p:style>
-          <a:lnRef idx="1">
-            <a:schemeClr val="accent1"/>
-          </a:lnRef>
-          <a:fillRef idx="3">
-            <a:schemeClr val="accent1"/>
-          </a:fillRef>
-          <a:effectRef idx="2">
-            <a:schemeClr val="accent1"/>
-          </a:effectRef>
-          <a:fontRef idx="minor">
-            <a:schemeClr val="lt1"/>
-          </a:fontRef>
-        </p:style>
-        <p:txBody>
-          <a:bodyPr rtlCol="0" anchor="ctr"/>
-          <a:lstStyle/>
-          <a:p>
-            <a:pPr algn="ctr"/>
-          </a:p>
-        </p:txBody>
-      </p:sp>
-      <p:sp>
-        <p:nvSpPr>
-          <p:cNvPr id="5" name="TextBox 4"/>
+          <p:cNvPr id="4" name="TextBox 3"/>
           <p:cNvSpPr txBox="1"/>
           <p:nvPr/>
         </p:nvSpPr>
         <p:spPr>
           <a:xfrm>
-            <a:off x="432000" y="424800"/>
-            <a:ext cx="2376000" cy="115200"/>
+            <a:off x="432000" y="594000"/>
+            <a:ext cx="5112000" cy="522000"/>
           </a:xfrm>
           <a:prstGeom prst="rect">
             <a:avLst/>
@@ -3248,29 +3205,30 @@
           </a:bodyPr>
           <a:lstStyle/>
           <a:p>
-            <a:pPr algn="ctr"/>
-            <a:r>
-              <a:rPr sz="1000" b="1">
+            <a:pPr algn="l"/>
+            <a:r>
+              <a:rPr sz="3000" b="1">
                 <a:solidFill>
                   <a:srgbClr val="FFFFFF"/>
                 </a:solidFill>
                 <a:latin typeface="Malgun Gothic"/>
               </a:rPr>
-              <a:t>CMS PRACTICAL GUIDE</a:t>
-            </a:r>
-          </a:p>
-        </p:txBody>
-      </p:sp>
-      <p:sp>
-        <p:nvSpPr>
-          <p:cNvPr id="6" name="TextBox 5"/>
+              <a:t>통합CMS ERP연계
+고객사 안내자료</a:t>
+            </a:r>
+          </a:p>
+        </p:txBody>
+      </p:sp>
+      <p:sp>
+        <p:nvSpPr>
+          <p:cNvPr id="5" name="TextBox 4"/>
           <p:cNvSpPr txBox="1"/>
           <p:nvPr/>
         </p:nvSpPr>
         <p:spPr>
           <a:xfrm>
-            <a:off x="432000" y="882000"/>
-            <a:ext cx="5688000" cy="396000"/>
+            <a:off x="450000" y="1422000"/>
+            <a:ext cx="5040000" cy="198000"/>
           </a:xfrm>
           <a:prstGeom prst="rect">
             <a:avLst/>
@@ -3285,63 +3243,27 @@
           <a:p>
             <a:pPr algn="l"/>
             <a:r>
-              <a:rPr sz="3200" b="1">
-                <a:solidFill>
-                  <a:srgbClr val="FFFFFF"/>
+              <a:rPr sz="1320" b="0">
+                <a:solidFill>
+                  <a:srgbClr val="E5F7F3"/>
                 </a:solidFill>
                 <a:latin typeface="Malgun Gothic"/>
               </a:rPr>
-              <a:t>통합CMS ERP연계
-고객사 안내자료</a:t>
-            </a:r>
-          </a:p>
-        </p:txBody>
-      </p:sp>
-      <p:sp>
-        <p:nvSpPr>
-          <p:cNvPr id="7" name="TextBox 6"/>
-          <p:cNvSpPr txBox="1"/>
-          <p:nvPr/>
-        </p:nvSpPr>
-        <p:spPr>
-          <a:xfrm>
-            <a:off x="450000" y="1602000"/>
-            <a:ext cx="5256000" cy="198000"/>
-          </a:xfrm>
-          <a:prstGeom prst="rect">
-            <a:avLst/>
-          </a:prstGeom>
-          <a:noFill/>
-        </p:spPr>
-        <p:txBody>
-          <a:bodyPr wrap="none" anchor="ctr">
-            <a:spAutoFit/>
-          </a:bodyPr>
-          <a:lstStyle/>
-          <a:p>
-            <a:pPr algn="l"/>
-            <a:r>
-              <a:rPr sz="1400" b="0">
-                <a:solidFill>
-                  <a:srgbClr val="E5F7F3"/>
-                </a:solidFill>
-                <a:latin typeface="Malgun Gothic"/>
-              </a:rPr>
-              <a:t>은행 업무 결과를 ERP 회계·자금 업무로 자연스럽게 연결합니다.</a:t>
-            </a:r>
-          </a:p>
-        </p:txBody>
-      </p:sp>
-      <p:sp>
-        <p:nvSpPr>
-          <p:cNvPr id="8" name="Rounded Rectangle 7"/>
+              <a:t>은행 업무 결과를 ERP 회계·자금 업무로 연결합니다.</a:t>
+            </a:r>
+          </a:p>
+        </p:txBody>
+      </p:sp>
+      <p:sp>
+        <p:nvSpPr>
+          <p:cNvPr id="6" name="Rounded Rectangle 5"/>
           <p:cNvSpPr/>
           <p:nvPr/>
         </p:nvSpPr>
         <p:spPr>
           <a:xfrm>
-            <a:off x="450000" y="2034000"/>
-            <a:ext cx="1908000" cy="720000"/>
+            <a:off x="450000" y="1908000"/>
+            <a:ext cx="1835999" cy="702000"/>
           </a:xfrm>
           <a:prstGeom prst="roundRect">
             <a:avLst/>
@@ -3379,14 +3301,14 @@
       </p:sp>
       <p:sp>
         <p:nvSpPr>
-          <p:cNvPr id="9" name="Rectangle 8"/>
+          <p:cNvPr id="7" name="Rectangle 6"/>
           <p:cNvSpPr/>
           <p:nvPr/>
         </p:nvSpPr>
         <p:spPr>
           <a:xfrm>
-            <a:off x="450000" y="2034000"/>
-            <a:ext cx="1908000" cy="46800"/>
+            <a:off x="450000" y="1908000"/>
+            <a:ext cx="1835999" cy="46800"/>
           </a:xfrm>
           <a:prstGeom prst="rect">
             <a:avLst/>
@@ -3422,13 +3344,13 @@
       </p:sp>
       <p:sp>
         <p:nvSpPr>
-          <p:cNvPr id="10" name="Rounded Rectangle 9"/>
+          <p:cNvPr id="8" name="Rounded Rectangle 7"/>
           <p:cNvSpPr/>
           <p:nvPr/>
         </p:nvSpPr>
         <p:spPr>
           <a:xfrm>
-            <a:off x="576000" y="2160000"/>
+            <a:off x="576000" y="2033999"/>
             <a:ext cx="259200" cy="259200"/>
           </a:xfrm>
           <a:prstGeom prst="roundRect">
@@ -3465,13 +3387,13 @@
       </p:sp>
       <p:sp>
         <p:nvSpPr>
-          <p:cNvPr id="11" name="TextBox 10"/>
+          <p:cNvPr id="9" name="TextBox 8"/>
           <p:cNvSpPr txBox="1"/>
           <p:nvPr/>
         </p:nvSpPr>
         <p:spPr>
           <a:xfrm>
-            <a:off x="576000" y="2188800"/>
+            <a:off x="576000" y="2062799"/>
             <a:ext cx="259200" cy="125999"/>
           </a:xfrm>
           <a:prstGeom prst="rect">
@@ -3500,14 +3422,14 @@
       </p:sp>
       <p:sp>
         <p:nvSpPr>
-          <p:cNvPr id="12" name="TextBox 11"/>
+          <p:cNvPr id="10" name="TextBox 9"/>
           <p:cNvSpPr txBox="1"/>
           <p:nvPr/>
         </p:nvSpPr>
         <p:spPr>
           <a:xfrm>
-            <a:off x="900000" y="2156400"/>
-            <a:ext cx="1332000" cy="172800"/>
+            <a:off x="900000" y="2030400"/>
+            <a:ext cx="1259999" cy="172800"/>
           </a:xfrm>
           <a:prstGeom prst="rect">
             <a:avLst/>
@@ -3535,14 +3457,14 @@
       </p:sp>
       <p:sp>
         <p:nvSpPr>
-          <p:cNvPr id="13" name="TextBox 12"/>
+          <p:cNvPr id="11" name="TextBox 10"/>
           <p:cNvSpPr txBox="1"/>
           <p:nvPr/>
         </p:nvSpPr>
         <p:spPr>
           <a:xfrm>
-            <a:off x="612000" y="2404800"/>
-            <a:ext cx="1583999" cy="277200"/>
+            <a:off x="612000" y="2278800"/>
+            <a:ext cx="1511999" cy="259200"/>
           </a:xfrm>
           <a:prstGeom prst="rect">
             <a:avLst/>
@@ -3559,7 +3481,7 @@
               <a:spcAft>
                 <a:spcPts val="300"/>
               </a:spcAft>
-              <a:defRPr sz="930">
+              <a:defRPr sz="800">
                 <a:solidFill>
                   <a:srgbClr val="232D34"/>
                 </a:solidFill>
@@ -3567,21 +3489,25 @@
               </a:defRPr>
             </a:pPr>
             <a:r>
-              <a:t>계좌·법인카드·세금계산서 데이터를 자동 수집</a:t>
-            </a:r>
-          </a:p>
-        </p:txBody>
-      </p:sp>
-      <p:sp>
-        <p:nvSpPr>
-          <p:cNvPr id="14" name="Rounded Rectangle 13"/>
+              <a:t>계좌·카드·세금계산서</a:t>
+            </a:r>
+            <a:br/>
+            <a:r>
+              <a:t>데이터 자동 수집</a:t>
+            </a:r>
+          </a:p>
+        </p:txBody>
+      </p:sp>
+      <p:sp>
+        <p:nvSpPr>
+          <p:cNvPr id="12" name="Rounded Rectangle 11"/>
           <p:cNvSpPr/>
           <p:nvPr/>
         </p:nvSpPr>
         <p:spPr>
           <a:xfrm>
-            <a:off x="2484000" y="2034000"/>
-            <a:ext cx="1908000" cy="720000"/>
+            <a:off x="2412000" y="1908000"/>
+            <a:ext cx="1835999" cy="702000"/>
           </a:xfrm>
           <a:prstGeom prst="roundRect">
             <a:avLst/>
@@ -3619,14 +3545,14 @@
       </p:sp>
       <p:sp>
         <p:nvSpPr>
-          <p:cNvPr id="15" name="Rectangle 14"/>
+          <p:cNvPr id="13" name="Rectangle 12"/>
           <p:cNvSpPr/>
           <p:nvPr/>
         </p:nvSpPr>
         <p:spPr>
           <a:xfrm>
-            <a:off x="2484000" y="2034000"/>
-            <a:ext cx="1908000" cy="46800"/>
+            <a:off x="2412000" y="1908000"/>
+            <a:ext cx="1835999" cy="46800"/>
           </a:xfrm>
           <a:prstGeom prst="rect">
             <a:avLst/>
@@ -3662,13 +3588,13 @@
       </p:sp>
       <p:sp>
         <p:nvSpPr>
-          <p:cNvPr id="16" name="Rounded Rectangle 15"/>
+          <p:cNvPr id="14" name="Rounded Rectangle 13"/>
           <p:cNvSpPr/>
           <p:nvPr/>
         </p:nvSpPr>
         <p:spPr>
           <a:xfrm>
-            <a:off x="2610000" y="2160000"/>
+            <a:off x="2538000" y="2033999"/>
             <a:ext cx="259200" cy="259200"/>
           </a:xfrm>
           <a:prstGeom prst="roundRect">
@@ -3705,13 +3631,13 @@
       </p:sp>
       <p:sp>
         <p:nvSpPr>
-          <p:cNvPr id="17" name="TextBox 16"/>
+          <p:cNvPr id="15" name="TextBox 14"/>
           <p:cNvSpPr txBox="1"/>
           <p:nvPr/>
         </p:nvSpPr>
         <p:spPr>
           <a:xfrm>
-            <a:off x="2610000" y="2188800"/>
+            <a:off x="2538000" y="2062799"/>
             <a:ext cx="259200" cy="125999"/>
           </a:xfrm>
           <a:prstGeom prst="rect">
@@ -3740,14 +3666,14 @@
       </p:sp>
       <p:sp>
         <p:nvSpPr>
-          <p:cNvPr id="18" name="TextBox 17"/>
+          <p:cNvPr id="16" name="TextBox 15"/>
           <p:cNvSpPr txBox="1"/>
           <p:nvPr/>
         </p:nvSpPr>
         <p:spPr>
           <a:xfrm>
-            <a:off x="2934000" y="2156400"/>
-            <a:ext cx="1332000" cy="172800"/>
+            <a:off x="2862000" y="2030400"/>
+            <a:ext cx="1259999" cy="172800"/>
           </a:xfrm>
           <a:prstGeom prst="rect">
             <a:avLst/>
@@ -3775,14 +3701,14 @@
       </p:sp>
       <p:sp>
         <p:nvSpPr>
-          <p:cNvPr id="19" name="TextBox 18"/>
+          <p:cNvPr id="17" name="TextBox 16"/>
           <p:cNvSpPr txBox="1"/>
           <p:nvPr/>
         </p:nvSpPr>
         <p:spPr>
           <a:xfrm>
-            <a:off x="2646000" y="2404800"/>
-            <a:ext cx="1583999" cy="277200"/>
+            <a:off x="2574000" y="2278800"/>
+            <a:ext cx="1511999" cy="259200"/>
           </a:xfrm>
           <a:prstGeom prst="rect">
             <a:avLst/>
@@ -3799,7 +3725,7 @@
               <a:spcAft>
                 <a:spcPts val="300"/>
               </a:spcAft>
-              <a:defRPr sz="930">
+              <a:defRPr sz="800">
                 <a:solidFill>
                   <a:srgbClr val="232D34"/>
                 </a:solidFill>
@@ -3807,21 +3733,25 @@
               </a:defRPr>
             </a:pPr>
             <a:r>
-              <a:t>API·DB·RFC 방식으로 ERP에 전달</a:t>
-            </a:r>
-          </a:p>
-        </p:txBody>
-      </p:sp>
-      <p:sp>
-        <p:nvSpPr>
-          <p:cNvPr id="20" name="Rounded Rectangle 19"/>
+              <a:t>API·DB·RFC 방식으로</a:t>
+            </a:r>
+            <a:br/>
+            <a:r>
+              <a:t>ERP에 전달</a:t>
+            </a:r>
+          </a:p>
+        </p:txBody>
+      </p:sp>
+      <p:sp>
+        <p:nvSpPr>
+          <p:cNvPr id="18" name="Rounded Rectangle 17"/>
           <p:cNvSpPr/>
           <p:nvPr/>
         </p:nvSpPr>
         <p:spPr>
           <a:xfrm>
-            <a:off x="4518000" y="2034000"/>
-            <a:ext cx="1908000" cy="720000"/>
+            <a:off x="4374000" y="1908000"/>
+            <a:ext cx="1835999" cy="702000"/>
           </a:xfrm>
           <a:prstGeom prst="roundRect">
             <a:avLst/>
@@ -3859,14 +3789,14 @@
       </p:sp>
       <p:sp>
         <p:nvSpPr>
-          <p:cNvPr id="21" name="Rectangle 20"/>
+          <p:cNvPr id="19" name="Rectangle 18"/>
           <p:cNvSpPr/>
           <p:nvPr/>
         </p:nvSpPr>
         <p:spPr>
           <a:xfrm>
-            <a:off x="4518000" y="2034000"/>
-            <a:ext cx="1908000" cy="46800"/>
+            <a:off x="4374000" y="1908000"/>
+            <a:ext cx="1835999" cy="46800"/>
           </a:xfrm>
           <a:prstGeom prst="rect">
             <a:avLst/>
@@ -3902,13 +3832,13 @@
       </p:sp>
       <p:sp>
         <p:nvSpPr>
-          <p:cNvPr id="22" name="Rounded Rectangle 21"/>
+          <p:cNvPr id="20" name="Rounded Rectangle 19"/>
           <p:cNvSpPr/>
           <p:nvPr/>
         </p:nvSpPr>
         <p:spPr>
           <a:xfrm>
-            <a:off x="4644000" y="2160000"/>
+            <a:off x="4500000" y="2033999"/>
             <a:ext cx="259200" cy="259200"/>
           </a:xfrm>
           <a:prstGeom prst="roundRect">
@@ -3945,13 +3875,13 @@
       </p:sp>
       <p:sp>
         <p:nvSpPr>
-          <p:cNvPr id="23" name="TextBox 22"/>
+          <p:cNvPr id="21" name="TextBox 20"/>
           <p:cNvSpPr txBox="1"/>
           <p:nvPr/>
         </p:nvSpPr>
         <p:spPr>
           <a:xfrm>
-            <a:off x="4644000" y="2188800"/>
+            <a:off x="4500000" y="2062799"/>
             <a:ext cx="259200" cy="125999"/>
           </a:xfrm>
           <a:prstGeom prst="rect">
@@ -3980,14 +3910,14 @@
       </p:sp>
       <p:sp>
         <p:nvSpPr>
-          <p:cNvPr id="24" name="TextBox 23"/>
+          <p:cNvPr id="22" name="TextBox 21"/>
           <p:cNvSpPr txBox="1"/>
           <p:nvPr/>
         </p:nvSpPr>
         <p:spPr>
           <a:xfrm>
-            <a:off x="4968000" y="2156400"/>
-            <a:ext cx="1332000" cy="172800"/>
+            <a:off x="4824000" y="2030400"/>
+            <a:ext cx="1259999" cy="172800"/>
           </a:xfrm>
           <a:prstGeom prst="rect">
             <a:avLst/>
@@ -4015,14 +3945,14 @@
       </p:sp>
       <p:sp>
         <p:nvSpPr>
-          <p:cNvPr id="25" name="TextBox 24"/>
+          <p:cNvPr id="23" name="TextBox 22"/>
           <p:cNvSpPr txBox="1"/>
           <p:nvPr/>
         </p:nvSpPr>
         <p:spPr>
           <a:xfrm>
-            <a:off x="4680000" y="2404800"/>
-            <a:ext cx="1583999" cy="277200"/>
+            <a:off x="4536000" y="2278800"/>
+            <a:ext cx="1511999" cy="259200"/>
           </a:xfrm>
           <a:prstGeom prst="rect">
             <a:avLst/>
@@ -4039,7 +3969,7 @@
               <a:spcAft>
                 <a:spcPts val="300"/>
               </a:spcAft>
-              <a:defRPr sz="930">
+              <a:defRPr sz="800">
                 <a:solidFill>
                   <a:srgbClr val="232D34"/>
                 </a:solidFill>
@@ -4047,21 +3977,25 @@
               </a:defRPr>
             </a:pPr>
             <a:r>
-              <a:t>전표·정산·마감 업무에서 바로 확인</a:t>
-            </a:r>
-          </a:p>
-        </p:txBody>
-      </p:sp>
-      <p:sp>
-        <p:nvSpPr>
-          <p:cNvPr id="26" name="Rounded Rectangle 25"/>
+              <a:t>전표·정산·마감 업무에서</a:t>
+            </a:r>
+            <a:br/>
+            <a:r>
+              <a:t>바로 확인</a:t>
+            </a:r>
+          </a:p>
+        </p:txBody>
+      </p:sp>
+      <p:sp>
+        <p:nvSpPr>
+          <p:cNvPr id="24" name="Rounded Rectangle 23"/>
           <p:cNvSpPr/>
           <p:nvPr/>
         </p:nvSpPr>
         <p:spPr>
           <a:xfrm>
-            <a:off x="6588000" y="720000"/>
-            <a:ext cx="2052000" cy="3168000"/>
+            <a:off x="6533999" y="630000"/>
+            <a:ext cx="2106000" cy="3150000"/>
           </a:xfrm>
           <a:prstGeom prst="roundRect">
             <a:avLst/>
@@ -4097,7 +4031,7 @@
       </p:sp>
       <p:pic>
         <p:nvPicPr>
-          <p:cNvPr id="27" name="Picture 26" descr="corp_card_1.png"/>
+          <p:cNvPr id="25" name="Picture 24" descr="corp_card_1.png"/>
           <p:cNvPicPr>
             <a:picLocks noChangeAspect="1"/>
           </p:cNvPicPr>
@@ -4111,8 +4045,8 @@
         </p:blipFill>
         <p:spPr>
           <a:xfrm>
-            <a:off x="6713999" y="882000"/>
-            <a:ext cx="1800000" cy="1080000"/>
+            <a:off x="6678000" y="792000"/>
+            <a:ext cx="1818000" cy="1080000"/>
           </a:xfrm>
           <a:prstGeom prst="rect">
             <a:avLst/>
@@ -4121,7 +4055,7 @@
       </p:pic>
       <p:pic>
         <p:nvPicPr>
-          <p:cNvPr id="28" name="Picture 27" descr="bulk_transfer.png"/>
+          <p:cNvPr id="26" name="Picture 25" descr="bulk_transfer.png"/>
           <p:cNvPicPr>
             <a:picLocks noChangeAspect="1"/>
           </p:cNvPicPr>
@@ -4135,8 +4069,8 @@
         </p:blipFill>
         <p:spPr>
           <a:xfrm>
-            <a:off x="6713999" y="2253391"/>
-            <a:ext cx="1800000" cy="965217"/>
+            <a:off x="6678000" y="2194565"/>
+            <a:ext cx="1818000" cy="974870"/>
           </a:xfrm>
           <a:prstGeom prst="rect">
             <a:avLst/>
@@ -4145,7 +4079,7 @@
       </p:pic>
       <p:sp>
         <p:nvSpPr>
-          <p:cNvPr id="29" name="TextBox 28"/>
+          <p:cNvPr id="27" name="TextBox 26"/>
           <p:cNvSpPr txBox="1"/>
           <p:nvPr/>
         </p:nvSpPr>
@@ -4290,8 +4224,8 @@
         </p:nvSpPr>
         <p:spPr>
           <a:xfrm>
-            <a:off x="378000" y="208800"/>
-            <a:ext cx="2880000" cy="125999"/>
+            <a:off x="360000" y="288000"/>
+            <a:ext cx="7380000" cy="280800"/>
           </a:xfrm>
           <a:prstGeom prst="rect">
             <a:avLst/>
@@ -4306,13 +4240,13 @@
           <a:p>
             <a:pPr algn="l"/>
             <a:r>
-              <a:rPr sz="850" b="1">
-                <a:solidFill>
-                  <a:srgbClr val="00A888"/>
+              <a:rPr sz="2400" b="1">
+                <a:solidFill>
+                  <a:srgbClr val="12363F"/>
                 </a:solidFill>
                 <a:latin typeface="Malgun Gothic"/>
               </a:rPr>
-              <a:t>CMS PRACTICAL GUIDE</a:t>
+              <a:t>도입 진행 절차</a:t>
             </a:r>
           </a:p>
         </p:txBody>
@@ -4325,8 +4259,8 @@
         </p:nvSpPr>
         <p:spPr>
           <a:xfrm>
-            <a:off x="360000" y="360000"/>
-            <a:ext cx="6840000" cy="280800"/>
+            <a:off x="367200" y="597600"/>
+            <a:ext cx="7380000" cy="162000"/>
           </a:xfrm>
           <a:prstGeom prst="rect">
             <a:avLst/>
@@ -4341,41 +4275,6 @@
           <a:p>
             <a:pPr algn="l"/>
             <a:r>
-              <a:rPr sz="2400" b="1">
-                <a:solidFill>
-                  <a:srgbClr val="12363F"/>
-                </a:solidFill>
-                <a:latin typeface="Malgun Gothic"/>
-              </a:rPr>
-              <a:t>도입 진행 절차</a:t>
-            </a:r>
-          </a:p>
-        </p:txBody>
-      </p:sp>
-      <p:sp>
-        <p:nvSpPr>
-          <p:cNvPr id="6" name="TextBox 5"/>
-          <p:cNvSpPr txBox="1"/>
-          <p:nvPr/>
-        </p:nvSpPr>
-        <p:spPr>
-          <a:xfrm>
-            <a:off x="367200" y="666000"/>
-            <a:ext cx="6840000" cy="162000"/>
-          </a:xfrm>
-          <a:prstGeom prst="rect">
-            <a:avLst/>
-          </a:prstGeom>
-          <a:noFill/>
-        </p:spPr>
-        <p:txBody>
-          <a:bodyPr wrap="none" anchor="ctr">
-            <a:spAutoFit/>
-          </a:bodyPr>
-          <a:lstStyle/>
-          <a:p>
-            <a:pPr algn="l"/>
-            <a:r>
               <a:rPr sz="1050" b="0">
                 <a:solidFill>
                   <a:srgbClr val="5F7179"/>
@@ -4389,7 +4288,7 @@
       </p:sp>
       <p:sp>
         <p:nvSpPr>
-          <p:cNvPr id="7" name="Rectangle 6"/>
+          <p:cNvPr id="6" name="Rectangle 5"/>
           <p:cNvSpPr/>
           <p:nvPr/>
         </p:nvSpPr>
@@ -4432,7 +4331,7 @@
       </p:sp>
       <p:sp>
         <p:nvSpPr>
-          <p:cNvPr id="8" name="Rounded Rectangle 7"/>
+          <p:cNvPr id="7" name="Rounded Rectangle 6"/>
           <p:cNvSpPr/>
           <p:nvPr/>
         </p:nvSpPr>
@@ -4475,7 +4374,7 @@
       </p:sp>
       <p:sp>
         <p:nvSpPr>
-          <p:cNvPr id="9" name="TextBox 8"/>
+          <p:cNvPr id="8" name="TextBox 7"/>
           <p:cNvSpPr txBox="1"/>
           <p:nvPr/>
         </p:nvSpPr>
@@ -4510,7 +4409,7 @@
       </p:sp>
       <p:sp>
         <p:nvSpPr>
-          <p:cNvPr id="10" name="TextBox 9"/>
+          <p:cNvPr id="9" name="TextBox 8"/>
           <p:cNvSpPr txBox="1"/>
           <p:nvPr/>
         </p:nvSpPr>
@@ -4545,7 +4444,7 @@
       </p:sp>
       <p:sp>
         <p:nvSpPr>
-          <p:cNvPr id="11" name="TextBox 10"/>
+          <p:cNvPr id="10" name="TextBox 9"/>
           <p:cNvSpPr txBox="1"/>
           <p:nvPr/>
         </p:nvSpPr>
@@ -4580,7 +4479,7 @@
       </p:sp>
       <p:sp>
         <p:nvSpPr>
-          <p:cNvPr id="12" name="Rounded Rectangle 11"/>
+          <p:cNvPr id="11" name="Rounded Rectangle 10"/>
           <p:cNvSpPr/>
           <p:nvPr/>
         </p:nvSpPr>
@@ -4623,7 +4522,7 @@
       </p:sp>
       <p:sp>
         <p:nvSpPr>
-          <p:cNvPr id="13" name="TextBox 12"/>
+          <p:cNvPr id="12" name="TextBox 11"/>
           <p:cNvSpPr txBox="1"/>
           <p:nvPr/>
         </p:nvSpPr>
@@ -4658,7 +4557,7 @@
       </p:sp>
       <p:sp>
         <p:nvSpPr>
-          <p:cNvPr id="14" name="TextBox 13"/>
+          <p:cNvPr id="13" name="TextBox 12"/>
           <p:cNvSpPr txBox="1"/>
           <p:nvPr/>
         </p:nvSpPr>
@@ -4693,7 +4592,7 @@
       </p:sp>
       <p:sp>
         <p:nvSpPr>
-          <p:cNvPr id="15" name="TextBox 14"/>
+          <p:cNvPr id="14" name="TextBox 13"/>
           <p:cNvSpPr txBox="1"/>
           <p:nvPr/>
         </p:nvSpPr>
@@ -4728,7 +4627,7 @@
       </p:sp>
       <p:sp>
         <p:nvSpPr>
-          <p:cNvPr id="16" name="Rounded Rectangle 15"/>
+          <p:cNvPr id="15" name="Rounded Rectangle 14"/>
           <p:cNvSpPr/>
           <p:nvPr/>
         </p:nvSpPr>
@@ -4771,7 +4670,7 @@
       </p:sp>
       <p:sp>
         <p:nvSpPr>
-          <p:cNvPr id="17" name="TextBox 16"/>
+          <p:cNvPr id="16" name="TextBox 15"/>
           <p:cNvSpPr txBox="1"/>
           <p:nvPr/>
         </p:nvSpPr>
@@ -4806,7 +4705,7 @@
       </p:sp>
       <p:sp>
         <p:nvSpPr>
-          <p:cNvPr id="18" name="TextBox 17"/>
+          <p:cNvPr id="17" name="TextBox 16"/>
           <p:cNvSpPr txBox="1"/>
           <p:nvPr/>
         </p:nvSpPr>
@@ -4841,7 +4740,7 @@
       </p:sp>
       <p:sp>
         <p:nvSpPr>
-          <p:cNvPr id="19" name="TextBox 18"/>
+          <p:cNvPr id="18" name="TextBox 17"/>
           <p:cNvSpPr txBox="1"/>
           <p:nvPr/>
         </p:nvSpPr>
@@ -4876,7 +4775,7 @@
       </p:sp>
       <p:sp>
         <p:nvSpPr>
-          <p:cNvPr id="20" name="Rounded Rectangle 19"/>
+          <p:cNvPr id="19" name="Rounded Rectangle 18"/>
           <p:cNvSpPr/>
           <p:nvPr/>
         </p:nvSpPr>
@@ -4919,7 +4818,7 @@
       </p:sp>
       <p:sp>
         <p:nvSpPr>
-          <p:cNvPr id="21" name="TextBox 20"/>
+          <p:cNvPr id="20" name="TextBox 19"/>
           <p:cNvSpPr txBox="1"/>
           <p:nvPr/>
         </p:nvSpPr>
@@ -4954,7 +4853,7 @@
       </p:sp>
       <p:sp>
         <p:nvSpPr>
-          <p:cNvPr id="22" name="TextBox 21"/>
+          <p:cNvPr id="21" name="TextBox 20"/>
           <p:cNvSpPr txBox="1"/>
           <p:nvPr/>
         </p:nvSpPr>
@@ -4989,7 +4888,7 @@
       </p:sp>
       <p:sp>
         <p:nvSpPr>
-          <p:cNvPr id="23" name="Rounded Rectangle 22"/>
+          <p:cNvPr id="22" name="Rounded Rectangle 21"/>
           <p:cNvSpPr/>
           <p:nvPr/>
         </p:nvSpPr>
@@ -5034,7 +4933,7 @@
       </p:sp>
       <p:sp>
         <p:nvSpPr>
-          <p:cNvPr id="24" name="Rectangle 23"/>
+          <p:cNvPr id="23" name="Rectangle 22"/>
           <p:cNvSpPr/>
           <p:nvPr/>
         </p:nvSpPr>
@@ -5077,7 +4976,7 @@
       </p:sp>
       <p:sp>
         <p:nvSpPr>
-          <p:cNvPr id="25" name="TextBox 24"/>
+          <p:cNvPr id="24" name="TextBox 23"/>
           <p:cNvSpPr txBox="1"/>
           <p:nvPr/>
         </p:nvSpPr>
@@ -5112,7 +5011,7 @@
       </p:sp>
       <p:sp>
         <p:nvSpPr>
-          <p:cNvPr id="26" name="TextBox 25"/>
+          <p:cNvPr id="25" name="TextBox 24"/>
           <p:cNvSpPr txBox="1"/>
           <p:nvPr/>
         </p:nvSpPr>
@@ -5136,7 +5035,7 @@
               <a:spcAft>
                 <a:spcPts val="300"/>
               </a:spcAft>
-              <a:defRPr sz="930">
+              <a:defRPr sz="869">
                 <a:solidFill>
                   <a:srgbClr val="232D34"/>
                 </a:solidFill>
@@ -5152,7 +5051,7 @@
               <a:spcAft>
                 <a:spcPts val="300"/>
               </a:spcAft>
-              <a:defRPr sz="930">
+              <a:defRPr sz="869">
                 <a:solidFill>
                   <a:srgbClr val="232D34"/>
                 </a:solidFill>
@@ -5168,7 +5067,7 @@
               <a:spcAft>
                 <a:spcPts val="300"/>
               </a:spcAft>
-              <a:defRPr sz="930">
+              <a:defRPr sz="869">
                 <a:solidFill>
                   <a:srgbClr val="232D34"/>
                 </a:solidFill>
@@ -5183,7 +5082,7 @@
       </p:sp>
       <p:sp>
         <p:nvSpPr>
-          <p:cNvPr id="27" name="Rounded Rectangle 26"/>
+          <p:cNvPr id="26" name="Rounded Rectangle 25"/>
           <p:cNvSpPr/>
           <p:nvPr/>
         </p:nvSpPr>
@@ -5228,7 +5127,7 @@
       </p:sp>
       <p:sp>
         <p:nvSpPr>
-          <p:cNvPr id="28" name="Rectangle 27"/>
+          <p:cNvPr id="27" name="Rectangle 26"/>
           <p:cNvSpPr/>
           <p:nvPr/>
         </p:nvSpPr>
@@ -5271,7 +5170,7 @@
       </p:sp>
       <p:sp>
         <p:nvSpPr>
-          <p:cNvPr id="29" name="TextBox 28"/>
+          <p:cNvPr id="28" name="TextBox 27"/>
           <p:cNvSpPr txBox="1"/>
           <p:nvPr/>
         </p:nvSpPr>
@@ -5306,7 +5205,7 @@
       </p:sp>
       <p:sp>
         <p:nvSpPr>
-          <p:cNvPr id="30" name="TextBox 29"/>
+          <p:cNvPr id="29" name="TextBox 28"/>
           <p:cNvSpPr txBox="1"/>
           <p:nvPr/>
         </p:nvSpPr>
@@ -5330,7 +5229,7 @@
               <a:spcAft>
                 <a:spcPts val="300"/>
               </a:spcAft>
-              <a:defRPr sz="930">
+              <a:defRPr sz="869">
                 <a:solidFill>
                   <a:srgbClr val="232D34"/>
                 </a:solidFill>
@@ -5346,7 +5245,7 @@
               <a:spcAft>
                 <a:spcPts val="300"/>
               </a:spcAft>
-              <a:defRPr sz="930">
+              <a:defRPr sz="869">
                 <a:solidFill>
                   <a:srgbClr val="232D34"/>
                 </a:solidFill>
@@ -5362,7 +5261,7 @@
               <a:spcAft>
                 <a:spcPts val="300"/>
               </a:spcAft>
-              <a:defRPr sz="930">
+              <a:defRPr sz="869">
                 <a:solidFill>
                   <a:srgbClr val="232D34"/>
                 </a:solidFill>
@@ -5377,7 +5276,7 @@
       </p:sp>
       <p:sp>
         <p:nvSpPr>
-          <p:cNvPr id="31" name="Rounded Rectangle 30"/>
+          <p:cNvPr id="30" name="Rounded Rectangle 29"/>
           <p:cNvSpPr/>
           <p:nvPr/>
         </p:nvSpPr>
@@ -5422,7 +5321,7 @@
       </p:sp>
       <p:sp>
         <p:nvSpPr>
-          <p:cNvPr id="32" name="Rectangle 31"/>
+          <p:cNvPr id="31" name="Rectangle 30"/>
           <p:cNvSpPr/>
           <p:nvPr/>
         </p:nvSpPr>
@@ -5465,7 +5364,7 @@
       </p:sp>
       <p:sp>
         <p:nvSpPr>
-          <p:cNvPr id="33" name="TextBox 32"/>
+          <p:cNvPr id="32" name="TextBox 31"/>
           <p:cNvSpPr txBox="1"/>
           <p:nvPr/>
         </p:nvSpPr>
@@ -5500,7 +5399,7 @@
       </p:sp>
       <p:sp>
         <p:nvSpPr>
-          <p:cNvPr id="34" name="TextBox 33"/>
+          <p:cNvPr id="33" name="TextBox 32"/>
           <p:cNvSpPr txBox="1"/>
           <p:nvPr/>
         </p:nvSpPr>
@@ -5524,7 +5423,7 @@
               <a:spcAft>
                 <a:spcPts val="300"/>
               </a:spcAft>
-              <a:defRPr sz="930">
+              <a:defRPr sz="869">
                 <a:solidFill>
                   <a:srgbClr val="232D34"/>
                 </a:solidFill>
@@ -5540,7 +5439,7 @@
               <a:spcAft>
                 <a:spcPts val="300"/>
               </a:spcAft>
-              <a:defRPr sz="930">
+              <a:defRPr sz="869">
                 <a:solidFill>
                   <a:srgbClr val="232D34"/>
                 </a:solidFill>
@@ -5556,7 +5455,7 @@
               <a:spcAft>
                 <a:spcPts val="300"/>
               </a:spcAft>
-              <a:defRPr sz="930">
+              <a:defRPr sz="869">
                 <a:solidFill>
                   <a:srgbClr val="232D34"/>
                 </a:solidFill>
@@ -5571,7 +5470,7 @@
       </p:sp>
       <p:sp>
         <p:nvSpPr>
-          <p:cNvPr id="35" name="Rounded Rectangle 34"/>
+          <p:cNvPr id="34" name="Rounded Rectangle 33"/>
           <p:cNvSpPr/>
           <p:nvPr/>
         </p:nvSpPr>
@@ -5616,7 +5515,7 @@
       </p:sp>
       <p:sp>
         <p:nvSpPr>
-          <p:cNvPr id="36" name="TextBox 35"/>
+          <p:cNvPr id="35" name="TextBox 34"/>
           <p:cNvSpPr txBox="1"/>
           <p:nvPr/>
         </p:nvSpPr>
@@ -5651,7 +5550,7 @@
       </p:sp>
       <p:sp>
         <p:nvSpPr>
-          <p:cNvPr id="37" name="TextBox 36"/>
+          <p:cNvPr id="36" name="TextBox 35"/>
           <p:cNvSpPr txBox="1"/>
           <p:nvPr/>
         </p:nvSpPr>
@@ -5686,7 +5585,7 @@
       </p:sp>
       <p:sp>
         <p:nvSpPr>
-          <p:cNvPr id="38" name="TextBox 37"/>
+          <p:cNvPr id="37" name="TextBox 36"/>
           <p:cNvSpPr txBox="1"/>
           <p:nvPr/>
         </p:nvSpPr>
@@ -5831,8 +5730,8 @@
         </p:nvSpPr>
         <p:spPr>
           <a:xfrm>
-            <a:off x="378000" y="208800"/>
-            <a:ext cx="2880000" cy="125999"/>
+            <a:off x="360000" y="288000"/>
+            <a:ext cx="7380000" cy="280800"/>
           </a:xfrm>
           <a:prstGeom prst="rect">
             <a:avLst/>
@@ -5847,13 +5746,13 @@
           <a:p>
             <a:pPr algn="l"/>
             <a:r>
-              <a:rPr sz="850" b="1">
-                <a:solidFill>
-                  <a:srgbClr val="00A888"/>
+              <a:rPr sz="2400" b="1">
+                <a:solidFill>
+                  <a:srgbClr val="12363F"/>
                 </a:solidFill>
                 <a:latin typeface="Malgun Gothic"/>
               </a:rPr>
-              <a:t>CMS PRACTICAL GUIDE</a:t>
+              <a:t>ERP연계를 도입하면 업무 흐름이 짧아집니다</a:t>
             </a:r>
           </a:p>
         </p:txBody>
@@ -5866,8 +5765,8 @@
         </p:nvSpPr>
         <p:spPr>
           <a:xfrm>
-            <a:off x="360000" y="360000"/>
-            <a:ext cx="6840000" cy="280800"/>
+            <a:off x="367200" y="597600"/>
+            <a:ext cx="7380000" cy="162000"/>
           </a:xfrm>
           <a:prstGeom prst="rect">
             <a:avLst/>
@@ -5882,41 +5781,6 @@
           <a:p>
             <a:pPr algn="l"/>
             <a:r>
-              <a:rPr sz="2400" b="1">
-                <a:solidFill>
-                  <a:srgbClr val="12363F"/>
-                </a:solidFill>
-                <a:latin typeface="Malgun Gothic"/>
-              </a:rPr>
-              <a:t>ERP연계를 도입하면 업무 흐름이 짧아집니다</a:t>
-            </a:r>
-          </a:p>
-        </p:txBody>
-      </p:sp>
-      <p:sp>
-        <p:nvSpPr>
-          <p:cNvPr id="6" name="TextBox 5"/>
-          <p:cNvSpPr txBox="1"/>
-          <p:nvPr/>
-        </p:nvSpPr>
-        <p:spPr>
-          <a:xfrm>
-            <a:off x="367200" y="666000"/>
-            <a:ext cx="6840000" cy="162000"/>
-          </a:xfrm>
-          <a:prstGeom prst="rect">
-            <a:avLst/>
-          </a:prstGeom>
-          <a:noFill/>
-        </p:spPr>
-        <p:txBody>
-          <a:bodyPr wrap="none" anchor="ctr">
-            <a:spAutoFit/>
-          </a:bodyPr>
-          <a:lstStyle/>
-          <a:p>
-            <a:pPr algn="l"/>
-            <a:r>
               <a:rPr sz="1050" b="0">
                 <a:solidFill>
                   <a:srgbClr val="5F7179"/>
@@ -5930,7 +5794,7 @@
       </p:sp>
       <p:sp>
         <p:nvSpPr>
-          <p:cNvPr id="7" name="Rectangle 6"/>
+          <p:cNvPr id="6" name="Rectangle 5"/>
           <p:cNvSpPr/>
           <p:nvPr/>
         </p:nvSpPr>
@@ -5973,7 +5837,7 @@
       </p:sp>
       <p:sp>
         <p:nvSpPr>
-          <p:cNvPr id="8" name="Rounded Rectangle 7"/>
+          <p:cNvPr id="7" name="Rounded Rectangle 6"/>
           <p:cNvSpPr/>
           <p:nvPr/>
         </p:nvSpPr>
@@ -6016,7 +5880,7 @@
       </p:sp>
       <p:sp>
         <p:nvSpPr>
-          <p:cNvPr id="9" name="TextBox 8"/>
+          <p:cNvPr id="8" name="TextBox 7"/>
           <p:cNvSpPr txBox="1"/>
           <p:nvPr/>
         </p:nvSpPr>
@@ -6051,7 +5915,7 @@
       </p:sp>
       <p:sp>
         <p:nvSpPr>
-          <p:cNvPr id="10" name="TextBox 9"/>
+          <p:cNvPr id="9" name="TextBox 8"/>
           <p:cNvSpPr txBox="1"/>
           <p:nvPr/>
         </p:nvSpPr>
@@ -6086,7 +5950,7 @@
       </p:sp>
       <p:sp>
         <p:nvSpPr>
-          <p:cNvPr id="11" name="TextBox 10"/>
+          <p:cNvPr id="10" name="TextBox 9"/>
           <p:cNvSpPr txBox="1"/>
           <p:nvPr/>
         </p:nvSpPr>
@@ -6121,7 +5985,7 @@
       </p:sp>
       <p:sp>
         <p:nvSpPr>
-          <p:cNvPr id="12" name="Rounded Rectangle 11"/>
+          <p:cNvPr id="11" name="Rounded Rectangle 10"/>
           <p:cNvSpPr/>
           <p:nvPr/>
         </p:nvSpPr>
@@ -6164,7 +6028,7 @@
       </p:sp>
       <p:sp>
         <p:nvSpPr>
-          <p:cNvPr id="13" name="TextBox 12"/>
+          <p:cNvPr id="12" name="TextBox 11"/>
           <p:cNvSpPr txBox="1"/>
           <p:nvPr/>
         </p:nvSpPr>
@@ -6199,7 +6063,7 @@
       </p:sp>
       <p:sp>
         <p:nvSpPr>
-          <p:cNvPr id="14" name="TextBox 13"/>
+          <p:cNvPr id="13" name="TextBox 12"/>
           <p:cNvSpPr txBox="1"/>
           <p:nvPr/>
         </p:nvSpPr>
@@ -6234,7 +6098,7 @@
       </p:sp>
       <p:sp>
         <p:nvSpPr>
-          <p:cNvPr id="15" name="TextBox 14"/>
+          <p:cNvPr id="14" name="TextBox 13"/>
           <p:cNvSpPr txBox="1"/>
           <p:nvPr/>
         </p:nvSpPr>
@@ -6269,7 +6133,7 @@
       </p:sp>
       <p:sp>
         <p:nvSpPr>
-          <p:cNvPr id="16" name="Rounded Rectangle 15"/>
+          <p:cNvPr id="15" name="Rounded Rectangle 14"/>
           <p:cNvSpPr/>
           <p:nvPr/>
         </p:nvSpPr>
@@ -6312,7 +6176,7 @@
       </p:sp>
       <p:sp>
         <p:nvSpPr>
-          <p:cNvPr id="17" name="TextBox 16"/>
+          <p:cNvPr id="16" name="TextBox 15"/>
           <p:cNvSpPr txBox="1"/>
           <p:nvPr/>
         </p:nvSpPr>
@@ -6347,7 +6211,7 @@
       </p:sp>
       <p:sp>
         <p:nvSpPr>
-          <p:cNvPr id="18" name="TextBox 17"/>
+          <p:cNvPr id="17" name="TextBox 16"/>
           <p:cNvSpPr txBox="1"/>
           <p:nvPr/>
         </p:nvSpPr>
@@ -6382,7 +6246,7 @@
       </p:sp>
       <p:sp>
         <p:nvSpPr>
-          <p:cNvPr id="19" name="TextBox 18"/>
+          <p:cNvPr id="18" name="TextBox 17"/>
           <p:cNvSpPr txBox="1"/>
           <p:nvPr/>
         </p:nvSpPr>
@@ -6417,7 +6281,7 @@
       </p:sp>
       <p:sp>
         <p:nvSpPr>
-          <p:cNvPr id="20" name="Rounded Rectangle 19"/>
+          <p:cNvPr id="19" name="Rounded Rectangle 18"/>
           <p:cNvSpPr/>
           <p:nvPr/>
         </p:nvSpPr>
@@ -6460,7 +6324,7 @@
       </p:sp>
       <p:sp>
         <p:nvSpPr>
-          <p:cNvPr id="21" name="TextBox 20"/>
+          <p:cNvPr id="20" name="TextBox 19"/>
           <p:cNvSpPr txBox="1"/>
           <p:nvPr/>
         </p:nvSpPr>
@@ -6495,7 +6359,7 @@
       </p:sp>
       <p:sp>
         <p:nvSpPr>
-          <p:cNvPr id="22" name="TextBox 21"/>
+          <p:cNvPr id="21" name="TextBox 20"/>
           <p:cNvSpPr txBox="1"/>
           <p:nvPr/>
         </p:nvSpPr>
@@ -6530,7 +6394,7 @@
       </p:sp>
       <p:sp>
         <p:nvSpPr>
-          <p:cNvPr id="23" name="Rounded Rectangle 22"/>
+          <p:cNvPr id="22" name="Rounded Rectangle 21"/>
           <p:cNvSpPr/>
           <p:nvPr/>
         </p:nvSpPr>
@@ -6575,7 +6439,7 @@
       </p:sp>
       <p:sp>
         <p:nvSpPr>
-          <p:cNvPr id="24" name="Rectangle 23"/>
+          <p:cNvPr id="23" name="Rectangle 22"/>
           <p:cNvSpPr/>
           <p:nvPr/>
         </p:nvSpPr>
@@ -6618,7 +6482,7 @@
       </p:sp>
       <p:sp>
         <p:nvSpPr>
-          <p:cNvPr id="25" name="Rounded Rectangle 24"/>
+          <p:cNvPr id="24" name="Rounded Rectangle 23"/>
           <p:cNvSpPr/>
           <p:nvPr/>
         </p:nvSpPr>
@@ -6661,7 +6525,7 @@
       </p:sp>
       <p:sp>
         <p:nvSpPr>
-          <p:cNvPr id="26" name="TextBox 25"/>
+          <p:cNvPr id="25" name="TextBox 24"/>
           <p:cNvSpPr txBox="1"/>
           <p:nvPr/>
         </p:nvSpPr>
@@ -6696,7 +6560,7 @@
       </p:sp>
       <p:sp>
         <p:nvSpPr>
-          <p:cNvPr id="27" name="TextBox 26"/>
+          <p:cNvPr id="26" name="TextBox 25"/>
           <p:cNvSpPr txBox="1"/>
           <p:nvPr/>
         </p:nvSpPr>
@@ -6731,7 +6595,7 @@
       </p:sp>
       <p:sp>
         <p:nvSpPr>
-          <p:cNvPr id="28" name="TextBox 27"/>
+          <p:cNvPr id="27" name="TextBox 26"/>
           <p:cNvSpPr txBox="1"/>
           <p:nvPr/>
         </p:nvSpPr>
@@ -6755,7 +6619,7 @@
               <a:spcAft>
                 <a:spcPts val="300"/>
               </a:spcAft>
-              <a:defRPr sz="930">
+              <a:defRPr sz="869">
                 <a:solidFill>
                   <a:srgbClr val="232D34"/>
                 </a:solidFill>
@@ -6771,7 +6635,7 @@
               <a:spcAft>
                 <a:spcPts val="300"/>
               </a:spcAft>
-              <a:defRPr sz="930">
+              <a:defRPr sz="869">
                 <a:solidFill>
                   <a:srgbClr val="232D34"/>
                 </a:solidFill>
@@ -6786,7 +6650,7 @@
       </p:sp>
       <p:sp>
         <p:nvSpPr>
-          <p:cNvPr id="29" name="Rounded Rectangle 28"/>
+          <p:cNvPr id="28" name="Rounded Rectangle 27"/>
           <p:cNvSpPr/>
           <p:nvPr/>
         </p:nvSpPr>
@@ -6831,7 +6695,7 @@
       </p:sp>
       <p:sp>
         <p:nvSpPr>
-          <p:cNvPr id="30" name="Rectangle 29"/>
+          <p:cNvPr id="29" name="Rectangle 28"/>
           <p:cNvSpPr/>
           <p:nvPr/>
         </p:nvSpPr>
@@ -6874,7 +6738,7 @@
       </p:sp>
       <p:sp>
         <p:nvSpPr>
-          <p:cNvPr id="31" name="Rounded Rectangle 30"/>
+          <p:cNvPr id="30" name="Rounded Rectangle 29"/>
           <p:cNvSpPr/>
           <p:nvPr/>
         </p:nvSpPr>
@@ -6917,7 +6781,7 @@
       </p:sp>
       <p:sp>
         <p:nvSpPr>
-          <p:cNvPr id="32" name="TextBox 31"/>
+          <p:cNvPr id="31" name="TextBox 30"/>
           <p:cNvSpPr txBox="1"/>
           <p:nvPr/>
         </p:nvSpPr>
@@ -6952,7 +6816,7 @@
       </p:sp>
       <p:sp>
         <p:nvSpPr>
-          <p:cNvPr id="33" name="TextBox 32"/>
+          <p:cNvPr id="32" name="TextBox 31"/>
           <p:cNvSpPr txBox="1"/>
           <p:nvPr/>
         </p:nvSpPr>
@@ -6987,7 +6851,7 @@
       </p:sp>
       <p:sp>
         <p:nvSpPr>
-          <p:cNvPr id="34" name="TextBox 33"/>
+          <p:cNvPr id="33" name="TextBox 32"/>
           <p:cNvSpPr txBox="1"/>
           <p:nvPr/>
         </p:nvSpPr>
@@ -7011,7 +6875,7 @@
               <a:spcAft>
                 <a:spcPts val="300"/>
               </a:spcAft>
-              <a:defRPr sz="930">
+              <a:defRPr sz="869">
                 <a:solidFill>
                   <a:srgbClr val="232D34"/>
                 </a:solidFill>
@@ -7027,7 +6891,7 @@
               <a:spcAft>
                 <a:spcPts val="300"/>
               </a:spcAft>
-              <a:defRPr sz="930">
+              <a:defRPr sz="869">
                 <a:solidFill>
                   <a:srgbClr val="232D34"/>
                 </a:solidFill>
@@ -7042,7 +6906,7 @@
       </p:sp>
       <p:sp>
         <p:nvSpPr>
-          <p:cNvPr id="35" name="Rounded Rectangle 34"/>
+          <p:cNvPr id="34" name="Rounded Rectangle 33"/>
           <p:cNvSpPr/>
           <p:nvPr/>
         </p:nvSpPr>
@@ -7087,7 +6951,7 @@
       </p:sp>
       <p:sp>
         <p:nvSpPr>
-          <p:cNvPr id="36" name="Rectangle 35"/>
+          <p:cNvPr id="35" name="Rectangle 34"/>
           <p:cNvSpPr/>
           <p:nvPr/>
         </p:nvSpPr>
@@ -7130,7 +6994,7 @@
       </p:sp>
       <p:sp>
         <p:nvSpPr>
-          <p:cNvPr id="37" name="Rounded Rectangle 36"/>
+          <p:cNvPr id="36" name="Rounded Rectangle 35"/>
           <p:cNvSpPr/>
           <p:nvPr/>
         </p:nvSpPr>
@@ -7173,7 +7037,7 @@
       </p:sp>
       <p:sp>
         <p:nvSpPr>
-          <p:cNvPr id="38" name="TextBox 37"/>
+          <p:cNvPr id="37" name="TextBox 36"/>
           <p:cNvSpPr txBox="1"/>
           <p:nvPr/>
         </p:nvSpPr>
@@ -7208,7 +7072,7 @@
       </p:sp>
       <p:sp>
         <p:nvSpPr>
-          <p:cNvPr id="39" name="TextBox 38"/>
+          <p:cNvPr id="38" name="TextBox 37"/>
           <p:cNvSpPr txBox="1"/>
           <p:nvPr/>
         </p:nvSpPr>
@@ -7243,7 +7107,7 @@
       </p:sp>
       <p:sp>
         <p:nvSpPr>
-          <p:cNvPr id="40" name="TextBox 39"/>
+          <p:cNvPr id="39" name="TextBox 38"/>
           <p:cNvSpPr txBox="1"/>
           <p:nvPr/>
         </p:nvSpPr>
@@ -7267,7 +7131,7 @@
               <a:spcAft>
                 <a:spcPts val="300"/>
               </a:spcAft>
-              <a:defRPr sz="930">
+              <a:defRPr sz="869">
                 <a:solidFill>
                   <a:srgbClr val="232D34"/>
                 </a:solidFill>
@@ -7283,7 +7147,7 @@
               <a:spcAft>
                 <a:spcPts val="300"/>
               </a:spcAft>
-              <a:defRPr sz="930">
+              <a:defRPr sz="869">
                 <a:solidFill>
                   <a:srgbClr val="232D34"/>
                 </a:solidFill>
@@ -7298,7 +7162,7 @@
       </p:sp>
       <p:sp>
         <p:nvSpPr>
-          <p:cNvPr id="41" name="TextBox 40"/>
+          <p:cNvPr id="40" name="TextBox 39"/>
           <p:cNvSpPr txBox="1"/>
           <p:nvPr/>
         </p:nvSpPr>
@@ -7333,7 +7197,7 @@
       </p:sp>
       <p:sp>
         <p:nvSpPr>
-          <p:cNvPr id="42" name="TextBox 41"/>
+          <p:cNvPr id="41" name="TextBox 40"/>
           <p:cNvSpPr txBox="1"/>
           <p:nvPr/>
         </p:nvSpPr>
@@ -7478,8 +7342,8 @@
         </p:nvSpPr>
         <p:spPr>
           <a:xfrm>
-            <a:off x="378000" y="208800"/>
-            <a:ext cx="2880000" cy="125999"/>
+            <a:off x="360000" y="288000"/>
+            <a:ext cx="7380000" cy="280800"/>
           </a:xfrm>
           <a:prstGeom prst="rect">
             <a:avLst/>
@@ -7494,13 +7358,13 @@
           <a:p>
             <a:pPr algn="l"/>
             <a:r>
-              <a:rPr sz="850" b="1">
-                <a:solidFill>
-                  <a:srgbClr val="00A888"/>
+              <a:rPr sz="2400" b="1">
+                <a:solidFill>
+                  <a:srgbClr val="12363F"/>
                 </a:solidFill>
                 <a:latin typeface="Malgun Gothic"/>
               </a:rPr>
-              <a:t>CMS PRACTICAL GUIDE</a:t>
+              <a:t>ERP사별 권장 연계 방식</a:t>
             </a:r>
           </a:p>
         </p:txBody>
@@ -7513,8 +7377,8 @@
         </p:nvSpPr>
         <p:spPr>
           <a:xfrm>
-            <a:off x="360000" y="360000"/>
-            <a:ext cx="6840000" cy="280800"/>
+            <a:off x="367200" y="597600"/>
+            <a:ext cx="7380000" cy="162000"/>
           </a:xfrm>
           <a:prstGeom prst="rect">
             <a:avLst/>
@@ -7529,41 +7393,6 @@
           <a:p>
             <a:pPr algn="l"/>
             <a:r>
-              <a:rPr sz="2400" b="1">
-                <a:solidFill>
-                  <a:srgbClr val="12363F"/>
-                </a:solidFill>
-                <a:latin typeface="Malgun Gothic"/>
-              </a:rPr>
-              <a:t>ERP사별 권장 연계 방식</a:t>
-            </a:r>
-          </a:p>
-        </p:txBody>
-      </p:sp>
-      <p:sp>
-        <p:nvSpPr>
-          <p:cNvPr id="6" name="TextBox 5"/>
-          <p:cNvSpPr txBox="1"/>
-          <p:nvPr/>
-        </p:nvSpPr>
-        <p:spPr>
-          <a:xfrm>
-            <a:off x="367200" y="666000"/>
-            <a:ext cx="6840000" cy="162000"/>
-          </a:xfrm>
-          <a:prstGeom prst="rect">
-            <a:avLst/>
-          </a:prstGeom>
-          <a:noFill/>
-        </p:spPr>
-        <p:txBody>
-          <a:bodyPr wrap="none" anchor="ctr">
-            <a:spAutoFit/>
-          </a:bodyPr>
-          <a:lstStyle/>
-          <a:p>
-            <a:pPr algn="l"/>
-            <a:r>
               <a:rPr sz="1050" b="0">
                 <a:solidFill>
                   <a:srgbClr val="5F7179"/>
@@ -7577,7 +7406,7 @@
       </p:sp>
       <p:sp>
         <p:nvSpPr>
-          <p:cNvPr id="7" name="Rectangle 6"/>
+          <p:cNvPr id="6" name="Rectangle 5"/>
           <p:cNvSpPr/>
           <p:nvPr/>
         </p:nvSpPr>
@@ -7620,7 +7449,7 @@
       </p:sp>
       <p:graphicFrame>
         <p:nvGraphicFramePr>
-          <p:cNvPr id="8" name="Table 7"/>
+          <p:cNvPr id="7" name="Table 6"/>
           <p:cNvGraphicFramePr>
             <a:graphicFrameLocks noGrp="1"/>
           </p:cNvGraphicFramePr>
@@ -8212,7 +8041,7 @@
       </p:graphicFrame>
       <p:sp>
         <p:nvSpPr>
-          <p:cNvPr id="9" name="Rounded Rectangle 8"/>
+          <p:cNvPr id="8" name="Rounded Rectangle 7"/>
           <p:cNvSpPr/>
           <p:nvPr/>
         </p:nvSpPr>
@@ -8257,7 +8086,7 @@
       </p:sp>
       <p:sp>
         <p:nvSpPr>
-          <p:cNvPr id="10" name="Rectangle 9"/>
+          <p:cNvPr id="9" name="Rectangle 8"/>
           <p:cNvSpPr/>
           <p:nvPr/>
         </p:nvSpPr>
@@ -8300,7 +8129,7 @@
       </p:sp>
       <p:sp>
         <p:nvSpPr>
-          <p:cNvPr id="11" name="TextBox 10"/>
+          <p:cNvPr id="10" name="TextBox 9"/>
           <p:cNvSpPr txBox="1"/>
           <p:nvPr/>
         </p:nvSpPr>
@@ -8335,7 +8164,7 @@
       </p:sp>
       <p:sp>
         <p:nvSpPr>
-          <p:cNvPr id="12" name="TextBox 11"/>
+          <p:cNvPr id="11" name="TextBox 10"/>
           <p:cNvSpPr txBox="1"/>
           <p:nvPr/>
         </p:nvSpPr>
@@ -8359,7 +8188,7 @@
               <a:spcAft>
                 <a:spcPts val="300"/>
               </a:spcAft>
-              <a:defRPr sz="930">
+              <a:defRPr sz="869">
                 <a:solidFill>
                   <a:srgbClr val="232D34"/>
                 </a:solidFill>
@@ -8375,7 +8204,7 @@
               <a:spcAft>
                 <a:spcPts val="300"/>
               </a:spcAft>
-              <a:defRPr sz="930">
+              <a:defRPr sz="869">
                 <a:solidFill>
                   <a:srgbClr val="232D34"/>
                 </a:solidFill>
@@ -8390,7 +8219,7 @@
       </p:sp>
       <p:sp>
         <p:nvSpPr>
-          <p:cNvPr id="13" name="Rounded Rectangle 12"/>
+          <p:cNvPr id="12" name="Rounded Rectangle 11"/>
           <p:cNvSpPr/>
           <p:nvPr/>
         </p:nvSpPr>
@@ -8435,7 +8264,7 @@
       </p:sp>
       <p:sp>
         <p:nvSpPr>
-          <p:cNvPr id="14" name="Rectangle 13"/>
+          <p:cNvPr id="13" name="Rectangle 12"/>
           <p:cNvSpPr/>
           <p:nvPr/>
         </p:nvSpPr>
@@ -8478,7 +8307,7 @@
       </p:sp>
       <p:sp>
         <p:nvSpPr>
-          <p:cNvPr id="15" name="TextBox 14"/>
+          <p:cNvPr id="14" name="TextBox 13"/>
           <p:cNvSpPr txBox="1"/>
           <p:nvPr/>
         </p:nvSpPr>
@@ -8513,7 +8342,7 @@
       </p:sp>
       <p:sp>
         <p:nvSpPr>
-          <p:cNvPr id="16" name="TextBox 15"/>
+          <p:cNvPr id="15" name="TextBox 14"/>
           <p:cNvSpPr txBox="1"/>
           <p:nvPr/>
         </p:nvSpPr>
@@ -8537,7 +8366,7 @@
               <a:spcAft>
                 <a:spcPts val="300"/>
               </a:spcAft>
-              <a:defRPr sz="930">
+              <a:defRPr sz="869">
                 <a:solidFill>
                   <a:srgbClr val="232D34"/>
                 </a:solidFill>
@@ -8553,7 +8382,7 @@
               <a:spcAft>
                 <a:spcPts val="300"/>
               </a:spcAft>
-              <a:defRPr sz="930">
+              <a:defRPr sz="869">
                 <a:solidFill>
                   <a:srgbClr val="232D34"/>
                 </a:solidFill>
@@ -8568,7 +8397,7 @@
       </p:sp>
       <p:sp>
         <p:nvSpPr>
-          <p:cNvPr id="17" name="TextBox 16"/>
+          <p:cNvPr id="16" name="TextBox 15"/>
           <p:cNvSpPr txBox="1"/>
           <p:nvPr/>
         </p:nvSpPr>
@@ -8603,7 +8432,7 @@
       </p:sp>
       <p:sp>
         <p:nvSpPr>
-          <p:cNvPr id="18" name="TextBox 17"/>
+          <p:cNvPr id="17" name="TextBox 16"/>
           <p:cNvSpPr txBox="1"/>
           <p:nvPr/>
         </p:nvSpPr>
@@ -8748,8 +8577,8 @@
         </p:nvSpPr>
         <p:spPr>
           <a:xfrm>
-            <a:off x="378000" y="208800"/>
-            <a:ext cx="2880000" cy="125999"/>
+            <a:off x="360000" y="288000"/>
+            <a:ext cx="7380000" cy="280800"/>
           </a:xfrm>
           <a:prstGeom prst="rect">
             <a:avLst/>
@@ -8764,13 +8593,13 @@
           <a:p>
             <a:pPr algn="l"/>
             <a:r>
-              <a:rPr sz="850" b="1">
-                <a:solidFill>
-                  <a:srgbClr val="00A888"/>
+              <a:rPr sz="2400" b="1">
+                <a:solidFill>
+                  <a:srgbClr val="12363F"/>
                 </a:solidFill>
                 <a:latin typeface="Malgun Gothic"/>
               </a:rPr>
-              <a:t>CMS PRACTICAL GUIDE</a:t>
+              <a:t>더존 아마란스 10 연계 안내</a:t>
             </a:r>
           </a:p>
         </p:txBody>
@@ -8783,8 +8612,8 @@
         </p:nvSpPr>
         <p:spPr>
           <a:xfrm>
-            <a:off x="360000" y="360000"/>
-            <a:ext cx="6840000" cy="280800"/>
+            <a:off x="367200" y="597600"/>
+            <a:ext cx="7380000" cy="162000"/>
           </a:xfrm>
           <a:prstGeom prst="rect">
             <a:avLst/>
@@ -8799,41 +8628,6 @@
           <a:p>
             <a:pPr algn="l"/>
             <a:r>
-              <a:rPr sz="2400" b="1">
-                <a:solidFill>
-                  <a:srgbClr val="12363F"/>
-                </a:solidFill>
-                <a:latin typeface="Malgun Gothic"/>
-              </a:rPr>
-              <a:t>더존 아마란스 10 연계 안내</a:t>
-            </a:r>
-          </a:p>
-        </p:txBody>
-      </p:sp>
-      <p:sp>
-        <p:nvSpPr>
-          <p:cNvPr id="6" name="TextBox 5"/>
-          <p:cNvSpPr txBox="1"/>
-          <p:nvPr/>
-        </p:nvSpPr>
-        <p:spPr>
-          <a:xfrm>
-            <a:off x="367200" y="666000"/>
-            <a:ext cx="6840000" cy="162000"/>
-          </a:xfrm>
-          <a:prstGeom prst="rect">
-            <a:avLst/>
-          </a:prstGeom>
-          <a:noFill/>
-        </p:spPr>
-        <p:txBody>
-          <a:bodyPr wrap="none" anchor="ctr">
-            <a:spAutoFit/>
-          </a:bodyPr>
-          <a:lstStyle/>
-          <a:p>
-            <a:pPr algn="l"/>
-            <a:r>
               <a:rPr sz="1050" b="0">
                 <a:solidFill>
                   <a:srgbClr val="5F7179"/>
@@ -8847,7 +8641,7 @@
       </p:sp>
       <p:sp>
         <p:nvSpPr>
-          <p:cNvPr id="7" name="Rectangle 6"/>
+          <p:cNvPr id="6" name="Rectangle 5"/>
           <p:cNvSpPr/>
           <p:nvPr/>
         </p:nvSpPr>
@@ -8890,7 +8684,7 @@
       </p:sp>
       <p:sp>
         <p:nvSpPr>
-          <p:cNvPr id="8" name="Rounded Rectangle 7"/>
+          <p:cNvPr id="7" name="Rounded Rectangle 6"/>
           <p:cNvSpPr/>
           <p:nvPr/>
         </p:nvSpPr>
@@ -8933,7 +8727,7 @@
       </p:sp>
       <p:sp>
         <p:nvSpPr>
-          <p:cNvPr id="9" name="TextBox 8"/>
+          <p:cNvPr id="8" name="TextBox 7"/>
           <p:cNvSpPr txBox="1"/>
           <p:nvPr/>
         </p:nvSpPr>
@@ -8968,14 +8762,14 @@
       </p:sp>
       <p:sp>
         <p:nvSpPr>
-          <p:cNvPr id="10" name="TextBox 9"/>
+          <p:cNvPr id="9" name="TextBox 8"/>
           <p:cNvSpPr txBox="1"/>
           <p:nvPr/>
         </p:nvSpPr>
         <p:spPr>
           <a:xfrm>
-            <a:off x="396000" y="1422000"/>
-            <a:ext cx="3780000" cy="270000"/>
+            <a:off x="396000" y="1386000"/>
+            <a:ext cx="4824000" cy="324000"/>
           </a:xfrm>
           <a:prstGeom prst="rect">
             <a:avLst/>
@@ -8990,7 +8784,7 @@
           <a:p>
             <a:pPr algn="l"/>
             <a:r>
-              <a:rPr sz="1600" b="1">
+              <a:rPr sz="1350" b="1">
                 <a:solidFill>
                   <a:srgbClr val="12363F"/>
                 </a:solidFill>
@@ -9003,14 +8797,14 @@
       </p:sp>
       <p:sp>
         <p:nvSpPr>
-          <p:cNvPr id="11" name="Rounded Rectangle 10"/>
+          <p:cNvPr id="10" name="Rounded Rectangle 9"/>
           <p:cNvSpPr/>
           <p:nvPr/>
         </p:nvSpPr>
         <p:spPr>
           <a:xfrm>
             <a:off x="396000" y="1835999"/>
-            <a:ext cx="2412000" cy="792000"/>
+            <a:ext cx="2412000" cy="917999"/>
           </a:xfrm>
           <a:prstGeom prst="roundRect">
             <a:avLst/>
@@ -9048,7 +8842,7 @@
       </p:sp>
       <p:sp>
         <p:nvSpPr>
-          <p:cNvPr id="12" name="Rectangle 11"/>
+          <p:cNvPr id="11" name="Rectangle 10"/>
           <p:cNvSpPr/>
           <p:nvPr/>
         </p:nvSpPr>
@@ -9091,7 +8885,7 @@
       </p:sp>
       <p:sp>
         <p:nvSpPr>
-          <p:cNvPr id="13" name="TextBox 12"/>
+          <p:cNvPr id="12" name="TextBox 11"/>
           <p:cNvSpPr txBox="1"/>
           <p:nvPr/>
         </p:nvSpPr>
@@ -9126,14 +8920,14 @@
       </p:sp>
       <p:sp>
         <p:nvSpPr>
-          <p:cNvPr id="14" name="TextBox 13"/>
+          <p:cNvPr id="13" name="TextBox 12"/>
           <p:cNvSpPr txBox="1"/>
           <p:nvPr/>
         </p:nvSpPr>
         <p:spPr>
           <a:xfrm>
             <a:off x="558000" y="2206800"/>
-            <a:ext cx="2088000" cy="349200"/>
+            <a:ext cx="2088000" cy="475199"/>
           </a:xfrm>
           <a:prstGeom prst="rect">
             <a:avLst/>
@@ -9150,7 +8944,7 @@
               <a:spcAft>
                 <a:spcPts val="300"/>
               </a:spcAft>
-              <a:defRPr sz="930">
+              <a:defRPr sz="840">
                 <a:solidFill>
                   <a:srgbClr val="232D34"/>
                 </a:solidFill>
@@ -9166,7 +8960,7 @@
               <a:spcAft>
                 <a:spcPts val="300"/>
               </a:spcAft>
-              <a:defRPr sz="930">
+              <a:defRPr sz="840">
                 <a:solidFill>
                   <a:srgbClr val="232D34"/>
                 </a:solidFill>
@@ -9182,7 +8976,7 @@
               <a:spcAft>
                 <a:spcPts val="300"/>
               </a:spcAft>
-              <a:defRPr sz="930">
+              <a:defRPr sz="840">
                 <a:solidFill>
                   <a:srgbClr val="232D34"/>
                 </a:solidFill>
@@ -9197,14 +8991,14 @@
       </p:sp>
       <p:sp>
         <p:nvSpPr>
-          <p:cNvPr id="15" name="Rounded Rectangle 14"/>
+          <p:cNvPr id="14" name="Rounded Rectangle 13"/>
           <p:cNvSpPr/>
           <p:nvPr/>
         </p:nvSpPr>
         <p:spPr>
           <a:xfrm>
             <a:off x="2951999" y="1835999"/>
-            <a:ext cx="2412000" cy="792000"/>
+            <a:ext cx="2412000" cy="917999"/>
           </a:xfrm>
           <a:prstGeom prst="roundRect">
             <a:avLst/>
@@ -9242,7 +9036,7 @@
       </p:sp>
       <p:sp>
         <p:nvSpPr>
-          <p:cNvPr id="16" name="Rectangle 15"/>
+          <p:cNvPr id="15" name="Rectangle 14"/>
           <p:cNvSpPr/>
           <p:nvPr/>
         </p:nvSpPr>
@@ -9285,7 +9079,7 @@
       </p:sp>
       <p:sp>
         <p:nvSpPr>
-          <p:cNvPr id="17" name="TextBox 16"/>
+          <p:cNvPr id="16" name="TextBox 15"/>
           <p:cNvSpPr txBox="1"/>
           <p:nvPr/>
         </p:nvSpPr>
@@ -9320,14 +9114,14 @@
       </p:sp>
       <p:sp>
         <p:nvSpPr>
-          <p:cNvPr id="18" name="TextBox 17"/>
+          <p:cNvPr id="17" name="TextBox 16"/>
           <p:cNvSpPr txBox="1"/>
           <p:nvPr/>
         </p:nvSpPr>
         <p:spPr>
           <a:xfrm>
             <a:off x="3113999" y="2206800"/>
-            <a:ext cx="2088000" cy="349200"/>
+            <a:ext cx="2088000" cy="475199"/>
           </a:xfrm>
           <a:prstGeom prst="rect">
             <a:avLst/>
@@ -9344,7 +9138,7 @@
               <a:spcAft>
                 <a:spcPts val="300"/>
               </a:spcAft>
-              <a:defRPr sz="930">
+              <a:defRPr sz="840">
                 <a:solidFill>
                   <a:srgbClr val="232D34"/>
                 </a:solidFill>
@@ -9360,7 +9154,7 @@
               <a:spcAft>
                 <a:spcPts val="300"/>
               </a:spcAft>
-              <a:defRPr sz="930">
+              <a:defRPr sz="840">
                 <a:solidFill>
                   <a:srgbClr val="232D34"/>
                 </a:solidFill>
@@ -9376,7 +9170,7 @@
               <a:spcAft>
                 <a:spcPts val="300"/>
               </a:spcAft>
-              <a:defRPr sz="930">
+              <a:defRPr sz="840">
                 <a:solidFill>
                   <a:srgbClr val="232D34"/>
                 </a:solidFill>
@@ -9391,14 +9185,14 @@
       </p:sp>
       <p:sp>
         <p:nvSpPr>
-          <p:cNvPr id="19" name="Rounded Rectangle 18"/>
+          <p:cNvPr id="18" name="Rounded Rectangle 17"/>
           <p:cNvSpPr/>
           <p:nvPr/>
         </p:nvSpPr>
         <p:spPr>
           <a:xfrm>
-            <a:off x="396000" y="2790000"/>
-            <a:ext cx="4968000" cy="792000"/>
+            <a:off x="396000" y="2898000"/>
+            <a:ext cx="4968000" cy="917999"/>
           </a:xfrm>
           <a:prstGeom prst="roundRect">
             <a:avLst/>
@@ -9436,13 +9230,13 @@
       </p:sp>
       <p:sp>
         <p:nvSpPr>
-          <p:cNvPr id="20" name="Rectangle 19"/>
+          <p:cNvPr id="19" name="Rectangle 18"/>
           <p:cNvSpPr/>
           <p:nvPr/>
         </p:nvSpPr>
         <p:spPr>
           <a:xfrm>
-            <a:off x="396000" y="2790000"/>
+            <a:off x="396000" y="2898000"/>
             <a:ext cx="4968000" cy="46800"/>
           </a:xfrm>
           <a:prstGeom prst="rect">
@@ -9479,13 +9273,13 @@
       </p:sp>
       <p:sp>
         <p:nvSpPr>
-          <p:cNvPr id="21" name="TextBox 20"/>
+          <p:cNvPr id="20" name="TextBox 19"/>
           <p:cNvSpPr txBox="1"/>
           <p:nvPr/>
         </p:nvSpPr>
         <p:spPr>
           <a:xfrm>
-            <a:off x="558000" y="2912400"/>
+            <a:off x="558000" y="3020400"/>
             <a:ext cx="4644000" cy="172800"/>
           </a:xfrm>
           <a:prstGeom prst="rect">
@@ -9514,14 +9308,14 @@
       </p:sp>
       <p:sp>
         <p:nvSpPr>
-          <p:cNvPr id="22" name="TextBox 21"/>
+          <p:cNvPr id="21" name="TextBox 20"/>
           <p:cNvSpPr txBox="1"/>
           <p:nvPr/>
         </p:nvSpPr>
         <p:spPr>
           <a:xfrm>
-            <a:off x="558000" y="3160800"/>
-            <a:ext cx="4644000" cy="349200"/>
+            <a:off x="558000" y="3268800"/>
+            <a:ext cx="4644000" cy="475199"/>
           </a:xfrm>
           <a:prstGeom prst="rect">
             <a:avLst/>
@@ -9538,7 +9332,7 @@
               <a:spcAft>
                 <a:spcPts val="300"/>
               </a:spcAft>
-              <a:defRPr sz="930">
+              <a:defRPr sz="840">
                 <a:solidFill>
                   <a:srgbClr val="232D34"/>
                 </a:solidFill>
@@ -9554,7 +9348,7 @@
               <a:spcAft>
                 <a:spcPts val="300"/>
               </a:spcAft>
-              <a:defRPr sz="930">
+              <a:defRPr sz="840">
                 <a:solidFill>
                   <a:srgbClr val="232D34"/>
                 </a:solidFill>
@@ -9570,7 +9364,7 @@
               <a:spcAft>
                 <a:spcPts val="300"/>
               </a:spcAft>
-              <a:defRPr sz="930">
+              <a:defRPr sz="840">
                 <a:solidFill>
                   <a:srgbClr val="232D34"/>
                 </a:solidFill>
@@ -9585,14 +9379,14 @@
       </p:sp>
       <p:sp>
         <p:nvSpPr>
-          <p:cNvPr id="23" name="Rounded Rectangle 22"/>
+          <p:cNvPr id="22" name="Rounded Rectangle 21"/>
           <p:cNvSpPr/>
           <p:nvPr/>
         </p:nvSpPr>
         <p:spPr>
           <a:xfrm>
-            <a:off x="5652000" y="1098000"/>
-            <a:ext cx="3024000" cy="2592000"/>
+            <a:off x="5652000" y="1170000"/>
+            <a:ext cx="3024000" cy="2718000"/>
           </a:xfrm>
           <a:prstGeom prst="roundRect">
             <a:avLst/>
@@ -9630,7 +9424,7 @@
       </p:sp>
       <p:pic>
         <p:nvPicPr>
-          <p:cNvPr id="24" name="Picture 23" descr="corp_card_1.png"/>
+          <p:cNvPr id="23" name="Picture 22" descr="corp_card_1.png"/>
           <p:cNvPicPr>
             <a:picLocks noChangeAspect="1"/>
           </p:cNvPicPr>
@@ -9644,7 +9438,7 @@
         </p:blipFill>
         <p:spPr>
           <a:xfrm>
-            <a:off x="5778000" y="1554866"/>
+            <a:off x="5778000" y="1662866"/>
             <a:ext cx="2772000" cy="1678268"/>
           </a:xfrm>
           <a:prstGeom prst="rect">
@@ -9654,7 +9448,7 @@
       </p:pic>
       <p:sp>
         <p:nvSpPr>
-          <p:cNvPr id="25" name="TextBox 24"/>
+          <p:cNvPr id="24" name="TextBox 23"/>
           <p:cNvSpPr txBox="1"/>
           <p:nvPr/>
         </p:nvSpPr>
@@ -9689,7 +9483,7 @@
       </p:sp>
       <p:sp>
         <p:nvSpPr>
-          <p:cNvPr id="26" name="TextBox 25"/>
+          <p:cNvPr id="25" name="TextBox 24"/>
           <p:cNvSpPr txBox="1"/>
           <p:nvPr/>
         </p:nvSpPr>
@@ -9834,8 +9628,8 @@
         </p:nvSpPr>
         <p:spPr>
           <a:xfrm>
-            <a:off x="378000" y="208800"/>
-            <a:ext cx="2880000" cy="125999"/>
+            <a:off x="360000" y="288000"/>
+            <a:ext cx="7380000" cy="280800"/>
           </a:xfrm>
           <a:prstGeom prst="rect">
             <a:avLst/>
@@ -9850,13 +9644,13 @@
           <a:p>
             <a:pPr algn="l"/>
             <a:r>
-              <a:rPr sz="850" b="1">
-                <a:solidFill>
-                  <a:srgbClr val="00A888"/>
+              <a:rPr sz="2400" b="1">
+                <a:solidFill>
+                  <a:srgbClr val="12363F"/>
                 </a:solidFill>
                 <a:latin typeface="Malgun Gothic"/>
               </a:rPr>
-              <a:t>CMS PRACTICAL GUIDE</a:t>
+              <a:t>더존 옴니이솔 10 연계 안내</a:t>
             </a:r>
           </a:p>
         </p:txBody>
@@ -9869,8 +9663,8 @@
         </p:nvSpPr>
         <p:spPr>
           <a:xfrm>
-            <a:off x="360000" y="360000"/>
-            <a:ext cx="6840000" cy="280800"/>
+            <a:off x="367200" y="597600"/>
+            <a:ext cx="7380000" cy="162000"/>
           </a:xfrm>
           <a:prstGeom prst="rect">
             <a:avLst/>
@@ -9885,41 +9679,6 @@
           <a:p>
             <a:pPr algn="l"/>
             <a:r>
-              <a:rPr sz="2400" b="1">
-                <a:solidFill>
-                  <a:srgbClr val="12363F"/>
-                </a:solidFill>
-                <a:latin typeface="Malgun Gothic"/>
-              </a:rPr>
-              <a:t>더존 옴니이솔 10 연계 안내</a:t>
-            </a:r>
-          </a:p>
-        </p:txBody>
-      </p:sp>
-      <p:sp>
-        <p:nvSpPr>
-          <p:cNvPr id="6" name="TextBox 5"/>
-          <p:cNvSpPr txBox="1"/>
-          <p:nvPr/>
-        </p:nvSpPr>
-        <p:spPr>
-          <a:xfrm>
-            <a:off x="367200" y="666000"/>
-            <a:ext cx="6840000" cy="162000"/>
-          </a:xfrm>
-          <a:prstGeom prst="rect">
-            <a:avLst/>
-          </a:prstGeom>
-          <a:noFill/>
-        </p:spPr>
-        <p:txBody>
-          <a:bodyPr wrap="none" anchor="ctr">
-            <a:spAutoFit/>
-          </a:bodyPr>
-          <a:lstStyle/>
-          <a:p>
-            <a:pPr algn="l"/>
-            <a:r>
               <a:rPr sz="1050" b="0">
                 <a:solidFill>
                   <a:srgbClr val="5F7179"/>
@@ -9933,7 +9692,7 @@
       </p:sp>
       <p:sp>
         <p:nvSpPr>
-          <p:cNvPr id="7" name="Rectangle 6"/>
+          <p:cNvPr id="6" name="Rectangle 5"/>
           <p:cNvSpPr/>
           <p:nvPr/>
         </p:nvSpPr>
@@ -9976,7 +9735,7 @@
       </p:sp>
       <p:sp>
         <p:nvSpPr>
-          <p:cNvPr id="8" name="Rounded Rectangle 7"/>
+          <p:cNvPr id="7" name="Rounded Rectangle 6"/>
           <p:cNvSpPr/>
           <p:nvPr/>
         </p:nvSpPr>
@@ -10019,7 +9778,7 @@
       </p:sp>
       <p:sp>
         <p:nvSpPr>
-          <p:cNvPr id="9" name="TextBox 8"/>
+          <p:cNvPr id="8" name="TextBox 7"/>
           <p:cNvSpPr txBox="1"/>
           <p:nvPr/>
         </p:nvSpPr>
@@ -10054,14 +9813,14 @@
       </p:sp>
       <p:sp>
         <p:nvSpPr>
-          <p:cNvPr id="10" name="TextBox 9"/>
+          <p:cNvPr id="9" name="TextBox 8"/>
           <p:cNvSpPr txBox="1"/>
           <p:nvPr/>
         </p:nvSpPr>
         <p:spPr>
           <a:xfrm>
-            <a:off x="396000" y="1422000"/>
-            <a:ext cx="3780000" cy="270000"/>
+            <a:off x="396000" y="1386000"/>
+            <a:ext cx="4824000" cy="324000"/>
           </a:xfrm>
           <a:prstGeom prst="rect">
             <a:avLst/>
@@ -10076,7 +9835,7 @@
           <a:p>
             <a:pPr algn="l"/>
             <a:r>
-              <a:rPr sz="1600" b="1">
+              <a:rPr sz="1350" b="1">
                 <a:solidFill>
                   <a:srgbClr val="12363F"/>
                 </a:solidFill>
@@ -10089,14 +9848,14 @@
       </p:sp>
       <p:sp>
         <p:nvSpPr>
-          <p:cNvPr id="11" name="Rounded Rectangle 10"/>
+          <p:cNvPr id="10" name="Rounded Rectangle 9"/>
           <p:cNvSpPr/>
           <p:nvPr/>
         </p:nvSpPr>
         <p:spPr>
           <a:xfrm>
             <a:off x="396000" y="1835999"/>
-            <a:ext cx="2412000" cy="792000"/>
+            <a:ext cx="2412000" cy="917999"/>
           </a:xfrm>
           <a:prstGeom prst="roundRect">
             <a:avLst/>
@@ -10134,7 +9893,7 @@
       </p:sp>
       <p:sp>
         <p:nvSpPr>
-          <p:cNvPr id="12" name="Rectangle 11"/>
+          <p:cNvPr id="11" name="Rectangle 10"/>
           <p:cNvSpPr/>
           <p:nvPr/>
         </p:nvSpPr>
@@ -10177,7 +9936,7 @@
       </p:sp>
       <p:sp>
         <p:nvSpPr>
-          <p:cNvPr id="13" name="TextBox 12"/>
+          <p:cNvPr id="12" name="TextBox 11"/>
           <p:cNvSpPr txBox="1"/>
           <p:nvPr/>
         </p:nvSpPr>
@@ -10212,14 +9971,14 @@
       </p:sp>
       <p:sp>
         <p:nvSpPr>
-          <p:cNvPr id="14" name="TextBox 13"/>
+          <p:cNvPr id="13" name="TextBox 12"/>
           <p:cNvSpPr txBox="1"/>
           <p:nvPr/>
         </p:nvSpPr>
         <p:spPr>
           <a:xfrm>
             <a:off x="558000" y="2206800"/>
-            <a:ext cx="2088000" cy="349200"/>
+            <a:ext cx="2088000" cy="475199"/>
           </a:xfrm>
           <a:prstGeom prst="rect">
             <a:avLst/>
@@ -10236,7 +9995,7 @@
               <a:spcAft>
                 <a:spcPts val="300"/>
               </a:spcAft>
-              <a:defRPr sz="930">
+              <a:defRPr sz="840">
                 <a:solidFill>
                   <a:srgbClr val="232D34"/>
                 </a:solidFill>
@@ -10252,7 +10011,7 @@
               <a:spcAft>
                 <a:spcPts val="300"/>
               </a:spcAft>
-              <a:defRPr sz="930">
+              <a:defRPr sz="840">
                 <a:solidFill>
                   <a:srgbClr val="232D34"/>
                 </a:solidFill>
@@ -10268,7 +10027,7 @@
               <a:spcAft>
                 <a:spcPts val="300"/>
               </a:spcAft>
-              <a:defRPr sz="930">
+              <a:defRPr sz="840">
                 <a:solidFill>
                   <a:srgbClr val="232D34"/>
                 </a:solidFill>
@@ -10283,14 +10042,14 @@
       </p:sp>
       <p:sp>
         <p:nvSpPr>
-          <p:cNvPr id="15" name="Rounded Rectangle 14"/>
+          <p:cNvPr id="14" name="Rounded Rectangle 13"/>
           <p:cNvSpPr/>
           <p:nvPr/>
         </p:nvSpPr>
         <p:spPr>
           <a:xfrm>
             <a:off x="2951999" y="1835999"/>
-            <a:ext cx="2412000" cy="792000"/>
+            <a:ext cx="2412000" cy="917999"/>
           </a:xfrm>
           <a:prstGeom prst="roundRect">
             <a:avLst/>
@@ -10328,7 +10087,7 @@
       </p:sp>
       <p:sp>
         <p:nvSpPr>
-          <p:cNvPr id="16" name="Rectangle 15"/>
+          <p:cNvPr id="15" name="Rectangle 14"/>
           <p:cNvSpPr/>
           <p:nvPr/>
         </p:nvSpPr>
@@ -10371,7 +10130,7 @@
       </p:sp>
       <p:sp>
         <p:nvSpPr>
-          <p:cNvPr id="17" name="TextBox 16"/>
+          <p:cNvPr id="16" name="TextBox 15"/>
           <p:cNvSpPr txBox="1"/>
           <p:nvPr/>
         </p:nvSpPr>
@@ -10406,14 +10165,14 @@
       </p:sp>
       <p:sp>
         <p:nvSpPr>
-          <p:cNvPr id="18" name="TextBox 17"/>
+          <p:cNvPr id="17" name="TextBox 16"/>
           <p:cNvSpPr txBox="1"/>
           <p:nvPr/>
         </p:nvSpPr>
         <p:spPr>
           <a:xfrm>
             <a:off x="3113999" y="2206800"/>
-            <a:ext cx="2088000" cy="349200"/>
+            <a:ext cx="2088000" cy="475199"/>
           </a:xfrm>
           <a:prstGeom prst="rect">
             <a:avLst/>
@@ -10430,7 +10189,7 @@
               <a:spcAft>
                 <a:spcPts val="300"/>
               </a:spcAft>
-              <a:defRPr sz="930">
+              <a:defRPr sz="840">
                 <a:solidFill>
                   <a:srgbClr val="232D34"/>
                 </a:solidFill>
@@ -10446,7 +10205,7 @@
               <a:spcAft>
                 <a:spcPts val="300"/>
               </a:spcAft>
-              <a:defRPr sz="930">
+              <a:defRPr sz="840">
                 <a:solidFill>
                   <a:srgbClr val="232D34"/>
                 </a:solidFill>
@@ -10462,7 +10221,7 @@
               <a:spcAft>
                 <a:spcPts val="300"/>
               </a:spcAft>
-              <a:defRPr sz="930">
+              <a:defRPr sz="840">
                 <a:solidFill>
                   <a:srgbClr val="232D34"/>
                 </a:solidFill>
@@ -10477,14 +10236,14 @@
       </p:sp>
       <p:sp>
         <p:nvSpPr>
-          <p:cNvPr id="19" name="Rounded Rectangle 18"/>
+          <p:cNvPr id="18" name="Rounded Rectangle 17"/>
           <p:cNvSpPr/>
           <p:nvPr/>
         </p:nvSpPr>
         <p:spPr>
           <a:xfrm>
-            <a:off x="396000" y="2790000"/>
-            <a:ext cx="4968000" cy="792000"/>
+            <a:off x="396000" y="2898000"/>
+            <a:ext cx="4968000" cy="917999"/>
           </a:xfrm>
           <a:prstGeom prst="roundRect">
             <a:avLst/>
@@ -10522,13 +10281,13 @@
       </p:sp>
       <p:sp>
         <p:nvSpPr>
-          <p:cNvPr id="20" name="Rectangle 19"/>
+          <p:cNvPr id="19" name="Rectangle 18"/>
           <p:cNvSpPr/>
           <p:nvPr/>
         </p:nvSpPr>
         <p:spPr>
           <a:xfrm>
-            <a:off x="396000" y="2790000"/>
+            <a:off x="396000" y="2898000"/>
             <a:ext cx="4968000" cy="46800"/>
           </a:xfrm>
           <a:prstGeom prst="rect">
@@ -10565,13 +10324,13 @@
       </p:sp>
       <p:sp>
         <p:nvSpPr>
-          <p:cNvPr id="21" name="TextBox 20"/>
+          <p:cNvPr id="20" name="TextBox 19"/>
           <p:cNvSpPr txBox="1"/>
           <p:nvPr/>
         </p:nvSpPr>
         <p:spPr>
           <a:xfrm>
-            <a:off x="558000" y="2912400"/>
+            <a:off x="558000" y="3020400"/>
             <a:ext cx="4644000" cy="172800"/>
           </a:xfrm>
           <a:prstGeom prst="rect">
@@ -10600,14 +10359,14 @@
       </p:sp>
       <p:sp>
         <p:nvSpPr>
-          <p:cNvPr id="22" name="TextBox 21"/>
+          <p:cNvPr id="21" name="TextBox 20"/>
           <p:cNvSpPr txBox="1"/>
           <p:nvPr/>
         </p:nvSpPr>
         <p:spPr>
           <a:xfrm>
-            <a:off x="558000" y="3160800"/>
-            <a:ext cx="4644000" cy="349200"/>
+            <a:off x="558000" y="3268800"/>
+            <a:ext cx="4644000" cy="475199"/>
           </a:xfrm>
           <a:prstGeom prst="rect">
             <a:avLst/>
@@ -10624,7 +10383,7 @@
               <a:spcAft>
                 <a:spcPts val="300"/>
               </a:spcAft>
-              <a:defRPr sz="930">
+              <a:defRPr sz="840">
                 <a:solidFill>
                   <a:srgbClr val="232D34"/>
                 </a:solidFill>
@@ -10640,7 +10399,7 @@
               <a:spcAft>
                 <a:spcPts val="300"/>
               </a:spcAft>
-              <a:defRPr sz="930">
+              <a:defRPr sz="840">
                 <a:solidFill>
                   <a:srgbClr val="232D34"/>
                 </a:solidFill>
@@ -10656,7 +10415,7 @@
               <a:spcAft>
                 <a:spcPts val="300"/>
               </a:spcAft>
-              <a:defRPr sz="930">
+              <a:defRPr sz="840">
                 <a:solidFill>
                   <a:srgbClr val="232D34"/>
                 </a:solidFill>
@@ -10671,14 +10430,14 @@
       </p:sp>
       <p:sp>
         <p:nvSpPr>
-          <p:cNvPr id="23" name="Rounded Rectangle 22"/>
+          <p:cNvPr id="22" name="Rounded Rectangle 21"/>
           <p:cNvSpPr/>
           <p:nvPr/>
         </p:nvSpPr>
         <p:spPr>
           <a:xfrm>
-            <a:off x="5652000" y="1098000"/>
-            <a:ext cx="3024000" cy="2592000"/>
+            <a:off x="5652000" y="1170000"/>
+            <a:ext cx="3024000" cy="2718000"/>
           </a:xfrm>
           <a:prstGeom prst="roundRect">
             <a:avLst/>
@@ -10716,7 +10475,7 @@
       </p:sp>
       <p:pic>
         <p:nvPicPr>
-          <p:cNvPr id="24" name="Picture 23" descr="bulk_transfer.png"/>
+          <p:cNvPr id="23" name="Picture 22" descr="bulk_transfer.png"/>
           <p:cNvPicPr>
             <a:picLocks noChangeAspect="1"/>
           </p:cNvPicPr>
@@ -10730,7 +10489,7 @@
         </p:blipFill>
         <p:spPr>
           <a:xfrm>
-            <a:off x="5778000" y="1650782"/>
+            <a:off x="5778000" y="1758782"/>
             <a:ext cx="2772000" cy="1486435"/>
           </a:xfrm>
           <a:prstGeom prst="rect">
@@ -10740,7 +10499,7 @@
       </p:pic>
       <p:sp>
         <p:nvSpPr>
-          <p:cNvPr id="25" name="TextBox 24"/>
+          <p:cNvPr id="24" name="TextBox 23"/>
           <p:cNvSpPr txBox="1"/>
           <p:nvPr/>
         </p:nvSpPr>
@@ -10775,7 +10534,7 @@
       </p:sp>
       <p:sp>
         <p:nvSpPr>
-          <p:cNvPr id="26" name="TextBox 25"/>
+          <p:cNvPr id="25" name="TextBox 24"/>
           <p:cNvSpPr txBox="1"/>
           <p:nvPr/>
         </p:nvSpPr>
@@ -10920,8 +10679,8 @@
         </p:nvSpPr>
         <p:spPr>
           <a:xfrm>
-            <a:off x="378000" y="208800"/>
-            <a:ext cx="2880000" cy="125999"/>
+            <a:off x="360000" y="288000"/>
+            <a:ext cx="7380000" cy="280800"/>
           </a:xfrm>
           <a:prstGeom prst="rect">
             <a:avLst/>
@@ -10936,13 +10695,13 @@
           <a:p>
             <a:pPr algn="l"/>
             <a:r>
-              <a:rPr sz="850" b="1">
-                <a:solidFill>
-                  <a:srgbClr val="00A888"/>
+              <a:rPr sz="2400" b="1">
+                <a:solidFill>
+                  <a:srgbClr val="12363F"/>
                 </a:solidFill>
                 <a:latin typeface="Malgun Gothic"/>
               </a:rPr>
-              <a:t>CMS PRACTICAL GUIDE</a:t>
+              <a:t>영림원 연계 안내</a:t>
             </a:r>
           </a:p>
         </p:txBody>
@@ -10955,8 +10714,8 @@
         </p:nvSpPr>
         <p:spPr>
           <a:xfrm>
-            <a:off x="360000" y="360000"/>
-            <a:ext cx="6840000" cy="280800"/>
+            <a:off x="367200" y="597600"/>
+            <a:ext cx="7380000" cy="162000"/>
           </a:xfrm>
           <a:prstGeom prst="rect">
             <a:avLst/>
@@ -10971,41 +10730,6 @@
           <a:p>
             <a:pPr algn="l"/>
             <a:r>
-              <a:rPr sz="2400" b="1">
-                <a:solidFill>
-                  <a:srgbClr val="12363F"/>
-                </a:solidFill>
-                <a:latin typeface="Malgun Gothic"/>
-              </a:rPr>
-              <a:t>영림원 연계 안내</a:t>
-            </a:r>
-          </a:p>
-        </p:txBody>
-      </p:sp>
-      <p:sp>
-        <p:nvSpPr>
-          <p:cNvPr id="6" name="TextBox 5"/>
-          <p:cNvSpPr txBox="1"/>
-          <p:nvPr/>
-        </p:nvSpPr>
-        <p:spPr>
-          <a:xfrm>
-            <a:off x="367200" y="666000"/>
-            <a:ext cx="6840000" cy="162000"/>
-          </a:xfrm>
-          <a:prstGeom prst="rect">
-            <a:avLst/>
-          </a:prstGeom>
-          <a:noFill/>
-        </p:spPr>
-        <p:txBody>
-          <a:bodyPr wrap="none" anchor="ctr">
-            <a:spAutoFit/>
-          </a:bodyPr>
-          <a:lstStyle/>
-          <a:p>
-            <a:pPr algn="l"/>
-            <a:r>
               <a:rPr sz="1050" b="0">
                 <a:solidFill>
                   <a:srgbClr val="5F7179"/>
@@ -11019,7 +10743,7 @@
       </p:sp>
       <p:sp>
         <p:nvSpPr>
-          <p:cNvPr id="7" name="Rectangle 6"/>
+          <p:cNvPr id="6" name="Rectangle 5"/>
           <p:cNvSpPr/>
           <p:nvPr/>
         </p:nvSpPr>
@@ -11062,7 +10786,7 @@
       </p:sp>
       <p:sp>
         <p:nvSpPr>
-          <p:cNvPr id="8" name="Rounded Rectangle 7"/>
+          <p:cNvPr id="7" name="Rounded Rectangle 6"/>
           <p:cNvSpPr/>
           <p:nvPr/>
         </p:nvSpPr>
@@ -11105,7 +10829,7 @@
       </p:sp>
       <p:sp>
         <p:nvSpPr>
-          <p:cNvPr id="9" name="TextBox 8"/>
+          <p:cNvPr id="8" name="TextBox 7"/>
           <p:cNvSpPr txBox="1"/>
           <p:nvPr/>
         </p:nvSpPr>
@@ -11140,14 +10864,14 @@
       </p:sp>
       <p:sp>
         <p:nvSpPr>
-          <p:cNvPr id="10" name="TextBox 9"/>
+          <p:cNvPr id="9" name="TextBox 8"/>
           <p:cNvSpPr txBox="1"/>
           <p:nvPr/>
         </p:nvSpPr>
         <p:spPr>
           <a:xfrm>
-            <a:off x="396000" y="1422000"/>
-            <a:ext cx="3780000" cy="270000"/>
+            <a:off x="396000" y="1386000"/>
+            <a:ext cx="4824000" cy="324000"/>
           </a:xfrm>
           <a:prstGeom prst="rect">
             <a:avLst/>
@@ -11162,7 +10886,7 @@
           <a:p>
             <a:pPr algn="l"/>
             <a:r>
-              <a:rPr sz="1600" b="1">
+              <a:rPr sz="1350" b="1">
                 <a:solidFill>
                   <a:srgbClr val="12363F"/>
                 </a:solidFill>
@@ -11175,14 +10899,14 @@
       </p:sp>
       <p:sp>
         <p:nvSpPr>
-          <p:cNvPr id="11" name="Rounded Rectangle 10"/>
+          <p:cNvPr id="10" name="Rounded Rectangle 9"/>
           <p:cNvSpPr/>
           <p:nvPr/>
         </p:nvSpPr>
         <p:spPr>
           <a:xfrm>
             <a:off x="396000" y="1835999"/>
-            <a:ext cx="2412000" cy="792000"/>
+            <a:ext cx="2412000" cy="917999"/>
           </a:xfrm>
           <a:prstGeom prst="roundRect">
             <a:avLst/>
@@ -11220,7 +10944,7 @@
       </p:sp>
       <p:sp>
         <p:nvSpPr>
-          <p:cNvPr id="12" name="Rectangle 11"/>
+          <p:cNvPr id="11" name="Rectangle 10"/>
           <p:cNvSpPr/>
           <p:nvPr/>
         </p:nvSpPr>
@@ -11263,7 +10987,7 @@
       </p:sp>
       <p:sp>
         <p:nvSpPr>
-          <p:cNvPr id="13" name="TextBox 12"/>
+          <p:cNvPr id="12" name="TextBox 11"/>
           <p:cNvSpPr txBox="1"/>
           <p:nvPr/>
         </p:nvSpPr>
@@ -11298,14 +11022,14 @@
       </p:sp>
       <p:sp>
         <p:nvSpPr>
-          <p:cNvPr id="14" name="TextBox 13"/>
+          <p:cNvPr id="13" name="TextBox 12"/>
           <p:cNvSpPr txBox="1"/>
           <p:nvPr/>
         </p:nvSpPr>
         <p:spPr>
           <a:xfrm>
             <a:off x="558000" y="2206800"/>
-            <a:ext cx="2088000" cy="349200"/>
+            <a:ext cx="2088000" cy="475199"/>
           </a:xfrm>
           <a:prstGeom prst="rect">
             <a:avLst/>
@@ -11322,7 +11046,7 @@
               <a:spcAft>
                 <a:spcPts val="300"/>
               </a:spcAft>
-              <a:defRPr sz="930">
+              <a:defRPr sz="840">
                 <a:solidFill>
                   <a:srgbClr val="232D34"/>
                 </a:solidFill>
@@ -11338,7 +11062,7 @@
               <a:spcAft>
                 <a:spcPts val="300"/>
               </a:spcAft>
-              <a:defRPr sz="930">
+              <a:defRPr sz="840">
                 <a:solidFill>
                   <a:srgbClr val="232D34"/>
                 </a:solidFill>
@@ -11354,7 +11078,7 @@
               <a:spcAft>
                 <a:spcPts val="300"/>
               </a:spcAft>
-              <a:defRPr sz="930">
+              <a:defRPr sz="840">
                 <a:solidFill>
                   <a:srgbClr val="232D34"/>
                 </a:solidFill>
@@ -11369,14 +11093,14 @@
       </p:sp>
       <p:sp>
         <p:nvSpPr>
-          <p:cNvPr id="15" name="Rounded Rectangle 14"/>
+          <p:cNvPr id="14" name="Rounded Rectangle 13"/>
           <p:cNvSpPr/>
           <p:nvPr/>
         </p:nvSpPr>
         <p:spPr>
           <a:xfrm>
             <a:off x="2951999" y="1835999"/>
-            <a:ext cx="2412000" cy="792000"/>
+            <a:ext cx="2412000" cy="917999"/>
           </a:xfrm>
           <a:prstGeom prst="roundRect">
             <a:avLst/>
@@ -11414,7 +11138,7 @@
       </p:sp>
       <p:sp>
         <p:nvSpPr>
-          <p:cNvPr id="16" name="Rectangle 15"/>
+          <p:cNvPr id="15" name="Rectangle 14"/>
           <p:cNvSpPr/>
           <p:nvPr/>
         </p:nvSpPr>
@@ -11457,7 +11181,7 @@
       </p:sp>
       <p:sp>
         <p:nvSpPr>
-          <p:cNvPr id="17" name="TextBox 16"/>
+          <p:cNvPr id="16" name="TextBox 15"/>
           <p:cNvSpPr txBox="1"/>
           <p:nvPr/>
         </p:nvSpPr>
@@ -11492,14 +11216,14 @@
       </p:sp>
       <p:sp>
         <p:nvSpPr>
-          <p:cNvPr id="18" name="TextBox 17"/>
+          <p:cNvPr id="17" name="TextBox 16"/>
           <p:cNvSpPr txBox="1"/>
           <p:nvPr/>
         </p:nvSpPr>
         <p:spPr>
           <a:xfrm>
             <a:off x="3113999" y="2206800"/>
-            <a:ext cx="2088000" cy="349200"/>
+            <a:ext cx="2088000" cy="475199"/>
           </a:xfrm>
           <a:prstGeom prst="rect">
             <a:avLst/>
@@ -11516,7 +11240,7 @@
               <a:spcAft>
                 <a:spcPts val="300"/>
               </a:spcAft>
-              <a:defRPr sz="930">
+              <a:defRPr sz="840">
                 <a:solidFill>
                   <a:srgbClr val="232D34"/>
                 </a:solidFill>
@@ -11532,7 +11256,7 @@
               <a:spcAft>
                 <a:spcPts val="300"/>
               </a:spcAft>
-              <a:defRPr sz="930">
+              <a:defRPr sz="840">
                 <a:solidFill>
                   <a:srgbClr val="232D34"/>
                 </a:solidFill>
@@ -11548,7 +11272,7 @@
               <a:spcAft>
                 <a:spcPts val="300"/>
               </a:spcAft>
-              <a:defRPr sz="930">
+              <a:defRPr sz="840">
                 <a:solidFill>
                   <a:srgbClr val="232D34"/>
                 </a:solidFill>
@@ -11563,14 +11287,14 @@
       </p:sp>
       <p:sp>
         <p:nvSpPr>
-          <p:cNvPr id="19" name="Rounded Rectangle 18"/>
+          <p:cNvPr id="18" name="Rounded Rectangle 17"/>
           <p:cNvSpPr/>
           <p:nvPr/>
         </p:nvSpPr>
         <p:spPr>
           <a:xfrm>
-            <a:off x="396000" y="2790000"/>
-            <a:ext cx="4968000" cy="792000"/>
+            <a:off x="396000" y="2898000"/>
+            <a:ext cx="4968000" cy="917999"/>
           </a:xfrm>
           <a:prstGeom prst="roundRect">
             <a:avLst/>
@@ -11608,13 +11332,13 @@
       </p:sp>
       <p:sp>
         <p:nvSpPr>
-          <p:cNvPr id="20" name="Rectangle 19"/>
+          <p:cNvPr id="19" name="Rectangle 18"/>
           <p:cNvSpPr/>
           <p:nvPr/>
         </p:nvSpPr>
         <p:spPr>
           <a:xfrm>
-            <a:off x="396000" y="2790000"/>
+            <a:off x="396000" y="2898000"/>
             <a:ext cx="4968000" cy="46800"/>
           </a:xfrm>
           <a:prstGeom prst="rect">
@@ -11651,13 +11375,13 @@
       </p:sp>
       <p:sp>
         <p:nvSpPr>
-          <p:cNvPr id="21" name="TextBox 20"/>
+          <p:cNvPr id="20" name="TextBox 19"/>
           <p:cNvSpPr txBox="1"/>
           <p:nvPr/>
         </p:nvSpPr>
         <p:spPr>
           <a:xfrm>
-            <a:off x="558000" y="2912400"/>
+            <a:off x="558000" y="3020400"/>
             <a:ext cx="4644000" cy="172800"/>
           </a:xfrm>
           <a:prstGeom prst="rect">
@@ -11686,14 +11410,14 @@
       </p:sp>
       <p:sp>
         <p:nvSpPr>
-          <p:cNvPr id="22" name="TextBox 21"/>
+          <p:cNvPr id="21" name="TextBox 20"/>
           <p:cNvSpPr txBox="1"/>
           <p:nvPr/>
         </p:nvSpPr>
         <p:spPr>
           <a:xfrm>
-            <a:off x="558000" y="3160800"/>
-            <a:ext cx="4644000" cy="349200"/>
+            <a:off x="558000" y="3268800"/>
+            <a:ext cx="4644000" cy="475199"/>
           </a:xfrm>
           <a:prstGeom prst="rect">
             <a:avLst/>
@@ -11710,7 +11434,7 @@
               <a:spcAft>
                 <a:spcPts val="300"/>
               </a:spcAft>
-              <a:defRPr sz="930">
+              <a:defRPr sz="840">
                 <a:solidFill>
                   <a:srgbClr val="232D34"/>
                 </a:solidFill>
@@ -11726,7 +11450,7 @@
               <a:spcAft>
                 <a:spcPts val="300"/>
               </a:spcAft>
-              <a:defRPr sz="930">
+              <a:defRPr sz="840">
                 <a:solidFill>
                   <a:srgbClr val="232D34"/>
                 </a:solidFill>
@@ -11742,7 +11466,7 @@
               <a:spcAft>
                 <a:spcPts val="300"/>
               </a:spcAft>
-              <a:defRPr sz="930">
+              <a:defRPr sz="840">
                 <a:solidFill>
                   <a:srgbClr val="232D34"/>
                 </a:solidFill>
@@ -11757,14 +11481,14 @@
       </p:sp>
       <p:sp>
         <p:nvSpPr>
-          <p:cNvPr id="23" name="Rounded Rectangle 22"/>
+          <p:cNvPr id="22" name="Rounded Rectangle 21"/>
           <p:cNvSpPr/>
           <p:nvPr/>
         </p:nvSpPr>
         <p:spPr>
           <a:xfrm>
-            <a:off x="5652000" y="1098000"/>
-            <a:ext cx="3024000" cy="2592000"/>
+            <a:off x="5652000" y="1170000"/>
+            <a:ext cx="3024000" cy="2718000"/>
           </a:xfrm>
           <a:prstGeom prst="roundRect">
             <a:avLst/>
@@ -11802,7 +11526,7 @@
       </p:sp>
       <p:pic>
         <p:nvPicPr>
-          <p:cNvPr id="24" name="Picture 23" descr="corp_card_2.png"/>
+          <p:cNvPr id="23" name="Picture 22" descr="corp_card_2.png"/>
           <p:cNvPicPr>
             <a:picLocks noChangeAspect="1"/>
           </p:cNvPicPr>
@@ -11816,8 +11540,8 @@
         </p:blipFill>
         <p:spPr>
           <a:xfrm>
-            <a:off x="5778000" y="1242000"/>
-            <a:ext cx="2772000" cy="2304000"/>
+            <a:off x="5778000" y="1332000"/>
+            <a:ext cx="2772000" cy="2340000"/>
           </a:xfrm>
           <a:prstGeom prst="rect">
             <a:avLst/>
@@ -11826,7 +11550,7 @@
       </p:pic>
       <p:sp>
         <p:nvSpPr>
-          <p:cNvPr id="25" name="TextBox 24"/>
+          <p:cNvPr id="24" name="TextBox 23"/>
           <p:cNvSpPr txBox="1"/>
           <p:nvPr/>
         </p:nvSpPr>
@@ -11861,7 +11585,7 @@
       </p:sp>
       <p:sp>
         <p:nvSpPr>
-          <p:cNvPr id="26" name="TextBox 25"/>
+          <p:cNvPr id="25" name="TextBox 24"/>
           <p:cNvSpPr txBox="1"/>
           <p:nvPr/>
         </p:nvSpPr>
@@ -12006,8 +11730,8 @@
         </p:nvSpPr>
         <p:spPr>
           <a:xfrm>
-            <a:off x="378000" y="208800"/>
-            <a:ext cx="2880000" cy="125999"/>
+            <a:off x="360000" y="288000"/>
+            <a:ext cx="7380000" cy="280800"/>
           </a:xfrm>
           <a:prstGeom prst="rect">
             <a:avLst/>
@@ -12022,13 +11746,13 @@
           <a:p>
             <a:pPr algn="l"/>
             <a:r>
-              <a:rPr sz="850" b="1">
-                <a:solidFill>
-                  <a:srgbClr val="00A888"/>
+              <a:rPr sz="2400" b="1">
+                <a:solidFill>
+                  <a:srgbClr val="12363F"/>
                 </a:solidFill>
                 <a:latin typeface="Malgun Gothic"/>
               </a:rPr>
-              <a:t>CMS PRACTICAL GUIDE</a:t>
+              <a:t>SAP 연계 안내</a:t>
             </a:r>
           </a:p>
         </p:txBody>
@@ -12041,8 +11765,8 @@
         </p:nvSpPr>
         <p:spPr>
           <a:xfrm>
-            <a:off x="360000" y="360000"/>
-            <a:ext cx="6840000" cy="280800"/>
+            <a:off x="367200" y="597600"/>
+            <a:ext cx="7380000" cy="162000"/>
           </a:xfrm>
           <a:prstGeom prst="rect">
             <a:avLst/>
@@ -12057,41 +11781,6 @@
           <a:p>
             <a:pPr algn="l"/>
             <a:r>
-              <a:rPr sz="2400" b="1">
-                <a:solidFill>
-                  <a:srgbClr val="12363F"/>
-                </a:solidFill>
-                <a:latin typeface="Malgun Gothic"/>
-              </a:rPr>
-              <a:t>SAP 연계 안내</a:t>
-            </a:r>
-          </a:p>
-        </p:txBody>
-      </p:sp>
-      <p:sp>
-        <p:nvSpPr>
-          <p:cNvPr id="6" name="TextBox 5"/>
-          <p:cNvSpPr txBox="1"/>
-          <p:nvPr/>
-        </p:nvSpPr>
-        <p:spPr>
-          <a:xfrm>
-            <a:off x="367200" y="666000"/>
-            <a:ext cx="6840000" cy="162000"/>
-          </a:xfrm>
-          <a:prstGeom prst="rect">
-            <a:avLst/>
-          </a:prstGeom>
-          <a:noFill/>
-        </p:spPr>
-        <p:txBody>
-          <a:bodyPr wrap="none" anchor="ctr">
-            <a:spAutoFit/>
-          </a:bodyPr>
-          <a:lstStyle/>
-          <a:p>
-            <a:pPr algn="l"/>
-            <a:r>
               <a:rPr sz="1050" b="0">
                 <a:solidFill>
                   <a:srgbClr val="5F7179"/>
@@ -12105,7 +11794,7 @@
       </p:sp>
       <p:sp>
         <p:nvSpPr>
-          <p:cNvPr id="7" name="Rectangle 6"/>
+          <p:cNvPr id="6" name="Rectangle 5"/>
           <p:cNvSpPr/>
           <p:nvPr/>
         </p:nvSpPr>
@@ -12148,7 +11837,7 @@
       </p:sp>
       <p:sp>
         <p:nvSpPr>
-          <p:cNvPr id="8" name="Rounded Rectangle 7"/>
+          <p:cNvPr id="7" name="Rounded Rectangle 6"/>
           <p:cNvSpPr/>
           <p:nvPr/>
         </p:nvSpPr>
@@ -12191,7 +11880,7 @@
       </p:sp>
       <p:sp>
         <p:nvSpPr>
-          <p:cNvPr id="9" name="TextBox 8"/>
+          <p:cNvPr id="8" name="TextBox 7"/>
           <p:cNvSpPr txBox="1"/>
           <p:nvPr/>
         </p:nvSpPr>
@@ -12226,14 +11915,14 @@
       </p:sp>
       <p:sp>
         <p:nvSpPr>
-          <p:cNvPr id="10" name="TextBox 9"/>
+          <p:cNvPr id="9" name="TextBox 8"/>
           <p:cNvSpPr txBox="1"/>
           <p:nvPr/>
         </p:nvSpPr>
         <p:spPr>
           <a:xfrm>
-            <a:off x="396000" y="1422000"/>
-            <a:ext cx="3780000" cy="270000"/>
+            <a:off x="396000" y="1386000"/>
+            <a:ext cx="4824000" cy="324000"/>
           </a:xfrm>
           <a:prstGeom prst="rect">
             <a:avLst/>
@@ -12248,7 +11937,7 @@
           <a:p>
             <a:pPr algn="l"/>
             <a:r>
-              <a:rPr sz="1600" b="1">
+              <a:rPr sz="1350" b="1">
                 <a:solidFill>
                   <a:srgbClr val="12363F"/>
                 </a:solidFill>
@@ -12261,14 +11950,14 @@
       </p:sp>
       <p:sp>
         <p:nvSpPr>
-          <p:cNvPr id="11" name="Rounded Rectangle 10"/>
+          <p:cNvPr id="10" name="Rounded Rectangle 9"/>
           <p:cNvSpPr/>
           <p:nvPr/>
         </p:nvSpPr>
         <p:spPr>
           <a:xfrm>
             <a:off x="396000" y="1835999"/>
-            <a:ext cx="2412000" cy="792000"/>
+            <a:ext cx="2412000" cy="917999"/>
           </a:xfrm>
           <a:prstGeom prst="roundRect">
             <a:avLst/>
@@ -12306,7 +11995,7 @@
       </p:sp>
       <p:sp>
         <p:nvSpPr>
-          <p:cNvPr id="12" name="Rectangle 11"/>
+          <p:cNvPr id="11" name="Rectangle 10"/>
           <p:cNvSpPr/>
           <p:nvPr/>
         </p:nvSpPr>
@@ -12349,7 +12038,7 @@
       </p:sp>
       <p:sp>
         <p:nvSpPr>
-          <p:cNvPr id="13" name="TextBox 12"/>
+          <p:cNvPr id="12" name="TextBox 11"/>
           <p:cNvSpPr txBox="1"/>
           <p:nvPr/>
         </p:nvSpPr>
@@ -12384,14 +12073,14 @@
       </p:sp>
       <p:sp>
         <p:nvSpPr>
-          <p:cNvPr id="14" name="TextBox 13"/>
+          <p:cNvPr id="13" name="TextBox 12"/>
           <p:cNvSpPr txBox="1"/>
           <p:nvPr/>
         </p:nvSpPr>
         <p:spPr>
           <a:xfrm>
             <a:off x="558000" y="2206800"/>
-            <a:ext cx="2088000" cy="349200"/>
+            <a:ext cx="2088000" cy="475199"/>
           </a:xfrm>
           <a:prstGeom prst="rect">
             <a:avLst/>
@@ -12408,7 +12097,7 @@
               <a:spcAft>
                 <a:spcPts val="300"/>
               </a:spcAft>
-              <a:defRPr sz="930">
+              <a:defRPr sz="840">
                 <a:solidFill>
                   <a:srgbClr val="232D34"/>
                 </a:solidFill>
@@ -12424,7 +12113,7 @@
               <a:spcAft>
                 <a:spcPts val="300"/>
               </a:spcAft>
-              <a:defRPr sz="930">
+              <a:defRPr sz="840">
                 <a:solidFill>
                   <a:srgbClr val="232D34"/>
                 </a:solidFill>
@@ -12440,7 +12129,7 @@
               <a:spcAft>
                 <a:spcPts val="300"/>
               </a:spcAft>
-              <a:defRPr sz="930">
+              <a:defRPr sz="840">
                 <a:solidFill>
                   <a:srgbClr val="232D34"/>
                 </a:solidFill>
@@ -12455,14 +12144,14 @@
       </p:sp>
       <p:sp>
         <p:nvSpPr>
-          <p:cNvPr id="15" name="Rounded Rectangle 14"/>
+          <p:cNvPr id="14" name="Rounded Rectangle 13"/>
           <p:cNvSpPr/>
           <p:nvPr/>
         </p:nvSpPr>
         <p:spPr>
           <a:xfrm>
             <a:off x="2951999" y="1835999"/>
-            <a:ext cx="2412000" cy="792000"/>
+            <a:ext cx="2412000" cy="917999"/>
           </a:xfrm>
           <a:prstGeom prst="roundRect">
             <a:avLst/>
@@ -12500,7 +12189,7 @@
       </p:sp>
       <p:sp>
         <p:nvSpPr>
-          <p:cNvPr id="16" name="Rectangle 15"/>
+          <p:cNvPr id="15" name="Rectangle 14"/>
           <p:cNvSpPr/>
           <p:nvPr/>
         </p:nvSpPr>
@@ -12543,7 +12232,7 @@
       </p:sp>
       <p:sp>
         <p:nvSpPr>
-          <p:cNvPr id="17" name="TextBox 16"/>
+          <p:cNvPr id="16" name="TextBox 15"/>
           <p:cNvSpPr txBox="1"/>
           <p:nvPr/>
         </p:nvSpPr>
@@ -12578,14 +12267,14 @@
       </p:sp>
       <p:sp>
         <p:nvSpPr>
-          <p:cNvPr id="18" name="TextBox 17"/>
+          <p:cNvPr id="17" name="TextBox 16"/>
           <p:cNvSpPr txBox="1"/>
           <p:nvPr/>
         </p:nvSpPr>
         <p:spPr>
           <a:xfrm>
             <a:off x="3113999" y="2206800"/>
-            <a:ext cx="2088000" cy="349200"/>
+            <a:ext cx="2088000" cy="475199"/>
           </a:xfrm>
           <a:prstGeom prst="rect">
             <a:avLst/>
@@ -12602,7 +12291,7 @@
               <a:spcAft>
                 <a:spcPts val="300"/>
               </a:spcAft>
-              <a:defRPr sz="930">
+              <a:defRPr sz="840">
                 <a:solidFill>
                   <a:srgbClr val="232D34"/>
                 </a:solidFill>
@@ -12618,7 +12307,7 @@
               <a:spcAft>
                 <a:spcPts val="300"/>
               </a:spcAft>
-              <a:defRPr sz="930">
+              <a:defRPr sz="840">
                 <a:solidFill>
                   <a:srgbClr val="232D34"/>
                 </a:solidFill>
@@ -12634,7 +12323,7 @@
               <a:spcAft>
                 <a:spcPts val="300"/>
               </a:spcAft>
-              <a:defRPr sz="930">
+              <a:defRPr sz="840">
                 <a:solidFill>
                   <a:srgbClr val="232D34"/>
                 </a:solidFill>
@@ -12649,14 +12338,14 @@
       </p:sp>
       <p:sp>
         <p:nvSpPr>
-          <p:cNvPr id="19" name="Rounded Rectangle 18"/>
+          <p:cNvPr id="18" name="Rounded Rectangle 17"/>
           <p:cNvSpPr/>
           <p:nvPr/>
         </p:nvSpPr>
         <p:spPr>
           <a:xfrm>
-            <a:off x="396000" y="2790000"/>
-            <a:ext cx="4968000" cy="792000"/>
+            <a:off x="396000" y="2898000"/>
+            <a:ext cx="4968000" cy="917999"/>
           </a:xfrm>
           <a:prstGeom prst="roundRect">
             <a:avLst/>
@@ -12694,13 +12383,13 @@
       </p:sp>
       <p:sp>
         <p:nvSpPr>
-          <p:cNvPr id="20" name="Rectangle 19"/>
+          <p:cNvPr id="19" name="Rectangle 18"/>
           <p:cNvSpPr/>
           <p:nvPr/>
         </p:nvSpPr>
         <p:spPr>
           <a:xfrm>
-            <a:off x="396000" y="2790000"/>
+            <a:off x="396000" y="2898000"/>
             <a:ext cx="4968000" cy="46800"/>
           </a:xfrm>
           <a:prstGeom prst="rect">
@@ -12737,13 +12426,13 @@
       </p:sp>
       <p:sp>
         <p:nvSpPr>
-          <p:cNvPr id="21" name="TextBox 20"/>
+          <p:cNvPr id="20" name="TextBox 19"/>
           <p:cNvSpPr txBox="1"/>
           <p:nvPr/>
         </p:nvSpPr>
         <p:spPr>
           <a:xfrm>
-            <a:off x="558000" y="2912400"/>
+            <a:off x="558000" y="3020400"/>
             <a:ext cx="4644000" cy="172800"/>
           </a:xfrm>
           <a:prstGeom prst="rect">
@@ -12772,14 +12461,14 @@
       </p:sp>
       <p:sp>
         <p:nvSpPr>
-          <p:cNvPr id="22" name="TextBox 21"/>
+          <p:cNvPr id="21" name="TextBox 20"/>
           <p:cNvSpPr txBox="1"/>
           <p:nvPr/>
         </p:nvSpPr>
         <p:spPr>
           <a:xfrm>
-            <a:off x="558000" y="3160800"/>
-            <a:ext cx="4644000" cy="349200"/>
+            <a:off x="558000" y="3268800"/>
+            <a:ext cx="4644000" cy="475199"/>
           </a:xfrm>
           <a:prstGeom prst="rect">
             <a:avLst/>
@@ -12796,7 +12485,7 @@
               <a:spcAft>
                 <a:spcPts val="300"/>
               </a:spcAft>
-              <a:defRPr sz="930">
+              <a:defRPr sz="840">
                 <a:solidFill>
                   <a:srgbClr val="232D34"/>
                 </a:solidFill>
@@ -12812,7 +12501,7 @@
               <a:spcAft>
                 <a:spcPts val="300"/>
               </a:spcAft>
-              <a:defRPr sz="930">
+              <a:defRPr sz="840">
                 <a:solidFill>
                   <a:srgbClr val="232D34"/>
                 </a:solidFill>
@@ -12828,7 +12517,7 @@
               <a:spcAft>
                 <a:spcPts val="300"/>
               </a:spcAft>
-              <a:defRPr sz="930">
+              <a:defRPr sz="840">
                 <a:solidFill>
                   <a:srgbClr val="232D34"/>
                 </a:solidFill>
@@ -12843,14 +12532,14 @@
       </p:sp>
       <p:sp>
         <p:nvSpPr>
-          <p:cNvPr id="23" name="Rounded Rectangle 22"/>
+          <p:cNvPr id="22" name="Rounded Rectangle 21"/>
           <p:cNvSpPr/>
           <p:nvPr/>
         </p:nvSpPr>
         <p:spPr>
           <a:xfrm>
-            <a:off x="5652000" y="1098000"/>
-            <a:ext cx="3024000" cy="2592000"/>
+            <a:off x="5652000" y="1170000"/>
+            <a:ext cx="3024000" cy="2718000"/>
           </a:xfrm>
           <a:prstGeom prst="roundRect">
             <a:avLst/>
@@ -12888,7 +12577,7 @@
       </p:sp>
       <p:pic>
         <p:nvPicPr>
-          <p:cNvPr id="24" name="Picture 23" descr="bulk_transfer.png"/>
+          <p:cNvPr id="23" name="Picture 22" descr="bulk_transfer.png"/>
           <p:cNvPicPr>
             <a:picLocks noChangeAspect="1"/>
           </p:cNvPicPr>
@@ -12902,7 +12591,7 @@
         </p:blipFill>
         <p:spPr>
           <a:xfrm>
-            <a:off x="5778000" y="1650782"/>
+            <a:off x="5778000" y="1758782"/>
             <a:ext cx="2772000" cy="1486435"/>
           </a:xfrm>
           <a:prstGeom prst="rect">
@@ -12912,7 +12601,7 @@
       </p:pic>
       <p:sp>
         <p:nvSpPr>
-          <p:cNvPr id="25" name="TextBox 24"/>
+          <p:cNvPr id="24" name="TextBox 23"/>
           <p:cNvSpPr txBox="1"/>
           <p:nvPr/>
         </p:nvSpPr>
@@ -12947,7 +12636,7 @@
       </p:sp>
       <p:sp>
         <p:nvSpPr>
-          <p:cNvPr id="26" name="TextBox 25"/>
+          <p:cNvPr id="25" name="TextBox 24"/>
           <p:cNvSpPr txBox="1"/>
           <p:nvPr/>
         </p:nvSpPr>
@@ -13092,8 +12781,8 @@
         </p:nvSpPr>
         <p:spPr>
           <a:xfrm>
-            <a:off x="378000" y="208800"/>
-            <a:ext cx="2880000" cy="125999"/>
+            <a:off x="360000" y="288000"/>
+            <a:ext cx="7380000" cy="280800"/>
           </a:xfrm>
           <a:prstGeom prst="rect">
             <a:avLst/>
@@ -13108,13 +12797,13 @@
           <a:p>
             <a:pPr algn="l"/>
             <a:r>
-              <a:rPr sz="850" b="1">
-                <a:solidFill>
-                  <a:srgbClr val="00A888"/>
+              <a:rPr sz="2400" b="1">
+                <a:solidFill>
+                  <a:srgbClr val="12363F"/>
                 </a:solidFill>
                 <a:latin typeface="Malgun Gothic"/>
               </a:rPr>
-              <a:t>CMS PRACTICAL GUIDE</a:t>
+              <a:t>자체개발 ERP 연계 안내</a:t>
             </a:r>
           </a:p>
         </p:txBody>
@@ -13127,8 +12816,8 @@
         </p:nvSpPr>
         <p:spPr>
           <a:xfrm>
-            <a:off x="360000" y="360000"/>
-            <a:ext cx="6840000" cy="280800"/>
+            <a:off x="367200" y="597600"/>
+            <a:ext cx="7380000" cy="162000"/>
           </a:xfrm>
           <a:prstGeom prst="rect">
             <a:avLst/>
@@ -13143,41 +12832,6 @@
           <a:p>
             <a:pPr algn="l"/>
             <a:r>
-              <a:rPr sz="2400" b="1">
-                <a:solidFill>
-                  <a:srgbClr val="12363F"/>
-                </a:solidFill>
-                <a:latin typeface="Malgun Gothic"/>
-              </a:rPr>
-              <a:t>자체개발 ERP 연계 안내</a:t>
-            </a:r>
-          </a:p>
-        </p:txBody>
-      </p:sp>
-      <p:sp>
-        <p:nvSpPr>
-          <p:cNvPr id="6" name="TextBox 5"/>
-          <p:cNvSpPr txBox="1"/>
-          <p:nvPr/>
-        </p:nvSpPr>
-        <p:spPr>
-          <a:xfrm>
-            <a:off x="367200" y="666000"/>
-            <a:ext cx="6840000" cy="162000"/>
-          </a:xfrm>
-          <a:prstGeom prst="rect">
-            <a:avLst/>
-          </a:prstGeom>
-          <a:noFill/>
-        </p:spPr>
-        <p:txBody>
-          <a:bodyPr wrap="none" anchor="ctr">
-            <a:spAutoFit/>
-          </a:bodyPr>
-          <a:lstStyle/>
-          <a:p>
-            <a:pPr algn="l"/>
-            <a:r>
               <a:rPr sz="1050" b="0">
                 <a:solidFill>
                   <a:srgbClr val="5F7179"/>
@@ -13191,7 +12845,7 @@
       </p:sp>
       <p:sp>
         <p:nvSpPr>
-          <p:cNvPr id="7" name="Rectangle 6"/>
+          <p:cNvPr id="6" name="Rectangle 5"/>
           <p:cNvSpPr/>
           <p:nvPr/>
         </p:nvSpPr>
@@ -13234,7 +12888,7 @@
       </p:sp>
       <p:sp>
         <p:nvSpPr>
-          <p:cNvPr id="8" name="Rounded Rectangle 7"/>
+          <p:cNvPr id="7" name="Rounded Rectangle 6"/>
           <p:cNvSpPr/>
           <p:nvPr/>
         </p:nvSpPr>
@@ -13277,7 +12931,7 @@
       </p:sp>
       <p:sp>
         <p:nvSpPr>
-          <p:cNvPr id="9" name="TextBox 8"/>
+          <p:cNvPr id="8" name="TextBox 7"/>
           <p:cNvSpPr txBox="1"/>
           <p:nvPr/>
         </p:nvSpPr>
@@ -13312,14 +12966,14 @@
       </p:sp>
       <p:sp>
         <p:nvSpPr>
-          <p:cNvPr id="10" name="TextBox 9"/>
+          <p:cNvPr id="9" name="TextBox 8"/>
           <p:cNvSpPr txBox="1"/>
           <p:nvPr/>
         </p:nvSpPr>
         <p:spPr>
           <a:xfrm>
-            <a:off x="396000" y="1422000"/>
-            <a:ext cx="3780000" cy="270000"/>
+            <a:off x="396000" y="1386000"/>
+            <a:ext cx="4824000" cy="324000"/>
           </a:xfrm>
           <a:prstGeom prst="rect">
             <a:avLst/>
@@ -13334,7 +12988,7 @@
           <a:p>
             <a:pPr algn="l"/>
             <a:r>
-              <a:rPr sz="1600" b="1">
+              <a:rPr sz="1350" b="1">
                 <a:solidFill>
                   <a:srgbClr val="12363F"/>
                 </a:solidFill>
@@ -13347,14 +13001,14 @@
       </p:sp>
       <p:sp>
         <p:nvSpPr>
-          <p:cNvPr id="11" name="Rounded Rectangle 10"/>
+          <p:cNvPr id="10" name="Rounded Rectangle 9"/>
           <p:cNvSpPr/>
           <p:nvPr/>
         </p:nvSpPr>
         <p:spPr>
           <a:xfrm>
             <a:off x="396000" y="1835999"/>
-            <a:ext cx="2412000" cy="792000"/>
+            <a:ext cx="2412000" cy="917999"/>
           </a:xfrm>
           <a:prstGeom prst="roundRect">
             <a:avLst/>
@@ -13392,7 +13046,7 @@
       </p:sp>
       <p:sp>
         <p:nvSpPr>
-          <p:cNvPr id="12" name="Rectangle 11"/>
+          <p:cNvPr id="11" name="Rectangle 10"/>
           <p:cNvSpPr/>
           <p:nvPr/>
         </p:nvSpPr>
@@ -13435,7 +13089,7 @@
       </p:sp>
       <p:sp>
         <p:nvSpPr>
-          <p:cNvPr id="13" name="TextBox 12"/>
+          <p:cNvPr id="12" name="TextBox 11"/>
           <p:cNvSpPr txBox="1"/>
           <p:nvPr/>
         </p:nvSpPr>
@@ -13470,14 +13124,14 @@
       </p:sp>
       <p:sp>
         <p:nvSpPr>
-          <p:cNvPr id="14" name="TextBox 13"/>
+          <p:cNvPr id="13" name="TextBox 12"/>
           <p:cNvSpPr txBox="1"/>
           <p:nvPr/>
         </p:nvSpPr>
         <p:spPr>
           <a:xfrm>
             <a:off x="558000" y="2206800"/>
-            <a:ext cx="2088000" cy="349200"/>
+            <a:ext cx="2088000" cy="475199"/>
           </a:xfrm>
           <a:prstGeom prst="rect">
             <a:avLst/>
@@ -13494,7 +13148,7 @@
               <a:spcAft>
                 <a:spcPts val="300"/>
               </a:spcAft>
-              <a:defRPr sz="930">
+              <a:defRPr sz="840">
                 <a:solidFill>
                   <a:srgbClr val="232D34"/>
                 </a:solidFill>
@@ -13510,7 +13164,7 @@
               <a:spcAft>
                 <a:spcPts val="300"/>
               </a:spcAft>
-              <a:defRPr sz="930">
+              <a:defRPr sz="840">
                 <a:solidFill>
                   <a:srgbClr val="232D34"/>
                 </a:solidFill>
@@ -13526,7 +13180,7 @@
               <a:spcAft>
                 <a:spcPts val="300"/>
               </a:spcAft>
-              <a:defRPr sz="930">
+              <a:defRPr sz="840">
                 <a:solidFill>
                   <a:srgbClr val="232D34"/>
                 </a:solidFill>
@@ -13541,14 +13195,14 @@
       </p:sp>
       <p:sp>
         <p:nvSpPr>
-          <p:cNvPr id="15" name="Rounded Rectangle 14"/>
+          <p:cNvPr id="14" name="Rounded Rectangle 13"/>
           <p:cNvSpPr/>
           <p:nvPr/>
         </p:nvSpPr>
         <p:spPr>
           <a:xfrm>
             <a:off x="2951999" y="1835999"/>
-            <a:ext cx="2412000" cy="792000"/>
+            <a:ext cx="2412000" cy="917999"/>
           </a:xfrm>
           <a:prstGeom prst="roundRect">
             <a:avLst/>
@@ -13586,7 +13240,7 @@
       </p:sp>
       <p:sp>
         <p:nvSpPr>
-          <p:cNvPr id="16" name="Rectangle 15"/>
+          <p:cNvPr id="15" name="Rectangle 14"/>
           <p:cNvSpPr/>
           <p:nvPr/>
         </p:nvSpPr>
@@ -13629,7 +13283,7 @@
       </p:sp>
       <p:sp>
         <p:nvSpPr>
-          <p:cNvPr id="17" name="TextBox 16"/>
+          <p:cNvPr id="16" name="TextBox 15"/>
           <p:cNvSpPr txBox="1"/>
           <p:nvPr/>
         </p:nvSpPr>
@@ -13664,14 +13318,14 @@
       </p:sp>
       <p:sp>
         <p:nvSpPr>
-          <p:cNvPr id="18" name="TextBox 17"/>
+          <p:cNvPr id="17" name="TextBox 16"/>
           <p:cNvSpPr txBox="1"/>
           <p:nvPr/>
         </p:nvSpPr>
         <p:spPr>
           <a:xfrm>
             <a:off x="3113999" y="2206800"/>
-            <a:ext cx="2088000" cy="349200"/>
+            <a:ext cx="2088000" cy="475199"/>
           </a:xfrm>
           <a:prstGeom prst="rect">
             <a:avLst/>
@@ -13688,7 +13342,7 @@
               <a:spcAft>
                 <a:spcPts val="300"/>
               </a:spcAft>
-              <a:defRPr sz="930">
+              <a:defRPr sz="840">
                 <a:solidFill>
                   <a:srgbClr val="232D34"/>
                 </a:solidFill>
@@ -13704,7 +13358,7 @@
               <a:spcAft>
                 <a:spcPts val="300"/>
               </a:spcAft>
-              <a:defRPr sz="930">
+              <a:defRPr sz="840">
                 <a:solidFill>
                   <a:srgbClr val="232D34"/>
                 </a:solidFill>
@@ -13720,7 +13374,7 @@
               <a:spcAft>
                 <a:spcPts val="300"/>
               </a:spcAft>
-              <a:defRPr sz="930">
+              <a:defRPr sz="840">
                 <a:solidFill>
                   <a:srgbClr val="232D34"/>
                 </a:solidFill>
@@ -13735,14 +13389,14 @@
       </p:sp>
       <p:sp>
         <p:nvSpPr>
-          <p:cNvPr id="19" name="Rounded Rectangle 18"/>
+          <p:cNvPr id="18" name="Rounded Rectangle 17"/>
           <p:cNvSpPr/>
           <p:nvPr/>
         </p:nvSpPr>
         <p:spPr>
           <a:xfrm>
-            <a:off x="396000" y="2790000"/>
-            <a:ext cx="4968000" cy="792000"/>
+            <a:off x="396000" y="2898000"/>
+            <a:ext cx="4968000" cy="917999"/>
           </a:xfrm>
           <a:prstGeom prst="roundRect">
             <a:avLst/>
@@ -13780,13 +13434,13 @@
       </p:sp>
       <p:sp>
         <p:nvSpPr>
-          <p:cNvPr id="20" name="Rectangle 19"/>
+          <p:cNvPr id="19" name="Rectangle 18"/>
           <p:cNvSpPr/>
           <p:nvPr/>
         </p:nvSpPr>
         <p:spPr>
           <a:xfrm>
-            <a:off x="396000" y="2790000"/>
+            <a:off x="396000" y="2898000"/>
             <a:ext cx="4968000" cy="46800"/>
           </a:xfrm>
           <a:prstGeom prst="rect">
@@ -13823,13 +13477,13 @@
       </p:sp>
       <p:sp>
         <p:nvSpPr>
-          <p:cNvPr id="21" name="TextBox 20"/>
+          <p:cNvPr id="20" name="TextBox 19"/>
           <p:cNvSpPr txBox="1"/>
           <p:nvPr/>
         </p:nvSpPr>
         <p:spPr>
           <a:xfrm>
-            <a:off x="558000" y="2912400"/>
+            <a:off x="558000" y="3020400"/>
             <a:ext cx="4644000" cy="172800"/>
           </a:xfrm>
           <a:prstGeom prst="rect">
@@ -13858,14 +13512,14 @@
       </p:sp>
       <p:sp>
         <p:nvSpPr>
-          <p:cNvPr id="22" name="TextBox 21"/>
+          <p:cNvPr id="21" name="TextBox 20"/>
           <p:cNvSpPr txBox="1"/>
           <p:nvPr/>
         </p:nvSpPr>
         <p:spPr>
           <a:xfrm>
-            <a:off x="558000" y="3160800"/>
-            <a:ext cx="4644000" cy="349200"/>
+            <a:off x="558000" y="3268800"/>
+            <a:ext cx="4644000" cy="475199"/>
           </a:xfrm>
           <a:prstGeom prst="rect">
             <a:avLst/>
@@ -13882,7 +13536,7 @@
               <a:spcAft>
                 <a:spcPts val="300"/>
               </a:spcAft>
-              <a:defRPr sz="930">
+              <a:defRPr sz="840">
                 <a:solidFill>
                   <a:srgbClr val="232D34"/>
                 </a:solidFill>
@@ -13898,7 +13552,7 @@
               <a:spcAft>
                 <a:spcPts val="300"/>
               </a:spcAft>
-              <a:defRPr sz="930">
+              <a:defRPr sz="840">
                 <a:solidFill>
                   <a:srgbClr val="232D34"/>
                 </a:solidFill>
@@ -13914,7 +13568,7 @@
               <a:spcAft>
                 <a:spcPts val="300"/>
               </a:spcAft>
-              <a:defRPr sz="930">
+              <a:defRPr sz="840">
                 <a:solidFill>
                   <a:srgbClr val="232D34"/>
                 </a:solidFill>
@@ -13929,14 +13583,14 @@
       </p:sp>
       <p:sp>
         <p:nvSpPr>
-          <p:cNvPr id="23" name="Rounded Rectangle 22"/>
+          <p:cNvPr id="22" name="Rounded Rectangle 21"/>
           <p:cNvSpPr/>
           <p:nvPr/>
         </p:nvSpPr>
         <p:spPr>
           <a:xfrm>
-            <a:off x="5652000" y="1098000"/>
-            <a:ext cx="3024000" cy="2592000"/>
+            <a:off x="5652000" y="1170000"/>
+            <a:ext cx="3024000" cy="2718000"/>
           </a:xfrm>
           <a:prstGeom prst="roundRect">
             <a:avLst/>
@@ -13974,7 +13628,7 @@
       </p:sp>
       <p:pic>
         <p:nvPicPr>
-          <p:cNvPr id="24" name="Picture 23" descr="corp_card_3.png"/>
+          <p:cNvPr id="23" name="Picture 22" descr="corp_card_3.png"/>
           <p:cNvPicPr>
             <a:picLocks noChangeAspect="1"/>
           </p:cNvPicPr>
@@ -13988,8 +13642,8 @@
         </p:blipFill>
         <p:spPr>
           <a:xfrm>
-            <a:off x="5778000" y="1242000"/>
-            <a:ext cx="2772000" cy="2304000"/>
+            <a:off x="5778000" y="1332000"/>
+            <a:ext cx="2772000" cy="2340000"/>
           </a:xfrm>
           <a:prstGeom prst="rect">
             <a:avLst/>
@@ -13998,7 +13652,7 @@
       </p:pic>
       <p:sp>
         <p:nvSpPr>
-          <p:cNvPr id="25" name="TextBox 24"/>
+          <p:cNvPr id="24" name="TextBox 23"/>
           <p:cNvSpPr txBox="1"/>
           <p:nvPr/>
         </p:nvSpPr>
@@ -14033,7 +13687,7 @@
       </p:sp>
       <p:sp>
         <p:nvSpPr>
-          <p:cNvPr id="26" name="TextBox 25"/>
+          <p:cNvPr id="25" name="TextBox 24"/>
           <p:cNvSpPr txBox="1"/>
           <p:nvPr/>
         </p:nvSpPr>
@@ -14178,8 +13832,8 @@
         </p:nvSpPr>
         <p:spPr>
           <a:xfrm>
-            <a:off x="378000" y="208800"/>
-            <a:ext cx="2880000" cy="125999"/>
+            <a:off x="360000" y="288000"/>
+            <a:ext cx="7380000" cy="280800"/>
           </a:xfrm>
           <a:prstGeom prst="rect">
             <a:avLst/>
@@ -14194,13 +13848,13 @@
           <a:p>
             <a:pPr algn="l"/>
             <a:r>
-              <a:rPr sz="850" b="1">
-                <a:solidFill>
-                  <a:srgbClr val="00A888"/>
+              <a:rPr sz="2400" b="1">
+                <a:solidFill>
+                  <a:srgbClr val="12363F"/>
                 </a:solidFill>
                 <a:latin typeface="Malgun Gothic"/>
               </a:rPr>
-              <a:t>CMS PRACTICAL GUIDE</a:t>
+              <a:t>ERP 예시 화면</a:t>
             </a:r>
           </a:p>
         </p:txBody>
@@ -14213,8 +13867,8 @@
         </p:nvSpPr>
         <p:spPr>
           <a:xfrm>
-            <a:off x="360000" y="360000"/>
-            <a:ext cx="6840000" cy="280800"/>
+            <a:off x="367200" y="597600"/>
+            <a:ext cx="7380000" cy="162000"/>
           </a:xfrm>
           <a:prstGeom prst="rect">
             <a:avLst/>
@@ -14229,41 +13883,6 @@
           <a:p>
             <a:pPr algn="l"/>
             <a:r>
-              <a:rPr sz="2400" b="1">
-                <a:solidFill>
-                  <a:srgbClr val="12363F"/>
-                </a:solidFill>
-                <a:latin typeface="Malgun Gothic"/>
-              </a:rPr>
-              <a:t>ERP 예시 화면</a:t>
-            </a:r>
-          </a:p>
-        </p:txBody>
-      </p:sp>
-      <p:sp>
-        <p:nvSpPr>
-          <p:cNvPr id="6" name="TextBox 5"/>
-          <p:cNvSpPr txBox="1"/>
-          <p:nvPr/>
-        </p:nvSpPr>
-        <p:spPr>
-          <a:xfrm>
-            <a:off x="367200" y="666000"/>
-            <a:ext cx="6840000" cy="162000"/>
-          </a:xfrm>
-          <a:prstGeom prst="rect">
-            <a:avLst/>
-          </a:prstGeom>
-          <a:noFill/>
-        </p:spPr>
-        <p:txBody>
-          <a:bodyPr wrap="none" anchor="ctr">
-            <a:spAutoFit/>
-          </a:bodyPr>
-          <a:lstStyle/>
-          <a:p>
-            <a:pPr algn="l"/>
-            <a:r>
               <a:rPr sz="1050" b="0">
                 <a:solidFill>
                   <a:srgbClr val="5F7179"/>
@@ -14277,7 +13896,7 @@
       </p:sp>
       <p:sp>
         <p:nvSpPr>
-          <p:cNvPr id="7" name="Rectangle 6"/>
+          <p:cNvPr id="6" name="Rectangle 5"/>
           <p:cNvSpPr/>
           <p:nvPr/>
         </p:nvSpPr>
@@ -14320,7 +13939,7 @@
       </p:sp>
       <p:sp>
         <p:nvSpPr>
-          <p:cNvPr id="8" name="Rounded Rectangle 7"/>
+          <p:cNvPr id="7" name="Rounded Rectangle 6"/>
           <p:cNvSpPr/>
           <p:nvPr/>
         </p:nvSpPr>
@@ -14365,7 +13984,7 @@
       </p:sp>
       <p:pic>
         <p:nvPicPr>
-          <p:cNvPr id="9" name="Picture 8" descr="corp_card_1.png"/>
+          <p:cNvPr id="8" name="Picture 7" descr="corp_card_1.png"/>
           <p:cNvPicPr>
             <a:picLocks noChangeAspect="1"/>
           </p:cNvPicPr>
@@ -14389,7 +14008,7 @@
       </p:pic>
       <p:sp>
         <p:nvSpPr>
-          <p:cNvPr id="10" name="TextBox 9"/>
+          <p:cNvPr id="9" name="TextBox 8"/>
           <p:cNvSpPr txBox="1"/>
           <p:nvPr/>
         </p:nvSpPr>
@@ -14424,7 +14043,7 @@
       </p:sp>
       <p:sp>
         <p:nvSpPr>
-          <p:cNvPr id="11" name="Rounded Rectangle 10"/>
+          <p:cNvPr id="10" name="Rounded Rectangle 9"/>
           <p:cNvSpPr/>
           <p:nvPr/>
         </p:nvSpPr>
@@ -14469,7 +14088,7 @@
       </p:sp>
       <p:pic>
         <p:nvPicPr>
-          <p:cNvPr id="12" name="Picture 11" descr="bulk_transfer.png"/>
+          <p:cNvPr id="11" name="Picture 10" descr="bulk_transfer.png"/>
           <p:cNvPicPr>
             <a:picLocks noChangeAspect="1"/>
           </p:cNvPicPr>
@@ -14493,7 +14112,7 @@
       </p:pic>
       <p:sp>
         <p:nvSpPr>
-          <p:cNvPr id="13" name="TextBox 12"/>
+          <p:cNvPr id="12" name="TextBox 11"/>
           <p:cNvSpPr txBox="1"/>
           <p:nvPr/>
         </p:nvSpPr>
@@ -14528,7 +14147,7 @@
       </p:sp>
       <p:sp>
         <p:nvSpPr>
-          <p:cNvPr id="14" name="Rounded Rectangle 13"/>
+          <p:cNvPr id="13" name="Rounded Rectangle 12"/>
           <p:cNvSpPr/>
           <p:nvPr/>
         </p:nvSpPr>
@@ -14573,7 +14192,7 @@
       </p:sp>
       <p:sp>
         <p:nvSpPr>
-          <p:cNvPr id="15" name="Rectangle 14"/>
+          <p:cNvPr id="14" name="Rectangle 13"/>
           <p:cNvSpPr/>
           <p:nvPr/>
         </p:nvSpPr>
@@ -14616,7 +14235,7 @@
       </p:sp>
       <p:sp>
         <p:nvSpPr>
-          <p:cNvPr id="16" name="TextBox 15"/>
+          <p:cNvPr id="15" name="TextBox 14"/>
           <p:cNvSpPr txBox="1"/>
           <p:nvPr/>
         </p:nvSpPr>
@@ -14651,7 +14270,7 @@
       </p:sp>
       <p:sp>
         <p:nvSpPr>
-          <p:cNvPr id="17" name="TextBox 16"/>
+          <p:cNvPr id="16" name="TextBox 15"/>
           <p:cNvSpPr txBox="1"/>
           <p:nvPr/>
         </p:nvSpPr>
@@ -14675,7 +14294,7 @@
               <a:spcAft>
                 <a:spcPts val="300"/>
               </a:spcAft>
-              <a:defRPr sz="930">
+              <a:defRPr sz="869">
                 <a:solidFill>
                   <a:srgbClr val="232D34"/>
                 </a:solidFill>
@@ -14690,7 +14309,7 @@
       </p:sp>
       <p:sp>
         <p:nvSpPr>
-          <p:cNvPr id="18" name="TextBox 17"/>
+          <p:cNvPr id="17" name="TextBox 16"/>
           <p:cNvSpPr txBox="1"/>
           <p:nvPr/>
         </p:nvSpPr>
@@ -14725,7 +14344,7 @@
       </p:sp>
       <p:sp>
         <p:nvSpPr>
-          <p:cNvPr id="19" name="TextBox 18"/>
+          <p:cNvPr id="18" name="TextBox 17"/>
           <p:cNvSpPr txBox="1"/>
           <p:nvPr/>
         </p:nvSpPr>

--- a/docs/통합CMS_ERP연계_고객사_안내자료.pptx
+++ b/docs/통합CMS_ERP연계_고객사_안내자료.pptx
@@ -3185,14 +3185,104 @@
       </p:sp>
       <p:sp>
         <p:nvSpPr>
-          <p:cNvPr id="4" name="TextBox 3"/>
+          <p:cNvPr id="4" name="Rounded Rectangle 3"/>
+          <p:cNvSpPr/>
+          <p:nvPr/>
+        </p:nvSpPr>
+        <p:spPr>
+          <a:xfrm>
+            <a:off x="360000" y="360000"/>
+            <a:ext cx="8424000" cy="3150000"/>
+          </a:xfrm>
+          <a:prstGeom prst="roundRect">
+            <a:avLst/>
+          </a:prstGeom>
+          <a:solidFill>
+            <a:srgbClr val="FFFFFF"/>
+          </a:solidFill>
+          <a:ln>
+            <a:solidFill>
+              <a:srgbClr val="D7E2E0"/>
+            </a:solidFill>
+          </a:ln>
+        </p:spPr>
+        <p:style>
+          <a:lnRef idx="1">
+            <a:schemeClr val="accent1"/>
+          </a:lnRef>
+          <a:fillRef idx="3">
+            <a:schemeClr val="accent1"/>
+          </a:fillRef>
+          <a:effectRef idx="2">
+            <a:schemeClr val="accent1"/>
+          </a:effectRef>
+          <a:fontRef idx="minor">
+            <a:schemeClr val="lt1"/>
+          </a:fontRef>
+        </p:style>
+        <p:txBody>
+          <a:bodyPr rtlCol="0" anchor="ctr"/>
+          <a:lstStyle/>
+          <a:p>
+            <a:pPr algn="ctr"/>
+          </a:p>
+        </p:txBody>
+      </p:sp>
+      <p:sp>
+        <p:nvSpPr>
+          <p:cNvPr id="5" name="Rectangle 4"/>
+          <p:cNvSpPr/>
+          <p:nvPr/>
+        </p:nvSpPr>
+        <p:spPr>
+          <a:xfrm>
+            <a:off x="360000" y="360000"/>
+            <a:ext cx="8424000" cy="162000"/>
+          </a:xfrm>
+          <a:prstGeom prst="rect">
+            <a:avLst/>
+          </a:prstGeom>
+          <a:solidFill>
+            <a:srgbClr val="FFFFFF"/>
+          </a:solidFill>
+          <a:ln>
+            <a:solidFill>
+              <a:srgbClr val="E1E8E6"/>
+            </a:solidFill>
+          </a:ln>
+        </p:spPr>
+        <p:style>
+          <a:lnRef idx="1">
+            <a:schemeClr val="accent1"/>
+          </a:lnRef>
+          <a:fillRef idx="3">
+            <a:schemeClr val="accent1"/>
+          </a:fillRef>
+          <a:effectRef idx="2">
+            <a:schemeClr val="accent1"/>
+          </a:effectRef>
+          <a:fontRef idx="minor">
+            <a:schemeClr val="lt1"/>
+          </a:fontRef>
+        </p:style>
+        <p:txBody>
+          <a:bodyPr rtlCol="0" anchor="ctr"/>
+          <a:lstStyle/>
+          <a:p>
+            <a:pPr algn="ctr"/>
+          </a:p>
+        </p:txBody>
+      </p:sp>
+      <p:sp>
+        <p:nvSpPr>
+          <p:cNvPr id="6" name="TextBox 5"/>
           <p:cNvSpPr txBox="1"/>
           <p:nvPr/>
         </p:nvSpPr>
         <p:spPr>
           <a:xfrm>
-            <a:off x="432000" y="594000"/>
-            <a:ext cx="5112000" cy="522000"/>
+            <a:off x="450000" y="388800"/>
+            <a:ext cx="1080000" cy="64800"/>
           </a:xfrm>
           <a:prstGeom prst="rect">
             <a:avLst/>
@@ -3207,28 +3297,27 @@
           <a:p>
             <a:pPr algn="l"/>
             <a:r>
-              <a:rPr sz="3000" b="1">
-                <a:solidFill>
-                  <a:srgbClr val="FFFFFF"/>
+              <a:rPr sz="440" b="0">
+                <a:solidFill>
+                  <a:srgbClr val="5F7179"/>
                 </a:solidFill>
                 <a:latin typeface="Malgun Gothic"/>
               </a:rPr>
-              <a:t>통합CMS ERP연계
-고객사 안내자료</a:t>
-            </a:r>
-          </a:p>
-        </p:txBody>
-      </p:sp>
-      <p:sp>
-        <p:nvSpPr>
-          <p:cNvPr id="5" name="TextBox 4"/>
+              <a:t>화면잠금   로그인설정</a:t>
+            </a:r>
+          </a:p>
+        </p:txBody>
+      </p:sp>
+      <p:sp>
+        <p:nvSpPr>
+          <p:cNvPr id="7" name="TextBox 6"/>
           <p:cNvSpPr txBox="1"/>
           <p:nvPr/>
         </p:nvSpPr>
         <p:spPr>
           <a:xfrm>
-            <a:off x="450000" y="1422000"/>
-            <a:ext cx="5040000" cy="198000"/>
+            <a:off x="3348000" y="388800"/>
+            <a:ext cx="2520000" cy="64800"/>
           </a:xfrm>
           <a:prstGeom prst="rect">
             <a:avLst/>
@@ -3241,29 +3330,432 @@
           </a:bodyPr>
           <a:lstStyle/>
           <a:p>
+            <a:pPr algn="ctr"/>
+            <a:r>
+              <a:rPr sz="440" b="0">
+                <a:solidFill>
+                  <a:srgbClr val="5F7179"/>
+                </a:solidFill>
+                <a:latin typeface="Malgun Gothic"/>
+              </a:rPr>
+              <a:t>웹케시에앤에스주식회사</a:t>
+            </a:r>
+          </a:p>
+        </p:txBody>
+      </p:sp>
+      <p:sp>
+        <p:nvSpPr>
+          <p:cNvPr id="8" name="TextBox 7"/>
+          <p:cNvSpPr txBox="1"/>
+          <p:nvPr/>
+        </p:nvSpPr>
+        <p:spPr>
+          <a:xfrm>
+            <a:off x="7380000" y="388800"/>
+            <a:ext cx="1224000" cy="64800"/>
+          </a:xfrm>
+          <a:prstGeom prst="rect">
+            <a:avLst/>
+          </a:prstGeom>
+          <a:noFill/>
+        </p:spPr>
+        <p:txBody>
+          <a:bodyPr wrap="none" anchor="ctr">
+            <a:spAutoFit/>
+          </a:bodyPr>
+          <a:lstStyle/>
+          <a:p>
+            <a:pPr algn="r"/>
+            <a:r>
+              <a:rPr sz="459" b="1">
+                <a:solidFill>
+                  <a:srgbClr val="006052"/>
+                </a:solidFill>
+                <a:latin typeface="Malgun Gothic"/>
+              </a:rPr>
+              <a:t>결재함  보고서</a:t>
+            </a:r>
+          </a:p>
+        </p:txBody>
+      </p:sp>
+      <p:sp>
+        <p:nvSpPr>
+          <p:cNvPr id="9" name="Rectangle 8"/>
+          <p:cNvSpPr/>
+          <p:nvPr/>
+        </p:nvSpPr>
+        <p:spPr>
+          <a:xfrm>
+            <a:off x="360000" y="522000"/>
+            <a:ext cx="8424000" cy="244800"/>
+          </a:xfrm>
+          <a:prstGeom prst="rect">
+            <a:avLst/>
+          </a:prstGeom>
+          <a:solidFill>
+            <a:srgbClr val="FFFFFF"/>
+          </a:solidFill>
+          <a:ln>
+            <a:solidFill>
+              <a:srgbClr val="EBEFEE"/>
+            </a:solidFill>
+          </a:ln>
+        </p:spPr>
+        <p:style>
+          <a:lnRef idx="1">
+            <a:schemeClr val="accent1"/>
+          </a:lnRef>
+          <a:fillRef idx="3">
+            <a:schemeClr val="accent1"/>
+          </a:fillRef>
+          <a:effectRef idx="2">
+            <a:schemeClr val="accent1"/>
+          </a:effectRef>
+          <a:fontRef idx="minor">
+            <a:schemeClr val="lt1"/>
+          </a:fontRef>
+        </p:style>
+        <p:txBody>
+          <a:bodyPr rtlCol="0" anchor="ctr"/>
+          <a:lstStyle/>
+          <a:p>
+            <a:pPr algn="ctr"/>
+          </a:p>
+        </p:txBody>
+      </p:sp>
+      <p:sp>
+        <p:nvSpPr>
+          <p:cNvPr id="10" name="TextBox 9"/>
+          <p:cNvSpPr txBox="1"/>
+          <p:nvPr/>
+        </p:nvSpPr>
+        <p:spPr>
+          <a:xfrm>
+            <a:off x="486000" y="576000"/>
+            <a:ext cx="792000" cy="90000"/>
+          </a:xfrm>
+          <a:prstGeom prst="rect">
+            <a:avLst/>
+          </a:prstGeom>
+          <a:noFill/>
+        </p:spPr>
+        <p:txBody>
+          <a:bodyPr wrap="none" anchor="ctr">
+            <a:spAutoFit/>
+          </a:bodyPr>
+          <a:lstStyle/>
+          <a:p>
             <a:pPr algn="l"/>
             <a:r>
-              <a:rPr sz="1320" b="0">
-                <a:solidFill>
-                  <a:srgbClr val="E5F7F3"/>
+              <a:rPr sz="760" b="1">
+                <a:solidFill>
+                  <a:srgbClr val="00A888"/>
                 </a:solidFill>
                 <a:latin typeface="Malgun Gothic"/>
               </a:rPr>
-              <a:t>은행 업무 결과를 ERP 회계·자금 업무로 연결합니다.</a:t>
-            </a:r>
-          </a:p>
-        </p:txBody>
-      </p:sp>
-      <p:sp>
-        <p:nvSpPr>
-          <p:cNvPr id="6" name="Rounded Rectangle 5"/>
+              <a:t>하나통합CMS</a:t>
+            </a:r>
+          </a:p>
+        </p:txBody>
+      </p:sp>
+      <p:sp>
+        <p:nvSpPr>
+          <p:cNvPr id="11" name="TextBox 10"/>
+          <p:cNvSpPr txBox="1"/>
+          <p:nvPr/>
+        </p:nvSpPr>
+        <p:spPr>
+          <a:xfrm>
+            <a:off x="1835999" y="583200"/>
+            <a:ext cx="576000" cy="79200"/>
+          </a:xfrm>
+          <a:prstGeom prst="rect">
+            <a:avLst/>
+          </a:prstGeom>
+          <a:noFill/>
+        </p:spPr>
+        <p:txBody>
+          <a:bodyPr wrap="none" anchor="ctr">
+            <a:spAutoFit/>
+          </a:bodyPr>
+          <a:lstStyle/>
+          <a:p>
+            <a:pPr algn="ctr"/>
+            <a:r>
+              <a:rPr sz="480" b="1">
+                <a:solidFill>
+                  <a:srgbClr val="232D34"/>
+                </a:solidFill>
+                <a:latin typeface="Malgun Gothic"/>
+              </a:rPr>
+              <a:t>통합자금관리</a:t>
+            </a:r>
+          </a:p>
+        </p:txBody>
+      </p:sp>
+      <p:sp>
+        <p:nvSpPr>
+          <p:cNvPr id="12" name="TextBox 11"/>
+          <p:cNvSpPr txBox="1"/>
+          <p:nvPr/>
+        </p:nvSpPr>
+        <p:spPr>
+          <a:xfrm>
+            <a:off x="2520000" y="583200"/>
+            <a:ext cx="576000" cy="79200"/>
+          </a:xfrm>
+          <a:prstGeom prst="rect">
+            <a:avLst/>
+          </a:prstGeom>
+          <a:noFill/>
+        </p:spPr>
+        <p:txBody>
+          <a:bodyPr wrap="none" anchor="ctr">
+            <a:spAutoFit/>
+          </a:bodyPr>
+          <a:lstStyle/>
+          <a:p>
+            <a:pPr algn="ctr"/>
+            <a:r>
+              <a:rPr sz="480" b="1">
+                <a:solidFill>
+                  <a:srgbClr val="232D34"/>
+                </a:solidFill>
+                <a:latin typeface="Malgun Gothic"/>
+              </a:rPr>
+              <a:t>자금수납</a:t>
+            </a:r>
+          </a:p>
+        </p:txBody>
+      </p:sp>
+      <p:sp>
+        <p:nvSpPr>
+          <p:cNvPr id="13" name="TextBox 12"/>
+          <p:cNvSpPr txBox="1"/>
+          <p:nvPr/>
+        </p:nvSpPr>
+        <p:spPr>
+          <a:xfrm>
+            <a:off x="3204000" y="583200"/>
+            <a:ext cx="576000" cy="79200"/>
+          </a:xfrm>
+          <a:prstGeom prst="rect">
+            <a:avLst/>
+          </a:prstGeom>
+          <a:noFill/>
+        </p:spPr>
+        <p:txBody>
+          <a:bodyPr wrap="none" anchor="ctr">
+            <a:spAutoFit/>
+          </a:bodyPr>
+          <a:lstStyle/>
+          <a:p>
+            <a:pPr algn="ctr"/>
+            <a:r>
+              <a:rPr sz="480" b="1">
+                <a:solidFill>
+                  <a:srgbClr val="232D34"/>
+                </a:solidFill>
+                <a:latin typeface="Malgun Gothic"/>
+              </a:rPr>
+              <a:t>자금지급</a:t>
+            </a:r>
+          </a:p>
+        </p:txBody>
+      </p:sp>
+      <p:sp>
+        <p:nvSpPr>
+          <p:cNvPr id="14" name="TextBox 13"/>
+          <p:cNvSpPr txBox="1"/>
+          <p:nvPr/>
+        </p:nvSpPr>
+        <p:spPr>
+          <a:xfrm>
+            <a:off x="3888000" y="583200"/>
+            <a:ext cx="576000" cy="79200"/>
+          </a:xfrm>
+          <a:prstGeom prst="rect">
+            <a:avLst/>
+          </a:prstGeom>
+          <a:noFill/>
+        </p:spPr>
+        <p:txBody>
+          <a:bodyPr wrap="none" anchor="ctr">
+            <a:spAutoFit/>
+          </a:bodyPr>
+          <a:lstStyle/>
+          <a:p>
+            <a:pPr algn="ctr"/>
+            <a:r>
+              <a:rPr sz="480" b="1">
+                <a:solidFill>
+                  <a:srgbClr val="232D34"/>
+                </a:solidFill>
+                <a:latin typeface="Malgun Gothic"/>
+              </a:rPr>
+              <a:t>법인카드</a:t>
+            </a:r>
+          </a:p>
+        </p:txBody>
+      </p:sp>
+      <p:sp>
+        <p:nvSpPr>
+          <p:cNvPr id="15" name="TextBox 14"/>
+          <p:cNvSpPr txBox="1"/>
+          <p:nvPr/>
+        </p:nvSpPr>
+        <p:spPr>
+          <a:xfrm>
+            <a:off x="4572000" y="583200"/>
+            <a:ext cx="576000" cy="79200"/>
+          </a:xfrm>
+          <a:prstGeom prst="rect">
+            <a:avLst/>
+          </a:prstGeom>
+          <a:noFill/>
+        </p:spPr>
+        <p:txBody>
+          <a:bodyPr wrap="none" anchor="ctr">
+            <a:spAutoFit/>
+          </a:bodyPr>
+          <a:lstStyle/>
+          <a:p>
+            <a:pPr algn="ctr"/>
+            <a:r>
+              <a:rPr sz="480" b="1">
+                <a:solidFill>
+                  <a:srgbClr val="232D34"/>
+                </a:solidFill>
+                <a:latin typeface="Malgun Gothic"/>
+              </a:rPr>
+              <a:t>외환/수출입</a:t>
+            </a:r>
+          </a:p>
+        </p:txBody>
+      </p:sp>
+      <p:sp>
+        <p:nvSpPr>
+          <p:cNvPr id="16" name="TextBox 15"/>
+          <p:cNvSpPr txBox="1"/>
+          <p:nvPr/>
+        </p:nvSpPr>
+        <p:spPr>
+          <a:xfrm>
+            <a:off x="5256000" y="583200"/>
+            <a:ext cx="576000" cy="79200"/>
+          </a:xfrm>
+          <a:prstGeom prst="rect">
+            <a:avLst/>
+          </a:prstGeom>
+          <a:noFill/>
+        </p:spPr>
+        <p:txBody>
+          <a:bodyPr wrap="none" anchor="ctr">
+            <a:spAutoFit/>
+          </a:bodyPr>
+          <a:lstStyle/>
+          <a:p>
+            <a:pPr algn="ctr"/>
+            <a:r>
+              <a:rPr sz="480" b="1">
+                <a:solidFill>
+                  <a:srgbClr val="232D34"/>
+                </a:solidFill>
+                <a:latin typeface="Malgun Gothic"/>
+              </a:rPr>
+              <a:t>부가서비스</a:t>
+            </a:r>
+          </a:p>
+        </p:txBody>
+      </p:sp>
+      <p:sp>
+        <p:nvSpPr>
+          <p:cNvPr id="17" name="TextBox 16"/>
+          <p:cNvSpPr txBox="1"/>
+          <p:nvPr/>
+        </p:nvSpPr>
+        <p:spPr>
+          <a:xfrm>
+            <a:off x="5940000" y="583200"/>
+            <a:ext cx="576000" cy="79200"/>
+          </a:xfrm>
+          <a:prstGeom prst="rect">
+            <a:avLst/>
+          </a:prstGeom>
+          <a:noFill/>
+        </p:spPr>
+        <p:txBody>
+          <a:bodyPr wrap="none" anchor="ctr">
+            <a:spAutoFit/>
+          </a:bodyPr>
+          <a:lstStyle/>
+          <a:p>
+            <a:pPr algn="ctr"/>
+            <a:r>
+              <a:rPr sz="480" b="1">
+                <a:solidFill>
+                  <a:srgbClr val="232D34"/>
+                </a:solidFill>
+                <a:latin typeface="Malgun Gothic"/>
+              </a:rPr>
+              <a:t>설정</a:t>
+            </a:r>
+          </a:p>
+        </p:txBody>
+      </p:sp>
+      <p:sp>
+        <p:nvSpPr>
+          <p:cNvPr id="18" name="Rectangle 17"/>
           <p:cNvSpPr/>
           <p:nvPr/>
         </p:nvSpPr>
         <p:spPr>
           <a:xfrm>
-            <a:off x="450000" y="1908000"/>
-            <a:ext cx="1835999" cy="702000"/>
+            <a:off x="360000" y="766800"/>
+            <a:ext cx="8424000" cy="1026000"/>
+          </a:xfrm>
+          <a:prstGeom prst="rect">
+            <a:avLst/>
+          </a:prstGeom>
+          <a:solidFill>
+            <a:srgbClr val="009789"/>
+          </a:solidFill>
+          <a:ln>
+            <a:noFill/>
+          </a:ln>
+        </p:spPr>
+        <p:style>
+          <a:lnRef idx="1">
+            <a:schemeClr val="accent1"/>
+          </a:lnRef>
+          <a:fillRef idx="3">
+            <a:schemeClr val="accent1"/>
+          </a:fillRef>
+          <a:effectRef idx="2">
+            <a:schemeClr val="accent1"/>
+          </a:effectRef>
+          <a:fontRef idx="minor">
+            <a:schemeClr val="lt1"/>
+          </a:fontRef>
+        </p:style>
+        <p:txBody>
+          <a:bodyPr rtlCol="0" anchor="ctr"/>
+          <a:lstStyle/>
+          <a:p>
+            <a:pPr algn="ctr"/>
+          </a:p>
+        </p:txBody>
+      </p:sp>
+      <p:sp>
+        <p:nvSpPr>
+          <p:cNvPr id="19" name="Rounded Rectangle 18"/>
+          <p:cNvSpPr/>
+          <p:nvPr/>
+        </p:nvSpPr>
+        <p:spPr>
+          <a:xfrm>
+            <a:off x="1980000" y="990000"/>
+            <a:ext cx="810000" cy="558000"/>
           </a:xfrm>
           <a:prstGeom prst="roundRect">
             <a:avLst/>
@@ -3301,23 +3793,25 @@
       </p:sp>
       <p:sp>
         <p:nvSpPr>
-          <p:cNvPr id="7" name="Rectangle 6"/>
+          <p:cNvPr id="20" name="Rounded Rectangle 19"/>
           <p:cNvSpPr/>
           <p:nvPr/>
         </p:nvSpPr>
         <p:spPr>
           <a:xfrm>
-            <a:off x="450000" y="1908000"/>
-            <a:ext cx="1835999" cy="46800"/>
-          </a:xfrm>
-          <a:prstGeom prst="rect">
+            <a:off x="2080800" y="1090800"/>
+            <a:ext cx="608400" cy="252000"/>
+          </a:xfrm>
+          <a:prstGeom prst="roundRect">
             <a:avLst/>
           </a:prstGeom>
           <a:solidFill>
-            <a:srgbClr val="00A888"/>
+            <a:srgbClr val="F5FAF9"/>
           </a:solidFill>
           <a:ln>
-            <a:noFill/>
+            <a:solidFill>
+              <a:srgbClr val="C6DCD8"/>
+            </a:solidFill>
           </a:ln>
         </p:spPr>
         <p:style>
@@ -3344,57 +3838,14 @@
       </p:sp>
       <p:sp>
         <p:nvSpPr>
-          <p:cNvPr id="8" name="Rounded Rectangle 7"/>
-          <p:cNvSpPr/>
-          <p:nvPr/>
-        </p:nvSpPr>
-        <p:spPr>
-          <a:xfrm>
-            <a:off x="576000" y="2033999"/>
-            <a:ext cx="259200" cy="259200"/>
-          </a:xfrm>
-          <a:prstGeom prst="roundRect">
-            <a:avLst/>
-          </a:prstGeom>
-          <a:solidFill>
-            <a:srgbClr val="00A888"/>
-          </a:solidFill>
-          <a:ln>
-            <a:noFill/>
-          </a:ln>
-        </p:spPr>
-        <p:style>
-          <a:lnRef idx="1">
-            <a:schemeClr val="accent1"/>
-          </a:lnRef>
-          <a:fillRef idx="3">
-            <a:schemeClr val="accent1"/>
-          </a:fillRef>
-          <a:effectRef idx="2">
-            <a:schemeClr val="accent1"/>
-          </a:effectRef>
-          <a:fontRef idx="minor">
-            <a:schemeClr val="lt1"/>
-          </a:fontRef>
-        </p:style>
-        <p:txBody>
-          <a:bodyPr rtlCol="0" anchor="ctr"/>
-          <a:lstStyle/>
-          <a:p>
-            <a:pPr algn="ctr"/>
-          </a:p>
-        </p:txBody>
-      </p:sp>
-      <p:sp>
-        <p:nvSpPr>
-          <p:cNvPr id="9" name="TextBox 8"/>
+          <p:cNvPr id="21" name="TextBox 20"/>
           <p:cNvSpPr txBox="1"/>
           <p:nvPr/>
         </p:nvSpPr>
         <p:spPr>
           <a:xfrm>
-            <a:off x="576000" y="2062799"/>
-            <a:ext cx="259200" cy="125999"/>
+            <a:off x="2070000" y="1368000"/>
+            <a:ext cx="630000" cy="90000"/>
           </a:xfrm>
           <a:prstGeom prst="rect">
             <a:avLst/>
@@ -3409,105 +3860,27 @@
           <a:p>
             <a:pPr algn="ctr"/>
             <a:r>
-              <a:rPr sz="1100" b="1">
-                <a:solidFill>
-                  <a:srgbClr val="FFFFFF"/>
+              <a:rPr sz="550" b="1">
+                <a:solidFill>
+                  <a:srgbClr val="232D34"/>
                 </a:solidFill>
                 <a:latin typeface="Malgun Gothic"/>
               </a:rPr>
-              <a:t>1</a:t>
-            </a:r>
-          </a:p>
-        </p:txBody>
-      </p:sp>
-      <p:sp>
-        <p:nvSpPr>
-          <p:cNvPr id="10" name="TextBox 9"/>
-          <p:cNvSpPr txBox="1"/>
-          <p:nvPr/>
-        </p:nvSpPr>
-        <p:spPr>
-          <a:xfrm>
-            <a:off x="900000" y="2030400"/>
-            <a:ext cx="1259999" cy="172800"/>
-          </a:xfrm>
-          <a:prstGeom prst="rect">
-            <a:avLst/>
-          </a:prstGeom>
-          <a:noFill/>
-        </p:spPr>
-        <p:txBody>
-          <a:bodyPr wrap="none" anchor="ctr">
-            <a:spAutoFit/>
-          </a:bodyPr>
-          <a:lstStyle/>
-          <a:p>
-            <a:pPr algn="l"/>
-            <a:r>
-              <a:rPr sz="1300" b="1">
-                <a:solidFill>
-                  <a:srgbClr val="12363F"/>
-                </a:solidFill>
-                <a:latin typeface="Malgun Gothic"/>
-              </a:rPr>
-              <a:t>조회</a:t>
-            </a:r>
-          </a:p>
-        </p:txBody>
-      </p:sp>
-      <p:sp>
-        <p:nvSpPr>
-          <p:cNvPr id="11" name="TextBox 10"/>
-          <p:cNvSpPr txBox="1"/>
-          <p:nvPr/>
-        </p:nvSpPr>
-        <p:spPr>
-          <a:xfrm>
-            <a:off x="612000" y="2278800"/>
-            <a:ext cx="1511999" cy="259200"/>
-          </a:xfrm>
-          <a:prstGeom prst="rect">
-            <a:avLst/>
-          </a:prstGeom>
-          <a:noFill/>
-        </p:spPr>
-        <p:txBody>
-          <a:bodyPr wrap="square">
-            <a:spAutoFit/>
-          </a:bodyPr>
-          <a:lstStyle/>
-          <a:p>
-            <a:pPr>
-              <a:spcAft>
-                <a:spcPts val="300"/>
-              </a:spcAft>
-              <a:defRPr sz="800">
-                <a:solidFill>
-                  <a:srgbClr val="232D34"/>
-                </a:solidFill>
-                <a:latin typeface="Malgun Gothic"/>
-              </a:defRPr>
-            </a:pPr>
-            <a:r>
-              <a:t>계좌·카드·세금계산서</a:t>
-            </a:r>
-            <a:br/>
-            <a:r>
-              <a:t>데이터 자동 수집</a:t>
-            </a:r>
-          </a:p>
-        </p:txBody>
-      </p:sp>
-      <p:sp>
-        <p:nvSpPr>
-          <p:cNvPr id="12" name="Rounded Rectangle 11"/>
+              <a:t>통합계좌조회</a:t>
+            </a:r>
+          </a:p>
+        </p:txBody>
+      </p:sp>
+      <p:sp>
+        <p:nvSpPr>
+          <p:cNvPr id="22" name="Rounded Rectangle 21"/>
           <p:cNvSpPr/>
           <p:nvPr/>
         </p:nvSpPr>
         <p:spPr>
           <a:xfrm>
-            <a:off x="2412000" y="1908000"/>
-            <a:ext cx="1835999" cy="702000"/>
+            <a:off x="2898000" y="990000"/>
+            <a:ext cx="810000" cy="558000"/>
           </a:xfrm>
           <a:prstGeom prst="roundRect">
             <a:avLst/>
@@ -3545,23 +3918,25 @@
       </p:sp>
       <p:sp>
         <p:nvSpPr>
-          <p:cNvPr id="13" name="Rectangle 12"/>
+          <p:cNvPr id="23" name="Rounded Rectangle 22"/>
           <p:cNvSpPr/>
           <p:nvPr/>
         </p:nvSpPr>
         <p:spPr>
           <a:xfrm>
-            <a:off x="2412000" y="1908000"/>
-            <a:ext cx="1835999" cy="46800"/>
-          </a:xfrm>
-          <a:prstGeom prst="rect">
+            <a:off x="2998800" y="1090800"/>
+            <a:ext cx="608400" cy="252000"/>
+          </a:xfrm>
+          <a:prstGeom prst="roundRect">
             <a:avLst/>
           </a:prstGeom>
           <a:solidFill>
-            <a:srgbClr val="00A888"/>
+            <a:srgbClr val="F5FAF9"/>
           </a:solidFill>
           <a:ln>
-            <a:noFill/>
+            <a:solidFill>
+              <a:srgbClr val="C6DCD8"/>
+            </a:solidFill>
           </a:ln>
         </p:spPr>
         <p:style>
@@ -3588,57 +3963,14 @@
       </p:sp>
       <p:sp>
         <p:nvSpPr>
-          <p:cNvPr id="14" name="Rounded Rectangle 13"/>
-          <p:cNvSpPr/>
-          <p:nvPr/>
-        </p:nvSpPr>
-        <p:spPr>
-          <a:xfrm>
-            <a:off x="2538000" y="2033999"/>
-            <a:ext cx="259200" cy="259200"/>
-          </a:xfrm>
-          <a:prstGeom prst="roundRect">
-            <a:avLst/>
-          </a:prstGeom>
-          <a:solidFill>
-            <a:srgbClr val="00A888"/>
-          </a:solidFill>
-          <a:ln>
-            <a:noFill/>
-          </a:ln>
-        </p:spPr>
-        <p:style>
-          <a:lnRef idx="1">
-            <a:schemeClr val="accent1"/>
-          </a:lnRef>
-          <a:fillRef idx="3">
-            <a:schemeClr val="accent1"/>
-          </a:fillRef>
-          <a:effectRef idx="2">
-            <a:schemeClr val="accent1"/>
-          </a:effectRef>
-          <a:fontRef idx="minor">
-            <a:schemeClr val="lt1"/>
-          </a:fontRef>
-        </p:style>
-        <p:txBody>
-          <a:bodyPr rtlCol="0" anchor="ctr"/>
-          <a:lstStyle/>
-          <a:p>
-            <a:pPr algn="ctr"/>
-          </a:p>
-        </p:txBody>
-      </p:sp>
-      <p:sp>
-        <p:nvSpPr>
-          <p:cNvPr id="15" name="TextBox 14"/>
+          <p:cNvPr id="24" name="TextBox 23"/>
           <p:cNvSpPr txBox="1"/>
           <p:nvPr/>
         </p:nvSpPr>
         <p:spPr>
           <a:xfrm>
-            <a:off x="2538000" y="2062799"/>
-            <a:ext cx="259200" cy="125999"/>
+            <a:off x="2988000" y="1368000"/>
+            <a:ext cx="630000" cy="90000"/>
           </a:xfrm>
           <a:prstGeom prst="rect">
             <a:avLst/>
@@ -3653,105 +3985,27 @@
           <a:p>
             <a:pPr algn="ctr"/>
             <a:r>
-              <a:rPr sz="1100" b="1">
-                <a:solidFill>
-                  <a:srgbClr val="FFFFFF"/>
+              <a:rPr sz="550" b="1">
+                <a:solidFill>
+                  <a:srgbClr val="232D34"/>
                 </a:solidFill>
                 <a:latin typeface="Malgun Gothic"/>
               </a:rPr>
-              <a:t>2</a:t>
-            </a:r>
-          </a:p>
-        </p:txBody>
-      </p:sp>
-      <p:sp>
-        <p:nvSpPr>
-          <p:cNvPr id="16" name="TextBox 15"/>
-          <p:cNvSpPr txBox="1"/>
-          <p:nvPr/>
-        </p:nvSpPr>
-        <p:spPr>
-          <a:xfrm>
-            <a:off x="2862000" y="2030400"/>
-            <a:ext cx="1259999" cy="172800"/>
-          </a:xfrm>
-          <a:prstGeom prst="rect">
-            <a:avLst/>
-          </a:prstGeom>
-          <a:noFill/>
-        </p:spPr>
-        <p:txBody>
-          <a:bodyPr wrap="none" anchor="ctr">
-            <a:spAutoFit/>
-          </a:bodyPr>
-          <a:lstStyle/>
-          <a:p>
-            <a:pPr algn="l"/>
-            <a:r>
-              <a:rPr sz="1300" b="1">
-                <a:solidFill>
-                  <a:srgbClr val="12363F"/>
-                </a:solidFill>
-                <a:latin typeface="Malgun Gothic"/>
-              </a:rPr>
-              <a:t>전송</a:t>
-            </a:r>
-          </a:p>
-        </p:txBody>
-      </p:sp>
-      <p:sp>
-        <p:nvSpPr>
-          <p:cNvPr id="17" name="TextBox 16"/>
-          <p:cNvSpPr txBox="1"/>
-          <p:nvPr/>
-        </p:nvSpPr>
-        <p:spPr>
-          <a:xfrm>
-            <a:off x="2574000" y="2278800"/>
-            <a:ext cx="1511999" cy="259200"/>
-          </a:xfrm>
-          <a:prstGeom prst="rect">
-            <a:avLst/>
-          </a:prstGeom>
-          <a:noFill/>
-        </p:spPr>
-        <p:txBody>
-          <a:bodyPr wrap="square">
-            <a:spAutoFit/>
-          </a:bodyPr>
-          <a:lstStyle/>
-          <a:p>
-            <a:pPr>
-              <a:spcAft>
-                <a:spcPts val="300"/>
-              </a:spcAft>
-              <a:defRPr sz="800">
-                <a:solidFill>
-                  <a:srgbClr val="232D34"/>
-                </a:solidFill>
-                <a:latin typeface="Malgun Gothic"/>
-              </a:defRPr>
-            </a:pPr>
-            <a:r>
-              <a:t>API·DB·RFC 방식으로</a:t>
-            </a:r>
-            <a:br/>
-            <a:r>
-              <a:t>ERP에 전달</a:t>
-            </a:r>
-          </a:p>
-        </p:txBody>
-      </p:sp>
-      <p:sp>
-        <p:nvSpPr>
-          <p:cNvPr id="18" name="Rounded Rectangle 17"/>
+              <a:t>이체</a:t>
+            </a:r>
+          </a:p>
+        </p:txBody>
+      </p:sp>
+      <p:sp>
+        <p:nvSpPr>
+          <p:cNvPr id="25" name="Rounded Rectangle 24"/>
           <p:cNvSpPr/>
           <p:nvPr/>
         </p:nvSpPr>
         <p:spPr>
           <a:xfrm>
-            <a:off x="4374000" y="1908000"/>
-            <a:ext cx="1835999" cy="702000"/>
+            <a:off x="3816000" y="990000"/>
+            <a:ext cx="810000" cy="558000"/>
           </a:xfrm>
           <a:prstGeom prst="roundRect">
             <a:avLst/>
@@ -3789,16 +4043,1871 @@
       </p:sp>
       <p:sp>
         <p:nvSpPr>
-          <p:cNvPr id="19" name="Rectangle 18"/>
+          <p:cNvPr id="26" name="Rounded Rectangle 25"/>
           <p:cNvSpPr/>
           <p:nvPr/>
         </p:nvSpPr>
         <p:spPr>
           <a:xfrm>
-            <a:off x="4374000" y="1908000"/>
-            <a:ext cx="1835999" cy="46800"/>
-          </a:xfrm>
-          <a:prstGeom prst="rect">
+            <a:off x="3916800" y="1090800"/>
+            <a:ext cx="608400" cy="252000"/>
+          </a:xfrm>
+          <a:prstGeom prst="roundRect">
+            <a:avLst/>
+          </a:prstGeom>
+          <a:solidFill>
+            <a:srgbClr val="F5FAF9"/>
+          </a:solidFill>
+          <a:ln>
+            <a:solidFill>
+              <a:srgbClr val="C6DCD8"/>
+            </a:solidFill>
+          </a:ln>
+        </p:spPr>
+        <p:style>
+          <a:lnRef idx="1">
+            <a:schemeClr val="accent1"/>
+          </a:lnRef>
+          <a:fillRef idx="3">
+            <a:schemeClr val="accent1"/>
+          </a:fillRef>
+          <a:effectRef idx="2">
+            <a:schemeClr val="accent1"/>
+          </a:effectRef>
+          <a:fontRef idx="minor">
+            <a:schemeClr val="lt1"/>
+          </a:fontRef>
+        </p:style>
+        <p:txBody>
+          <a:bodyPr rtlCol="0" anchor="ctr"/>
+          <a:lstStyle/>
+          <a:p>
+            <a:pPr algn="ctr"/>
+          </a:p>
+        </p:txBody>
+      </p:sp>
+      <p:sp>
+        <p:nvSpPr>
+          <p:cNvPr id="27" name="TextBox 26"/>
+          <p:cNvSpPr txBox="1"/>
+          <p:nvPr/>
+        </p:nvSpPr>
+        <p:spPr>
+          <a:xfrm>
+            <a:off x="3906000" y="1368000"/>
+            <a:ext cx="630000" cy="90000"/>
+          </a:xfrm>
+          <a:prstGeom prst="rect">
+            <a:avLst/>
+          </a:prstGeom>
+          <a:noFill/>
+        </p:spPr>
+        <p:txBody>
+          <a:bodyPr wrap="none" anchor="ctr">
+            <a:spAutoFit/>
+          </a:bodyPr>
+          <a:lstStyle/>
+          <a:p>
+            <a:pPr algn="ctr"/>
+            <a:r>
+              <a:rPr sz="550" b="1">
+                <a:solidFill>
+                  <a:srgbClr val="232D34"/>
+                </a:solidFill>
+                <a:latin typeface="Malgun Gothic"/>
+              </a:rPr>
+              <a:t>대량이체</a:t>
+            </a:r>
+          </a:p>
+        </p:txBody>
+      </p:sp>
+      <p:sp>
+        <p:nvSpPr>
+          <p:cNvPr id="28" name="Rounded Rectangle 27"/>
+          <p:cNvSpPr/>
+          <p:nvPr/>
+        </p:nvSpPr>
+        <p:spPr>
+          <a:xfrm>
+            <a:off x="4734000" y="990000"/>
+            <a:ext cx="810000" cy="558000"/>
+          </a:xfrm>
+          <a:prstGeom prst="roundRect">
+            <a:avLst/>
+          </a:prstGeom>
+          <a:solidFill>
+            <a:srgbClr val="FFFFFF"/>
+          </a:solidFill>
+          <a:ln>
+            <a:solidFill>
+              <a:srgbClr val="C6DCD8"/>
+            </a:solidFill>
+          </a:ln>
+        </p:spPr>
+        <p:style>
+          <a:lnRef idx="1">
+            <a:schemeClr val="accent1"/>
+          </a:lnRef>
+          <a:fillRef idx="3">
+            <a:schemeClr val="accent1"/>
+          </a:fillRef>
+          <a:effectRef idx="2">
+            <a:schemeClr val="accent1"/>
+          </a:effectRef>
+          <a:fontRef idx="minor">
+            <a:schemeClr val="lt1"/>
+          </a:fontRef>
+        </p:style>
+        <p:txBody>
+          <a:bodyPr rtlCol="0" anchor="ctr"/>
+          <a:lstStyle/>
+          <a:p>
+            <a:pPr algn="ctr"/>
+          </a:p>
+        </p:txBody>
+      </p:sp>
+      <p:sp>
+        <p:nvSpPr>
+          <p:cNvPr id="29" name="Rounded Rectangle 28"/>
+          <p:cNvSpPr/>
+          <p:nvPr/>
+        </p:nvSpPr>
+        <p:spPr>
+          <a:xfrm>
+            <a:off x="4834800" y="1090800"/>
+            <a:ext cx="608400" cy="252000"/>
+          </a:xfrm>
+          <a:prstGeom prst="roundRect">
+            <a:avLst/>
+          </a:prstGeom>
+          <a:solidFill>
+            <a:srgbClr val="F5FAF9"/>
+          </a:solidFill>
+          <a:ln>
+            <a:solidFill>
+              <a:srgbClr val="C6DCD8"/>
+            </a:solidFill>
+          </a:ln>
+        </p:spPr>
+        <p:style>
+          <a:lnRef idx="1">
+            <a:schemeClr val="accent1"/>
+          </a:lnRef>
+          <a:fillRef idx="3">
+            <a:schemeClr val="accent1"/>
+          </a:fillRef>
+          <a:effectRef idx="2">
+            <a:schemeClr val="accent1"/>
+          </a:effectRef>
+          <a:fontRef idx="minor">
+            <a:schemeClr val="lt1"/>
+          </a:fontRef>
+        </p:style>
+        <p:txBody>
+          <a:bodyPr rtlCol="0" anchor="ctr"/>
+          <a:lstStyle/>
+          <a:p>
+            <a:pPr algn="ctr"/>
+          </a:p>
+        </p:txBody>
+      </p:sp>
+      <p:sp>
+        <p:nvSpPr>
+          <p:cNvPr id="30" name="TextBox 29"/>
+          <p:cNvSpPr txBox="1"/>
+          <p:nvPr/>
+        </p:nvSpPr>
+        <p:spPr>
+          <a:xfrm>
+            <a:off x="4824000" y="1368000"/>
+            <a:ext cx="630000" cy="90000"/>
+          </a:xfrm>
+          <a:prstGeom prst="rect">
+            <a:avLst/>
+          </a:prstGeom>
+          <a:noFill/>
+        </p:spPr>
+        <p:txBody>
+          <a:bodyPr wrap="none" anchor="ctr">
+            <a:spAutoFit/>
+          </a:bodyPr>
+          <a:lstStyle/>
+          <a:p>
+            <a:pPr algn="ctr"/>
+            <a:r>
+              <a:rPr sz="550" b="1">
+                <a:solidFill>
+                  <a:srgbClr val="232D34"/>
+                </a:solidFill>
+                <a:latin typeface="Malgun Gothic"/>
+              </a:rPr>
+              <a:t>계좌관리</a:t>
+            </a:r>
+          </a:p>
+        </p:txBody>
+      </p:sp>
+      <p:sp>
+        <p:nvSpPr>
+          <p:cNvPr id="31" name="Rounded Rectangle 30"/>
+          <p:cNvSpPr/>
+          <p:nvPr/>
+        </p:nvSpPr>
+        <p:spPr>
+          <a:xfrm>
+            <a:off x="5652000" y="990000"/>
+            <a:ext cx="810000" cy="558000"/>
+          </a:xfrm>
+          <a:prstGeom prst="roundRect">
+            <a:avLst/>
+          </a:prstGeom>
+          <a:solidFill>
+            <a:srgbClr val="FFFFFF"/>
+          </a:solidFill>
+          <a:ln>
+            <a:solidFill>
+              <a:srgbClr val="C6DCD8"/>
+            </a:solidFill>
+          </a:ln>
+        </p:spPr>
+        <p:style>
+          <a:lnRef idx="1">
+            <a:schemeClr val="accent1"/>
+          </a:lnRef>
+          <a:fillRef idx="3">
+            <a:schemeClr val="accent1"/>
+          </a:fillRef>
+          <a:effectRef idx="2">
+            <a:schemeClr val="accent1"/>
+          </a:effectRef>
+          <a:fontRef idx="minor">
+            <a:schemeClr val="lt1"/>
+          </a:fontRef>
+        </p:style>
+        <p:txBody>
+          <a:bodyPr rtlCol="0" anchor="ctr"/>
+          <a:lstStyle/>
+          <a:p>
+            <a:pPr algn="ctr"/>
+          </a:p>
+        </p:txBody>
+      </p:sp>
+      <p:sp>
+        <p:nvSpPr>
+          <p:cNvPr id="32" name="Rounded Rectangle 31"/>
+          <p:cNvSpPr/>
+          <p:nvPr/>
+        </p:nvSpPr>
+        <p:spPr>
+          <a:xfrm>
+            <a:off x="5752800" y="1090800"/>
+            <a:ext cx="608400" cy="252000"/>
+          </a:xfrm>
+          <a:prstGeom prst="roundRect">
+            <a:avLst/>
+          </a:prstGeom>
+          <a:solidFill>
+            <a:srgbClr val="F5FAF9"/>
+          </a:solidFill>
+          <a:ln>
+            <a:solidFill>
+              <a:srgbClr val="C6DCD8"/>
+            </a:solidFill>
+          </a:ln>
+        </p:spPr>
+        <p:style>
+          <a:lnRef idx="1">
+            <a:schemeClr val="accent1"/>
+          </a:lnRef>
+          <a:fillRef idx="3">
+            <a:schemeClr val="accent1"/>
+          </a:fillRef>
+          <a:effectRef idx="2">
+            <a:schemeClr val="accent1"/>
+          </a:effectRef>
+          <a:fontRef idx="minor">
+            <a:schemeClr val="lt1"/>
+          </a:fontRef>
+        </p:style>
+        <p:txBody>
+          <a:bodyPr rtlCol="0" anchor="ctr"/>
+          <a:lstStyle/>
+          <a:p>
+            <a:pPr algn="ctr"/>
+          </a:p>
+        </p:txBody>
+      </p:sp>
+      <p:sp>
+        <p:nvSpPr>
+          <p:cNvPr id="33" name="TextBox 32"/>
+          <p:cNvSpPr txBox="1"/>
+          <p:nvPr/>
+        </p:nvSpPr>
+        <p:spPr>
+          <a:xfrm>
+            <a:off x="5742000" y="1368000"/>
+            <a:ext cx="630000" cy="90000"/>
+          </a:xfrm>
+          <a:prstGeom prst="rect">
+            <a:avLst/>
+          </a:prstGeom>
+          <a:noFill/>
+        </p:spPr>
+        <p:txBody>
+          <a:bodyPr wrap="none" anchor="ctr">
+            <a:spAutoFit/>
+          </a:bodyPr>
+          <a:lstStyle/>
+          <a:p>
+            <a:pPr algn="ctr"/>
+            <a:r>
+              <a:rPr sz="550" b="1">
+                <a:solidFill>
+                  <a:srgbClr val="232D34"/>
+                </a:solidFill>
+                <a:latin typeface="Malgun Gothic"/>
+              </a:rPr>
+              <a:t>예금주조회</a:t>
+            </a:r>
+          </a:p>
+        </p:txBody>
+      </p:sp>
+      <p:sp>
+        <p:nvSpPr>
+          <p:cNvPr id="34" name="Rounded Rectangle 33"/>
+          <p:cNvSpPr/>
+          <p:nvPr/>
+        </p:nvSpPr>
+        <p:spPr>
+          <a:xfrm>
+            <a:off x="6570000" y="990000"/>
+            <a:ext cx="810000" cy="558000"/>
+          </a:xfrm>
+          <a:prstGeom prst="roundRect">
+            <a:avLst/>
+          </a:prstGeom>
+          <a:solidFill>
+            <a:srgbClr val="FFFFFF"/>
+          </a:solidFill>
+          <a:ln>
+            <a:solidFill>
+              <a:srgbClr val="C6DCD8"/>
+            </a:solidFill>
+          </a:ln>
+        </p:spPr>
+        <p:style>
+          <a:lnRef idx="1">
+            <a:schemeClr val="accent1"/>
+          </a:lnRef>
+          <a:fillRef idx="3">
+            <a:schemeClr val="accent1"/>
+          </a:fillRef>
+          <a:effectRef idx="2">
+            <a:schemeClr val="accent1"/>
+          </a:effectRef>
+          <a:fontRef idx="minor">
+            <a:schemeClr val="lt1"/>
+          </a:fontRef>
+        </p:style>
+        <p:txBody>
+          <a:bodyPr rtlCol="0" anchor="ctr"/>
+          <a:lstStyle/>
+          <a:p>
+            <a:pPr algn="ctr"/>
+          </a:p>
+        </p:txBody>
+      </p:sp>
+      <p:sp>
+        <p:nvSpPr>
+          <p:cNvPr id="35" name="Rounded Rectangle 34"/>
+          <p:cNvSpPr/>
+          <p:nvPr/>
+        </p:nvSpPr>
+        <p:spPr>
+          <a:xfrm>
+            <a:off x="6670800" y="1090800"/>
+            <a:ext cx="608400" cy="252000"/>
+          </a:xfrm>
+          <a:prstGeom prst="roundRect">
+            <a:avLst/>
+          </a:prstGeom>
+          <a:solidFill>
+            <a:srgbClr val="F5FAF9"/>
+          </a:solidFill>
+          <a:ln>
+            <a:solidFill>
+              <a:srgbClr val="C6DCD8"/>
+            </a:solidFill>
+          </a:ln>
+        </p:spPr>
+        <p:style>
+          <a:lnRef idx="1">
+            <a:schemeClr val="accent1"/>
+          </a:lnRef>
+          <a:fillRef idx="3">
+            <a:schemeClr val="accent1"/>
+          </a:fillRef>
+          <a:effectRef idx="2">
+            <a:schemeClr val="accent1"/>
+          </a:effectRef>
+          <a:fontRef idx="minor">
+            <a:schemeClr val="lt1"/>
+          </a:fontRef>
+        </p:style>
+        <p:txBody>
+          <a:bodyPr rtlCol="0" anchor="ctr"/>
+          <a:lstStyle/>
+          <a:p>
+            <a:pPr algn="ctr"/>
+          </a:p>
+        </p:txBody>
+      </p:sp>
+      <p:sp>
+        <p:nvSpPr>
+          <p:cNvPr id="36" name="TextBox 35"/>
+          <p:cNvSpPr txBox="1"/>
+          <p:nvPr/>
+        </p:nvSpPr>
+        <p:spPr>
+          <a:xfrm>
+            <a:off x="6660000" y="1368000"/>
+            <a:ext cx="630000" cy="90000"/>
+          </a:xfrm>
+          <a:prstGeom prst="rect">
+            <a:avLst/>
+          </a:prstGeom>
+          <a:noFill/>
+        </p:spPr>
+        <p:txBody>
+          <a:bodyPr wrap="none" anchor="ctr">
+            <a:spAutoFit/>
+          </a:bodyPr>
+          <a:lstStyle/>
+          <a:p>
+            <a:pPr algn="ctr"/>
+            <a:r>
+              <a:rPr sz="550" b="1">
+                <a:solidFill>
+                  <a:srgbClr val="232D34"/>
+                </a:solidFill>
+                <a:latin typeface="Malgun Gothic"/>
+              </a:rPr>
+              <a:t>통합공과금</a:t>
+            </a:r>
+          </a:p>
+        </p:txBody>
+      </p:sp>
+      <p:sp>
+        <p:nvSpPr>
+          <p:cNvPr id="37" name="TextBox 36"/>
+          <p:cNvSpPr txBox="1"/>
+          <p:nvPr/>
+        </p:nvSpPr>
+        <p:spPr>
+          <a:xfrm>
+            <a:off x="1980000" y="1925999"/>
+            <a:ext cx="827999" cy="93600"/>
+          </a:xfrm>
+          <a:prstGeom prst="rect">
+            <a:avLst/>
+          </a:prstGeom>
+          <a:noFill/>
+        </p:spPr>
+        <p:txBody>
+          <a:bodyPr wrap="none" anchor="ctr">
+            <a:spAutoFit/>
+          </a:bodyPr>
+          <a:lstStyle/>
+          <a:p>
+            <a:pPr algn="l"/>
+            <a:r>
+              <a:rPr sz="650" b="1">
+                <a:solidFill>
+                  <a:srgbClr val="232D34"/>
+                </a:solidFill>
+                <a:latin typeface="Malgun Gothic"/>
+              </a:rPr>
+              <a:t>금융자산현황</a:t>
+            </a:r>
+          </a:p>
+        </p:txBody>
+      </p:sp>
+      <p:sp>
+        <p:nvSpPr>
+          <p:cNvPr id="38" name="Rectangle 37"/>
+          <p:cNvSpPr/>
+          <p:nvPr/>
+        </p:nvSpPr>
+        <p:spPr>
+          <a:xfrm>
+            <a:off x="1980000" y="2051999"/>
+            <a:ext cx="3564000" cy="7200"/>
+          </a:xfrm>
+          <a:prstGeom prst="rect">
+            <a:avLst/>
+          </a:prstGeom>
+          <a:solidFill>
+            <a:srgbClr val="232D34"/>
+          </a:solidFill>
+          <a:ln>
+            <a:noFill/>
+          </a:ln>
+        </p:spPr>
+        <p:style>
+          <a:lnRef idx="1">
+            <a:schemeClr val="accent1"/>
+          </a:lnRef>
+          <a:fillRef idx="3">
+            <a:schemeClr val="accent1"/>
+          </a:fillRef>
+          <a:effectRef idx="2">
+            <a:schemeClr val="accent1"/>
+          </a:effectRef>
+          <a:fontRef idx="minor">
+            <a:schemeClr val="lt1"/>
+          </a:fontRef>
+        </p:style>
+        <p:txBody>
+          <a:bodyPr rtlCol="0" anchor="ctr"/>
+          <a:lstStyle/>
+          <a:p>
+            <a:pPr algn="ctr"/>
+          </a:p>
+        </p:txBody>
+      </p:sp>
+      <p:sp>
+        <p:nvSpPr>
+          <p:cNvPr id="39" name="TextBox 38"/>
+          <p:cNvSpPr txBox="1"/>
+          <p:nvPr/>
+        </p:nvSpPr>
+        <p:spPr>
+          <a:xfrm>
+            <a:off x="1980000" y="2286000"/>
+            <a:ext cx="864000" cy="115200"/>
+          </a:xfrm>
+          <a:prstGeom prst="rect">
+            <a:avLst/>
+          </a:prstGeom>
+          <a:noFill/>
+        </p:spPr>
+        <p:txBody>
+          <a:bodyPr wrap="none" anchor="ctr">
+            <a:spAutoFit/>
+          </a:bodyPr>
+          <a:lstStyle/>
+          <a:p>
+            <a:pPr algn="l"/>
+            <a:r>
+              <a:rPr sz="750" b="1">
+                <a:solidFill>
+                  <a:srgbClr val="232D34"/>
+                </a:solidFill>
+                <a:latin typeface="Malgun Gothic"/>
+              </a:rPr>
+              <a:t>금융 총자산</a:t>
+            </a:r>
+          </a:p>
+        </p:txBody>
+      </p:sp>
+      <p:sp>
+        <p:nvSpPr>
+          <p:cNvPr id="40" name="TextBox 39"/>
+          <p:cNvSpPr txBox="1"/>
+          <p:nvPr/>
+        </p:nvSpPr>
+        <p:spPr>
+          <a:xfrm>
+            <a:off x="4500000" y="2250000"/>
+            <a:ext cx="936000" cy="162000"/>
+          </a:xfrm>
+          <a:prstGeom prst="rect">
+            <a:avLst/>
+          </a:prstGeom>
+          <a:noFill/>
+        </p:spPr>
+        <p:txBody>
+          <a:bodyPr wrap="none" anchor="ctr">
+            <a:spAutoFit/>
+          </a:bodyPr>
+          <a:lstStyle/>
+          <a:p>
+            <a:pPr algn="r"/>
+            <a:r>
+              <a:rPr sz="1200" b="1">
+                <a:solidFill>
+                  <a:srgbClr val="00A888"/>
+                </a:solidFill>
+                <a:latin typeface="Malgun Gothic"/>
+              </a:rPr>
+              <a:t>1,838,188 원</a:t>
+            </a:r>
+          </a:p>
+        </p:txBody>
+      </p:sp>
+      <p:sp>
+        <p:nvSpPr>
+          <p:cNvPr id="41" name="Rounded Rectangle 40"/>
+          <p:cNvSpPr/>
+          <p:nvPr/>
+        </p:nvSpPr>
+        <p:spPr>
+          <a:xfrm>
+            <a:off x="1980000" y="2718000"/>
+            <a:ext cx="1080000" cy="450000"/>
+          </a:xfrm>
+          <a:prstGeom prst="roundRect">
+            <a:avLst/>
+          </a:prstGeom>
+          <a:solidFill>
+            <a:srgbClr val="FFFFFF"/>
+          </a:solidFill>
+          <a:ln>
+            <a:solidFill>
+              <a:srgbClr val="00A888"/>
+            </a:solidFill>
+          </a:ln>
+        </p:spPr>
+        <p:style>
+          <a:lnRef idx="1">
+            <a:schemeClr val="accent1"/>
+          </a:lnRef>
+          <a:fillRef idx="3">
+            <a:schemeClr val="accent1"/>
+          </a:fillRef>
+          <a:effectRef idx="2">
+            <a:schemeClr val="accent1"/>
+          </a:effectRef>
+          <a:fontRef idx="minor">
+            <a:schemeClr val="lt1"/>
+          </a:fontRef>
+        </p:style>
+        <p:txBody>
+          <a:bodyPr rtlCol="0" anchor="ctr"/>
+          <a:lstStyle/>
+          <a:p>
+            <a:pPr algn="ctr"/>
+          </a:p>
+        </p:txBody>
+      </p:sp>
+      <p:sp>
+        <p:nvSpPr>
+          <p:cNvPr id="42" name="TextBox 41"/>
+          <p:cNvSpPr txBox="1"/>
+          <p:nvPr/>
+        </p:nvSpPr>
+        <p:spPr>
+          <a:xfrm>
+            <a:off x="2070000" y="2808000"/>
+            <a:ext cx="450000" cy="79200"/>
+          </a:xfrm>
+          <a:prstGeom prst="rect">
+            <a:avLst/>
+          </a:prstGeom>
+          <a:noFill/>
+        </p:spPr>
+        <p:txBody>
+          <a:bodyPr wrap="none" anchor="ctr">
+            <a:spAutoFit/>
+          </a:bodyPr>
+          <a:lstStyle/>
+          <a:p>
+            <a:pPr algn="l"/>
+            <a:r>
+              <a:rPr sz="540" b="1">
+                <a:solidFill>
+                  <a:srgbClr val="232D34"/>
+                </a:solidFill>
+                <a:latin typeface="Malgun Gothic"/>
+              </a:rPr>
+              <a:t>외화수시입출</a:t>
+            </a:r>
+          </a:p>
+        </p:txBody>
+      </p:sp>
+      <p:sp>
+        <p:nvSpPr>
+          <p:cNvPr id="43" name="TextBox 42"/>
+          <p:cNvSpPr txBox="1"/>
+          <p:nvPr/>
+        </p:nvSpPr>
+        <p:spPr>
+          <a:xfrm>
+            <a:off x="2538000" y="2808000"/>
+            <a:ext cx="360000" cy="79200"/>
+          </a:xfrm>
+          <a:prstGeom prst="rect">
+            <a:avLst/>
+          </a:prstGeom>
+          <a:noFill/>
+        </p:spPr>
+        <p:txBody>
+          <a:bodyPr wrap="none" anchor="ctr">
+            <a:spAutoFit/>
+          </a:bodyPr>
+          <a:lstStyle/>
+          <a:p>
+            <a:pPr algn="l"/>
+            <a:r>
+              <a:rPr sz="500" b="1">
+                <a:solidFill>
+                  <a:srgbClr val="00A888"/>
+                </a:solidFill>
+                <a:latin typeface="Malgun Gothic"/>
+              </a:rPr>
+              <a:t>43 계좌</a:t>
+            </a:r>
+          </a:p>
+        </p:txBody>
+      </p:sp>
+      <p:sp>
+        <p:nvSpPr>
+          <p:cNvPr id="44" name="TextBox 43"/>
+          <p:cNvSpPr txBox="1"/>
+          <p:nvPr/>
+        </p:nvSpPr>
+        <p:spPr>
+          <a:xfrm>
+            <a:off x="2070000" y="2962800"/>
+            <a:ext cx="882000" cy="79200"/>
+          </a:xfrm>
+          <a:prstGeom prst="rect">
+            <a:avLst/>
+          </a:prstGeom>
+          <a:noFill/>
+        </p:spPr>
+        <p:txBody>
+          <a:bodyPr wrap="none" anchor="ctr">
+            <a:spAutoFit/>
+          </a:bodyPr>
+          <a:lstStyle/>
+          <a:p>
+            <a:pPr algn="r"/>
+            <a:r>
+              <a:rPr sz="620" b="1">
+                <a:solidFill>
+                  <a:srgbClr val="232D34"/>
+                </a:solidFill>
+                <a:latin typeface="Malgun Gothic"/>
+              </a:rPr>
+              <a:t>1,793,811 원</a:t>
+            </a:r>
+          </a:p>
+        </p:txBody>
+      </p:sp>
+      <p:sp>
+        <p:nvSpPr>
+          <p:cNvPr id="45" name="Rounded Rectangle 44"/>
+          <p:cNvSpPr/>
+          <p:nvPr/>
+        </p:nvSpPr>
+        <p:spPr>
+          <a:xfrm>
+            <a:off x="3168000" y="2718000"/>
+            <a:ext cx="1080000" cy="450000"/>
+          </a:xfrm>
+          <a:prstGeom prst="roundRect">
+            <a:avLst/>
+          </a:prstGeom>
+          <a:solidFill>
+            <a:srgbClr val="FFFFFF"/>
+          </a:solidFill>
+          <a:ln>
+            <a:solidFill>
+              <a:srgbClr val="00A888"/>
+            </a:solidFill>
+          </a:ln>
+        </p:spPr>
+        <p:style>
+          <a:lnRef idx="1">
+            <a:schemeClr val="accent1"/>
+          </a:lnRef>
+          <a:fillRef idx="3">
+            <a:schemeClr val="accent1"/>
+          </a:fillRef>
+          <a:effectRef idx="2">
+            <a:schemeClr val="accent1"/>
+          </a:effectRef>
+          <a:fontRef idx="minor">
+            <a:schemeClr val="lt1"/>
+          </a:fontRef>
+        </p:style>
+        <p:txBody>
+          <a:bodyPr rtlCol="0" anchor="ctr"/>
+          <a:lstStyle/>
+          <a:p>
+            <a:pPr algn="ctr"/>
+          </a:p>
+        </p:txBody>
+      </p:sp>
+      <p:sp>
+        <p:nvSpPr>
+          <p:cNvPr id="46" name="TextBox 45"/>
+          <p:cNvSpPr txBox="1"/>
+          <p:nvPr/>
+        </p:nvSpPr>
+        <p:spPr>
+          <a:xfrm>
+            <a:off x="3258000" y="2808000"/>
+            <a:ext cx="450000" cy="79200"/>
+          </a:xfrm>
+          <a:prstGeom prst="rect">
+            <a:avLst/>
+          </a:prstGeom>
+          <a:noFill/>
+        </p:spPr>
+        <p:txBody>
+          <a:bodyPr wrap="none" anchor="ctr">
+            <a:spAutoFit/>
+          </a:bodyPr>
+          <a:lstStyle/>
+          <a:p>
+            <a:pPr algn="l"/>
+            <a:r>
+              <a:rPr sz="540" b="1">
+                <a:solidFill>
+                  <a:srgbClr val="232D34"/>
+                </a:solidFill>
+                <a:latin typeface="Malgun Gothic"/>
+              </a:rPr>
+              <a:t>예적금</a:t>
+            </a:r>
+          </a:p>
+        </p:txBody>
+      </p:sp>
+      <p:sp>
+        <p:nvSpPr>
+          <p:cNvPr id="47" name="TextBox 46"/>
+          <p:cNvSpPr txBox="1"/>
+          <p:nvPr/>
+        </p:nvSpPr>
+        <p:spPr>
+          <a:xfrm>
+            <a:off x="3726000" y="2808000"/>
+            <a:ext cx="360000" cy="79200"/>
+          </a:xfrm>
+          <a:prstGeom prst="rect">
+            <a:avLst/>
+          </a:prstGeom>
+          <a:noFill/>
+        </p:spPr>
+        <p:txBody>
+          <a:bodyPr wrap="none" anchor="ctr">
+            <a:spAutoFit/>
+          </a:bodyPr>
+          <a:lstStyle/>
+          <a:p>
+            <a:pPr algn="l"/>
+            <a:r>
+              <a:rPr sz="500" b="1">
+                <a:solidFill>
+                  <a:srgbClr val="00A888"/>
+                </a:solidFill>
+                <a:latin typeface="Malgun Gothic"/>
+              </a:rPr>
+              <a:t>5 계좌</a:t>
+            </a:r>
+          </a:p>
+        </p:txBody>
+      </p:sp>
+      <p:sp>
+        <p:nvSpPr>
+          <p:cNvPr id="48" name="TextBox 47"/>
+          <p:cNvSpPr txBox="1"/>
+          <p:nvPr/>
+        </p:nvSpPr>
+        <p:spPr>
+          <a:xfrm>
+            <a:off x="3258000" y="2962800"/>
+            <a:ext cx="882000" cy="79200"/>
+          </a:xfrm>
+          <a:prstGeom prst="rect">
+            <a:avLst/>
+          </a:prstGeom>
+          <a:noFill/>
+        </p:spPr>
+        <p:txBody>
+          <a:bodyPr wrap="none" anchor="ctr">
+            <a:spAutoFit/>
+          </a:bodyPr>
+          <a:lstStyle/>
+          <a:p>
+            <a:pPr algn="r"/>
+            <a:r>
+              <a:rPr sz="620" b="1">
+                <a:solidFill>
+                  <a:srgbClr val="232D34"/>
+                </a:solidFill>
+                <a:latin typeface="Malgun Gothic"/>
+              </a:rPr>
+              <a:t>44,377 원</a:t>
+            </a:r>
+          </a:p>
+        </p:txBody>
+      </p:sp>
+      <p:sp>
+        <p:nvSpPr>
+          <p:cNvPr id="49" name="Rounded Rectangle 48"/>
+          <p:cNvSpPr/>
+          <p:nvPr/>
+        </p:nvSpPr>
+        <p:spPr>
+          <a:xfrm>
+            <a:off x="4356000" y="2718000"/>
+            <a:ext cx="1080000" cy="450000"/>
+          </a:xfrm>
+          <a:prstGeom prst="roundRect">
+            <a:avLst/>
+          </a:prstGeom>
+          <a:solidFill>
+            <a:srgbClr val="FFFFFF"/>
+          </a:solidFill>
+          <a:ln>
+            <a:solidFill>
+              <a:srgbClr val="00A888"/>
+            </a:solidFill>
+          </a:ln>
+        </p:spPr>
+        <p:style>
+          <a:lnRef idx="1">
+            <a:schemeClr val="accent1"/>
+          </a:lnRef>
+          <a:fillRef idx="3">
+            <a:schemeClr val="accent1"/>
+          </a:fillRef>
+          <a:effectRef idx="2">
+            <a:schemeClr val="accent1"/>
+          </a:effectRef>
+          <a:fontRef idx="minor">
+            <a:schemeClr val="lt1"/>
+          </a:fontRef>
+        </p:style>
+        <p:txBody>
+          <a:bodyPr rtlCol="0" anchor="ctr"/>
+          <a:lstStyle/>
+          <a:p>
+            <a:pPr algn="ctr"/>
+          </a:p>
+        </p:txBody>
+      </p:sp>
+      <p:sp>
+        <p:nvSpPr>
+          <p:cNvPr id="50" name="TextBox 49"/>
+          <p:cNvSpPr txBox="1"/>
+          <p:nvPr/>
+        </p:nvSpPr>
+        <p:spPr>
+          <a:xfrm>
+            <a:off x="4446000" y="2808000"/>
+            <a:ext cx="450000" cy="79200"/>
+          </a:xfrm>
+          <a:prstGeom prst="rect">
+            <a:avLst/>
+          </a:prstGeom>
+          <a:noFill/>
+        </p:spPr>
+        <p:txBody>
+          <a:bodyPr wrap="none" anchor="ctr">
+            <a:spAutoFit/>
+          </a:bodyPr>
+          <a:lstStyle/>
+          <a:p>
+            <a:pPr algn="l"/>
+            <a:r>
+              <a:rPr sz="540" b="1">
+                <a:solidFill>
+                  <a:srgbClr val="232D34"/>
+                </a:solidFill>
+                <a:latin typeface="Malgun Gothic"/>
+              </a:rPr>
+              <a:t>대출금</a:t>
+            </a:r>
+          </a:p>
+        </p:txBody>
+      </p:sp>
+      <p:sp>
+        <p:nvSpPr>
+          <p:cNvPr id="51" name="TextBox 50"/>
+          <p:cNvSpPr txBox="1"/>
+          <p:nvPr/>
+        </p:nvSpPr>
+        <p:spPr>
+          <a:xfrm>
+            <a:off x="4914000" y="2808000"/>
+            <a:ext cx="360000" cy="79200"/>
+          </a:xfrm>
+          <a:prstGeom prst="rect">
+            <a:avLst/>
+          </a:prstGeom>
+          <a:noFill/>
+        </p:spPr>
+        <p:txBody>
+          <a:bodyPr wrap="none" anchor="ctr">
+            <a:spAutoFit/>
+          </a:bodyPr>
+          <a:lstStyle/>
+          <a:p>
+            <a:pPr algn="l"/>
+            <a:r>
+              <a:rPr sz="500" b="1">
+                <a:solidFill>
+                  <a:srgbClr val="00A888"/>
+                </a:solidFill>
+                <a:latin typeface="Malgun Gothic"/>
+              </a:rPr>
+              <a:t>3 계좌</a:t>
+            </a:r>
+          </a:p>
+        </p:txBody>
+      </p:sp>
+      <p:sp>
+        <p:nvSpPr>
+          <p:cNvPr id="52" name="TextBox 51"/>
+          <p:cNvSpPr txBox="1"/>
+          <p:nvPr/>
+        </p:nvSpPr>
+        <p:spPr>
+          <a:xfrm>
+            <a:off x="4446000" y="2962800"/>
+            <a:ext cx="882000" cy="79200"/>
+          </a:xfrm>
+          <a:prstGeom prst="rect">
+            <a:avLst/>
+          </a:prstGeom>
+          <a:noFill/>
+        </p:spPr>
+        <p:txBody>
+          <a:bodyPr wrap="none" anchor="ctr">
+            <a:spAutoFit/>
+          </a:bodyPr>
+          <a:lstStyle/>
+          <a:p>
+            <a:pPr algn="r"/>
+            <a:r>
+              <a:rPr sz="620" b="1">
+                <a:solidFill>
+                  <a:srgbClr val="232D34"/>
+                </a:solidFill>
+                <a:latin typeface="Malgun Gothic"/>
+              </a:rPr>
+              <a:t>310,497,000 원</a:t>
+            </a:r>
+          </a:p>
+        </p:txBody>
+      </p:sp>
+      <p:sp>
+        <p:nvSpPr>
+          <p:cNvPr id="53" name="TextBox 52"/>
+          <p:cNvSpPr txBox="1"/>
+          <p:nvPr/>
+        </p:nvSpPr>
+        <p:spPr>
+          <a:xfrm>
+            <a:off x="5760000" y="1925999"/>
+            <a:ext cx="1007999" cy="93600"/>
+          </a:xfrm>
+          <a:prstGeom prst="rect">
+            <a:avLst/>
+          </a:prstGeom>
+          <a:noFill/>
+        </p:spPr>
+        <p:txBody>
+          <a:bodyPr wrap="none" anchor="ctr">
+            <a:spAutoFit/>
+          </a:bodyPr>
+          <a:lstStyle/>
+          <a:p>
+            <a:pPr algn="l"/>
+            <a:r>
+              <a:rPr sz="650" b="1">
+                <a:solidFill>
+                  <a:srgbClr val="232D34"/>
+                </a:solidFill>
+                <a:latin typeface="Malgun Gothic"/>
+              </a:rPr>
+              <a:t>금융사별 자금현황</a:t>
+            </a:r>
+          </a:p>
+        </p:txBody>
+      </p:sp>
+      <p:sp>
+        <p:nvSpPr>
+          <p:cNvPr id="54" name="Rectangle 53"/>
+          <p:cNvSpPr/>
+          <p:nvPr/>
+        </p:nvSpPr>
+        <p:spPr>
+          <a:xfrm>
+            <a:off x="5760000" y="2051999"/>
+            <a:ext cx="1728000" cy="7200"/>
+          </a:xfrm>
+          <a:prstGeom prst="rect">
+            <a:avLst/>
+          </a:prstGeom>
+          <a:solidFill>
+            <a:srgbClr val="232D34"/>
+          </a:solidFill>
+          <a:ln>
+            <a:noFill/>
+          </a:ln>
+        </p:spPr>
+        <p:style>
+          <a:lnRef idx="1">
+            <a:schemeClr val="accent1"/>
+          </a:lnRef>
+          <a:fillRef idx="3">
+            <a:schemeClr val="accent1"/>
+          </a:fillRef>
+          <a:effectRef idx="2">
+            <a:schemeClr val="accent1"/>
+          </a:effectRef>
+          <a:fontRef idx="minor">
+            <a:schemeClr val="lt1"/>
+          </a:fontRef>
+        </p:style>
+        <p:txBody>
+          <a:bodyPr rtlCol="0" anchor="ctr"/>
+          <a:lstStyle/>
+          <a:p>
+            <a:pPr algn="ctr"/>
+          </a:p>
+        </p:txBody>
+      </p:sp>
+      <p:graphicFrame>
+        <p:nvGraphicFramePr>
+          <p:cNvPr id="55" name="Table 54"/>
+          <p:cNvGraphicFramePr>
+            <a:graphicFrameLocks noGrp="1"/>
+          </p:cNvGraphicFramePr>
+          <p:nvPr/>
+        </p:nvGraphicFramePr>
+        <p:xfrm>
+          <a:off x="5760000" y="2124000"/>
+          <a:ext cx="1728000" cy="917999"/>
+        </p:xfrm>
+        <a:graphic>
+          <a:graphicData uri="http://schemas.openxmlformats.org/drawingml/2006/table">
+            <a:tbl>
+              <a:tblPr firstRow="1" bandRow="1">
+                <a:tableStyleId>{5C22544A-7EE6-4342-B048-85BDC9FD1C3A}</a:tableStyleId>
+              </a:tblPr>
+              <a:tblGrid>
+                <a:gridCol w="576000"/>
+                <a:gridCol w="576000"/>
+                <a:gridCol w="576000"/>
+              </a:tblGrid>
+              <a:tr h="183599">
+                <a:tc>
+                  <a:txBody>
+                    <a:bodyPr/>
+                    <a:lstStyle/>
+                    <a:p>
+                      <a:pPr algn="ctr"/>
+                      <a:r>
+                        <a:rPr sz="880" b="1">
+                          <a:solidFill>
+                            <a:srgbClr val="FFFFFF"/>
+                          </a:solidFill>
+                          <a:latin typeface="Malgun Gothic"/>
+                        </a:rPr>
+                        <a:t>No</a:t>
+                      </a:r>
+                    </a:p>
+                  </a:txBody>
+                  <a:tcPr marL="36000" marR="36000" marT="21600" marB="21600" anchor="ctr">
+                    <a:solidFill>
+                      <a:srgbClr val="12363F"/>
+                    </a:solidFill>
+                  </a:tcPr>
+                </a:tc>
+                <a:tc>
+                  <a:txBody>
+                    <a:bodyPr/>
+                    <a:lstStyle/>
+                    <a:p>
+                      <a:pPr algn="ctr"/>
+                      <a:r>
+                        <a:rPr sz="880" b="1">
+                          <a:solidFill>
+                            <a:srgbClr val="FFFFFF"/>
+                          </a:solidFill>
+                          <a:latin typeface="Malgun Gothic"/>
+                        </a:rPr>
+                        <a:t>은행명</a:t>
+                      </a:r>
+                    </a:p>
+                  </a:txBody>
+                  <a:tcPr marL="36000" marR="36000" marT="21600" marB="21600" anchor="ctr">
+                    <a:solidFill>
+                      <a:srgbClr val="12363F"/>
+                    </a:solidFill>
+                  </a:tcPr>
+                </a:tc>
+                <a:tc>
+                  <a:txBody>
+                    <a:bodyPr/>
+                    <a:lstStyle/>
+                    <a:p>
+                      <a:pPr algn="ctr"/>
+                      <a:r>
+                        <a:rPr sz="880" b="1">
+                          <a:solidFill>
+                            <a:srgbClr val="FFFFFF"/>
+                          </a:solidFill>
+                          <a:latin typeface="Malgun Gothic"/>
+                        </a:rPr>
+                        <a:t>잔액</a:t>
+                      </a:r>
+                    </a:p>
+                  </a:txBody>
+                  <a:tcPr marL="36000" marR="36000" marT="21600" marB="21600" anchor="ctr">
+                    <a:solidFill>
+                      <a:srgbClr val="12363F"/>
+                    </a:solidFill>
+                  </a:tcPr>
+                </a:tc>
+              </a:tr>
+              <a:tr h="183599">
+                <a:tc>
+                  <a:txBody>
+                    <a:bodyPr/>
+                    <a:lstStyle/>
+                    <a:p>
+                      <a:pPr algn="ctr"/>
+                      <a:r>
+                        <a:rPr sz="880" b="0">
+                          <a:solidFill>
+                            <a:srgbClr val="232D34"/>
+                          </a:solidFill>
+                          <a:latin typeface="Malgun Gothic"/>
+                        </a:rPr>
+                        <a:t>1</a:t>
+                      </a:r>
+                    </a:p>
+                  </a:txBody>
+                  <a:tcPr marL="36000" marR="36000" marT="21600" marB="21600" anchor="ctr">
+                    <a:solidFill>
+                      <a:srgbClr val="FFFFFF"/>
+                    </a:solidFill>
+                  </a:tcPr>
+                </a:tc>
+                <a:tc>
+                  <a:txBody>
+                    <a:bodyPr/>
+                    <a:lstStyle/>
+                    <a:p>
+                      <a:pPr algn="ctr"/>
+                      <a:r>
+                        <a:rPr sz="880" b="0">
+                          <a:solidFill>
+                            <a:srgbClr val="232D34"/>
+                          </a:solidFill>
+                          <a:latin typeface="Malgun Gothic"/>
+                        </a:rPr>
+                        <a:t>하나은행</a:t>
+                      </a:r>
+                    </a:p>
+                  </a:txBody>
+                  <a:tcPr marL="36000" marR="36000" marT="21600" marB="21600" anchor="ctr">
+                    <a:solidFill>
+                      <a:srgbClr val="FFFFFF"/>
+                    </a:solidFill>
+                  </a:tcPr>
+                </a:tc>
+                <a:tc>
+                  <a:txBody>
+                    <a:bodyPr/>
+                    <a:lstStyle/>
+                    <a:p>
+                      <a:pPr algn="ctr"/>
+                      <a:r>
+                        <a:rPr sz="880" b="0">
+                          <a:solidFill>
+                            <a:srgbClr val="232D34"/>
+                          </a:solidFill>
+                          <a:latin typeface="Malgun Gothic"/>
+                        </a:rPr>
+                        <a:t>82,029</a:t>
+                      </a:r>
+                    </a:p>
+                  </a:txBody>
+                  <a:tcPr marL="36000" marR="36000" marT="21600" marB="21600" anchor="ctr">
+                    <a:solidFill>
+                      <a:srgbClr val="FFFFFF"/>
+                    </a:solidFill>
+                  </a:tcPr>
+                </a:tc>
+              </a:tr>
+              <a:tr h="183599">
+                <a:tc>
+                  <a:txBody>
+                    <a:bodyPr/>
+                    <a:lstStyle/>
+                    <a:p>
+                      <a:pPr algn="ctr"/>
+                      <a:r>
+                        <a:rPr sz="880" b="0">
+                          <a:solidFill>
+                            <a:srgbClr val="232D34"/>
+                          </a:solidFill>
+                          <a:latin typeface="Malgun Gothic"/>
+                        </a:rPr>
+                        <a:t>2</a:t>
+                      </a:r>
+                    </a:p>
+                  </a:txBody>
+                  <a:tcPr marL="36000" marR="36000" marT="21600" marB="21600" anchor="ctr">
+                    <a:solidFill>
+                      <a:srgbClr val="E5F7F3"/>
+                    </a:solidFill>
+                  </a:tcPr>
+                </a:tc>
+                <a:tc>
+                  <a:txBody>
+                    <a:bodyPr/>
+                    <a:lstStyle/>
+                    <a:p>
+                      <a:pPr algn="ctr"/>
+                      <a:r>
+                        <a:rPr sz="880" b="0">
+                          <a:solidFill>
+                            <a:srgbClr val="232D34"/>
+                          </a:solidFill>
+                          <a:latin typeface="Malgun Gothic"/>
+                        </a:rPr>
+                        <a:t>경남은행</a:t>
+                      </a:r>
+                    </a:p>
+                  </a:txBody>
+                  <a:tcPr marL="36000" marR="36000" marT="21600" marB="21600" anchor="ctr">
+                    <a:solidFill>
+                      <a:srgbClr val="E5F7F3"/>
+                    </a:solidFill>
+                  </a:tcPr>
+                </a:tc>
+                <a:tc>
+                  <a:txBody>
+                    <a:bodyPr/>
+                    <a:lstStyle/>
+                    <a:p>
+                      <a:pPr algn="ctr"/>
+                      <a:r>
+                        <a:rPr sz="880" b="0">
+                          <a:solidFill>
+                            <a:srgbClr val="232D34"/>
+                          </a:solidFill>
+                          <a:latin typeface="Malgun Gothic"/>
+                        </a:rPr>
+                        <a:t>4,197</a:t>
+                      </a:r>
+                    </a:p>
+                  </a:txBody>
+                  <a:tcPr marL="36000" marR="36000" marT="21600" marB="21600" anchor="ctr">
+                    <a:solidFill>
+                      <a:srgbClr val="E5F7F3"/>
+                    </a:solidFill>
+                  </a:tcPr>
+                </a:tc>
+              </a:tr>
+              <a:tr h="183599">
+                <a:tc>
+                  <a:txBody>
+                    <a:bodyPr/>
+                    <a:lstStyle/>
+                    <a:p>
+                      <a:pPr algn="ctr"/>
+                      <a:r>
+                        <a:rPr sz="880" b="0">
+                          <a:solidFill>
+                            <a:srgbClr val="232D34"/>
+                          </a:solidFill>
+                          <a:latin typeface="Malgun Gothic"/>
+                        </a:rPr>
+                        <a:t>3</a:t>
+                      </a:r>
+                    </a:p>
+                  </a:txBody>
+                  <a:tcPr marL="36000" marR="36000" marT="21600" marB="21600" anchor="ctr">
+                    <a:solidFill>
+                      <a:srgbClr val="FFFFFF"/>
+                    </a:solidFill>
+                  </a:tcPr>
+                </a:tc>
+                <a:tc>
+                  <a:txBody>
+                    <a:bodyPr/>
+                    <a:lstStyle/>
+                    <a:p>
+                      <a:pPr algn="ctr"/>
+                      <a:r>
+                        <a:rPr sz="880" b="0">
+                          <a:solidFill>
+                            <a:srgbClr val="232D34"/>
+                          </a:solidFill>
+                          <a:latin typeface="Malgun Gothic"/>
+                        </a:rPr>
+                        <a:t>기업은행</a:t>
+                      </a:r>
+                    </a:p>
+                  </a:txBody>
+                  <a:tcPr marL="36000" marR="36000" marT="21600" marB="21600" anchor="ctr">
+                    <a:solidFill>
+                      <a:srgbClr val="FFFFFF"/>
+                    </a:solidFill>
+                  </a:tcPr>
+                </a:tc>
+                <a:tc>
+                  <a:txBody>
+                    <a:bodyPr/>
+                    <a:lstStyle/>
+                    <a:p>
+                      <a:pPr algn="ctr"/>
+                      <a:r>
+                        <a:rPr sz="880" b="0">
+                          <a:solidFill>
+                            <a:srgbClr val="232D34"/>
+                          </a:solidFill>
+                          <a:latin typeface="Malgun Gothic"/>
+                        </a:rPr>
+                        <a:t>1,499,339</a:t>
+                      </a:r>
+                    </a:p>
+                  </a:txBody>
+                  <a:tcPr marL="36000" marR="36000" marT="21600" marB="21600" anchor="ctr">
+                    <a:solidFill>
+                      <a:srgbClr val="FFFFFF"/>
+                    </a:solidFill>
+                  </a:tcPr>
+                </a:tc>
+              </a:tr>
+              <a:tr h="183603">
+                <a:tc>
+                  <a:txBody>
+                    <a:bodyPr/>
+                    <a:lstStyle/>
+                    <a:p>
+                      <a:pPr algn="ctr"/>
+                      <a:r>
+                        <a:rPr sz="880" b="0">
+                          <a:solidFill>
+                            <a:srgbClr val="232D34"/>
+                          </a:solidFill>
+                          <a:latin typeface="Malgun Gothic"/>
+                        </a:rPr>
+                        <a:t>4</a:t>
+                      </a:r>
+                    </a:p>
+                  </a:txBody>
+                  <a:tcPr marL="36000" marR="36000" marT="21600" marB="21600" anchor="ctr">
+                    <a:solidFill>
+                      <a:srgbClr val="E5F7F3"/>
+                    </a:solidFill>
+                  </a:tcPr>
+                </a:tc>
+                <a:tc>
+                  <a:txBody>
+                    <a:bodyPr/>
+                    <a:lstStyle/>
+                    <a:p>
+                      <a:pPr algn="ctr"/>
+                      <a:r>
+                        <a:rPr sz="880" b="0">
+                          <a:solidFill>
+                            <a:srgbClr val="232D34"/>
+                          </a:solidFill>
+                          <a:latin typeface="Malgun Gothic"/>
+                        </a:rPr>
+                        <a:t>농협</a:t>
+                      </a:r>
+                    </a:p>
+                  </a:txBody>
+                  <a:tcPr marL="36000" marR="36000" marT="21600" marB="21600" anchor="ctr">
+                    <a:solidFill>
+                      <a:srgbClr val="E5F7F3"/>
+                    </a:solidFill>
+                  </a:tcPr>
+                </a:tc>
+                <a:tc>
+                  <a:txBody>
+                    <a:bodyPr/>
+                    <a:lstStyle/>
+                    <a:p>
+                      <a:pPr algn="ctr"/>
+                      <a:r>
+                        <a:rPr sz="880" b="0">
+                          <a:solidFill>
+                            <a:srgbClr val="232D34"/>
+                          </a:solidFill>
+                          <a:latin typeface="Malgun Gothic"/>
+                        </a:rPr>
+                        <a:t>66,482</a:t>
+                      </a:r>
+                    </a:p>
+                  </a:txBody>
+                  <a:tcPr marL="36000" marR="36000" marT="21600" marB="21600" anchor="ctr">
+                    <a:solidFill>
+                      <a:srgbClr val="E5F7F3"/>
+                    </a:solidFill>
+                  </a:tcPr>
+                </a:tc>
+              </a:tr>
+            </a:tbl>
+          </a:graphicData>
+        </a:graphic>
+      </p:graphicFrame>
+      <p:sp>
+        <p:nvSpPr>
+          <p:cNvPr id="56" name="TextBox 55"/>
+          <p:cNvSpPr txBox="1"/>
+          <p:nvPr/>
+        </p:nvSpPr>
+        <p:spPr>
+          <a:xfrm>
+            <a:off x="1980000" y="3366000"/>
+            <a:ext cx="720000" cy="86400"/>
+          </a:xfrm>
+          <a:prstGeom prst="rect">
+            <a:avLst/>
+          </a:prstGeom>
+          <a:noFill/>
+        </p:spPr>
+        <p:txBody>
+          <a:bodyPr wrap="none" anchor="ctr">
+            <a:spAutoFit/>
+          </a:bodyPr>
+          <a:lstStyle/>
+          <a:p>
+            <a:pPr algn="l"/>
+            <a:r>
+              <a:rPr sz="600" b="1">
+                <a:solidFill>
+                  <a:srgbClr val="232D34"/>
+                </a:solidFill>
+                <a:latin typeface="Malgun Gothic"/>
+              </a:rPr>
+              <a:t>공지사항</a:t>
+            </a:r>
+          </a:p>
+        </p:txBody>
+      </p:sp>
+      <p:sp>
+        <p:nvSpPr>
+          <p:cNvPr id="57" name="Rectangle 56"/>
+          <p:cNvSpPr/>
+          <p:nvPr/>
+        </p:nvSpPr>
+        <p:spPr>
+          <a:xfrm>
+            <a:off x="1980000" y="3491999"/>
+            <a:ext cx="1944000" cy="7200"/>
+          </a:xfrm>
+          <a:prstGeom prst="rect">
+            <a:avLst/>
+          </a:prstGeom>
+          <a:solidFill>
+            <a:srgbClr val="232D34"/>
+          </a:solidFill>
+          <a:ln>
+            <a:noFill/>
+          </a:ln>
+        </p:spPr>
+        <p:style>
+          <a:lnRef idx="1">
+            <a:schemeClr val="accent1"/>
+          </a:lnRef>
+          <a:fillRef idx="3">
+            <a:schemeClr val="accent1"/>
+          </a:fillRef>
+          <a:effectRef idx="2">
+            <a:schemeClr val="accent1"/>
+          </a:effectRef>
+          <a:fontRef idx="minor">
+            <a:schemeClr val="lt1"/>
+          </a:fontRef>
+        </p:style>
+        <p:txBody>
+          <a:bodyPr rtlCol="0" anchor="ctr"/>
+          <a:lstStyle/>
+          <a:p>
+            <a:pPr algn="ctr"/>
+          </a:p>
+        </p:txBody>
+      </p:sp>
+      <p:sp>
+        <p:nvSpPr>
+          <p:cNvPr id="58" name="TextBox 57"/>
+          <p:cNvSpPr txBox="1"/>
+          <p:nvPr/>
+        </p:nvSpPr>
+        <p:spPr>
+          <a:xfrm>
+            <a:off x="2052000" y="3636000"/>
+            <a:ext cx="1728000" cy="180000"/>
+          </a:xfrm>
+          <a:prstGeom prst="rect">
+            <a:avLst/>
+          </a:prstGeom>
+          <a:noFill/>
+        </p:spPr>
+        <p:txBody>
+          <a:bodyPr wrap="none" anchor="ctr">
+            <a:spAutoFit/>
+          </a:bodyPr>
+          <a:lstStyle/>
+          <a:p>
+            <a:pPr algn="l"/>
+            <a:r>
+              <a:rPr sz="450" b="0">
+                <a:solidFill>
+                  <a:srgbClr val="5F7179"/>
+                </a:solidFill>
+                <a:latin typeface="Malgun Gothic"/>
+              </a:rPr>
+              <a:t>해외대량송금 양식변경 안내
+서울시인천시 세금납부 일시정지 안내</a:t>
+            </a:r>
+          </a:p>
+        </p:txBody>
+      </p:sp>
+      <p:sp>
+        <p:nvSpPr>
+          <p:cNvPr id="59" name="TextBox 58"/>
+          <p:cNvSpPr txBox="1"/>
+          <p:nvPr/>
+        </p:nvSpPr>
+        <p:spPr>
+          <a:xfrm>
+            <a:off x="4176000" y="3366000"/>
+            <a:ext cx="684000" cy="86400"/>
+          </a:xfrm>
+          <a:prstGeom prst="rect">
+            <a:avLst/>
+          </a:prstGeom>
+          <a:noFill/>
+        </p:spPr>
+        <p:txBody>
+          <a:bodyPr wrap="none" anchor="ctr">
+            <a:spAutoFit/>
+          </a:bodyPr>
+          <a:lstStyle/>
+          <a:p>
+            <a:pPr algn="l"/>
+            <a:r>
+              <a:rPr sz="600" b="1">
+                <a:solidFill>
+                  <a:srgbClr val="232D34"/>
+                </a:solidFill>
+                <a:latin typeface="Malgun Gothic"/>
+              </a:rPr>
+              <a:t>환율정보</a:t>
+            </a:r>
+          </a:p>
+        </p:txBody>
+      </p:sp>
+      <p:sp>
+        <p:nvSpPr>
+          <p:cNvPr id="60" name="Rectangle 59"/>
+          <p:cNvSpPr/>
+          <p:nvPr/>
+        </p:nvSpPr>
+        <p:spPr>
+          <a:xfrm>
+            <a:off x="4176000" y="3491999"/>
+            <a:ext cx="1332000" cy="7200"/>
+          </a:xfrm>
+          <a:prstGeom prst="rect">
+            <a:avLst/>
+          </a:prstGeom>
+          <a:solidFill>
+            <a:srgbClr val="232D34"/>
+          </a:solidFill>
+          <a:ln>
+            <a:noFill/>
+          </a:ln>
+        </p:spPr>
+        <p:style>
+          <a:lnRef idx="1">
+            <a:schemeClr val="accent1"/>
+          </a:lnRef>
+          <a:fillRef idx="3">
+            <a:schemeClr val="accent1"/>
+          </a:fillRef>
+          <a:effectRef idx="2">
+            <a:schemeClr val="accent1"/>
+          </a:effectRef>
+          <a:fontRef idx="minor">
+            <a:schemeClr val="lt1"/>
+          </a:fontRef>
+        </p:style>
+        <p:txBody>
+          <a:bodyPr rtlCol="0" anchor="ctr"/>
+          <a:lstStyle/>
+          <a:p>
+            <a:pPr algn="ctr"/>
+          </a:p>
+        </p:txBody>
+      </p:sp>
+      <p:sp>
+        <p:nvSpPr>
+          <p:cNvPr id="61" name="TextBox 60"/>
+          <p:cNvSpPr txBox="1"/>
+          <p:nvPr/>
+        </p:nvSpPr>
+        <p:spPr>
+          <a:xfrm>
+            <a:off x="4248000" y="3636000"/>
+            <a:ext cx="1080000" cy="180000"/>
+          </a:xfrm>
+          <a:prstGeom prst="rect">
+            <a:avLst/>
+          </a:prstGeom>
+          <a:noFill/>
+        </p:spPr>
+        <p:txBody>
+          <a:bodyPr wrap="none" anchor="ctr">
+            <a:spAutoFit/>
+          </a:bodyPr>
+          <a:lstStyle/>
+          <a:p>
+            <a:pPr algn="l"/>
+            <a:r>
+              <a:rPr sz="450" b="0">
+                <a:solidFill>
+                  <a:srgbClr val="5F7179"/>
+                </a:solidFill>
+                <a:latin typeface="Malgun Gothic"/>
+              </a:rPr>
+              <a:t>미국 USD  1,419.50
+유로 EUR  1,638.53</a:t>
+            </a:r>
+          </a:p>
+        </p:txBody>
+      </p:sp>
+      <p:sp>
+        <p:nvSpPr>
+          <p:cNvPr id="62" name="Rounded Rectangle 61"/>
+          <p:cNvSpPr/>
+          <p:nvPr/>
+        </p:nvSpPr>
+        <p:spPr>
+          <a:xfrm>
+            <a:off x="360000" y="3761999"/>
+            <a:ext cx="8424000" cy="810000"/>
+          </a:xfrm>
+          <a:prstGeom prst="roundRect">
+            <a:avLst/>
+          </a:prstGeom>
+          <a:solidFill>
+            <a:srgbClr val="12363F"/>
+          </a:solidFill>
+          <a:ln>
+            <a:noFill/>
+          </a:ln>
+        </p:spPr>
+        <p:style>
+          <a:lnRef idx="1">
+            <a:schemeClr val="accent1"/>
+          </a:lnRef>
+          <a:fillRef idx="3">
+            <a:schemeClr val="accent1"/>
+          </a:fillRef>
+          <a:effectRef idx="2">
+            <a:schemeClr val="accent1"/>
+          </a:effectRef>
+          <a:fontRef idx="minor">
+            <a:schemeClr val="lt1"/>
+          </a:fontRef>
+        </p:style>
+        <p:txBody>
+          <a:bodyPr rtlCol="0" anchor="ctr"/>
+          <a:lstStyle/>
+          <a:p>
+            <a:pPr algn="ctr"/>
+          </a:p>
+        </p:txBody>
+      </p:sp>
+      <p:sp>
+        <p:nvSpPr>
+          <p:cNvPr id="63" name="TextBox 62"/>
+          <p:cNvSpPr txBox="1"/>
+          <p:nvPr/>
+        </p:nvSpPr>
+        <p:spPr>
+          <a:xfrm>
+            <a:off x="558000" y="3906000"/>
+            <a:ext cx="4031999" cy="342000"/>
+          </a:xfrm>
+          <a:prstGeom prst="rect">
+            <a:avLst/>
+          </a:prstGeom>
+          <a:noFill/>
+        </p:spPr>
+        <p:txBody>
+          <a:bodyPr wrap="none" anchor="ctr">
+            <a:spAutoFit/>
+          </a:bodyPr>
+          <a:lstStyle/>
+          <a:p>
+            <a:pPr algn="l"/>
+            <a:r>
+              <a:rPr sz="2200" b="1">
+                <a:solidFill>
+                  <a:srgbClr val="FFFFFF"/>
+                </a:solidFill>
+                <a:latin typeface="Malgun Gothic"/>
+              </a:rPr>
+              <a:t>통합CMS ERP연계
+고객사 안내자료</a:t>
+            </a:r>
+          </a:p>
+        </p:txBody>
+      </p:sp>
+      <p:sp>
+        <p:nvSpPr>
+          <p:cNvPr id="64" name="TextBox 63"/>
+          <p:cNvSpPr txBox="1"/>
+          <p:nvPr/>
+        </p:nvSpPr>
+        <p:spPr>
+          <a:xfrm>
+            <a:off x="4932000" y="3960000"/>
+            <a:ext cx="3420000" cy="172800"/>
+          </a:xfrm>
+          <a:prstGeom prst="rect">
+            <a:avLst/>
+          </a:prstGeom>
+          <a:noFill/>
+        </p:spPr>
+        <p:txBody>
+          <a:bodyPr wrap="none" anchor="ctr">
+            <a:spAutoFit/>
+          </a:bodyPr>
+          <a:lstStyle/>
+          <a:p>
+            <a:pPr algn="l"/>
+            <a:r>
+              <a:rPr sz="1120" b="0">
+                <a:solidFill>
+                  <a:srgbClr val="E5F7F3"/>
+                </a:solidFill>
+                <a:latin typeface="Malgun Gothic"/>
+              </a:rPr>
+              <a:t>은행 업무 결과를 ERP 회계·자금 업무로 연결합니다.</a:t>
+            </a:r>
+          </a:p>
+        </p:txBody>
+      </p:sp>
+      <p:sp>
+        <p:nvSpPr>
+          <p:cNvPr id="65" name="Rounded Rectangle 64"/>
+          <p:cNvSpPr/>
+          <p:nvPr/>
+        </p:nvSpPr>
+        <p:spPr>
+          <a:xfrm>
+            <a:off x="4932000" y="4230000"/>
+            <a:ext cx="792000" cy="201600"/>
+          </a:xfrm>
+          <a:prstGeom prst="roundRect">
             <a:avLst/>
           </a:prstGeom>
           <a:solidFill>
@@ -3832,14 +5941,49 @@
       </p:sp>
       <p:sp>
         <p:nvSpPr>
-          <p:cNvPr id="20" name="Rounded Rectangle 19"/>
+          <p:cNvPr id="66" name="TextBox 65"/>
+          <p:cNvSpPr txBox="1"/>
+          <p:nvPr/>
+        </p:nvSpPr>
+        <p:spPr>
+          <a:xfrm>
+            <a:off x="4932000" y="4244400"/>
+            <a:ext cx="792000" cy="136800"/>
+          </a:xfrm>
+          <a:prstGeom prst="rect">
+            <a:avLst/>
+          </a:prstGeom>
+          <a:noFill/>
+        </p:spPr>
+        <p:txBody>
+          <a:bodyPr wrap="none" anchor="ctr">
+            <a:spAutoFit/>
+          </a:bodyPr>
+          <a:lstStyle/>
+          <a:p>
+            <a:pPr algn="ctr"/>
+            <a:r>
+              <a:rPr sz="930" b="1">
+                <a:solidFill>
+                  <a:srgbClr val="FFFFFF"/>
+                </a:solidFill>
+                <a:latin typeface="Malgun Gothic"/>
+              </a:rPr>
+              <a:t>조회</a:t>
+            </a:r>
+          </a:p>
+        </p:txBody>
+      </p:sp>
+      <p:sp>
+        <p:nvSpPr>
+          <p:cNvPr id="67" name="Rounded Rectangle 66"/>
           <p:cNvSpPr/>
           <p:nvPr/>
         </p:nvSpPr>
         <p:spPr>
           <a:xfrm>
-            <a:off x="4500000" y="2033999"/>
-            <a:ext cx="259200" cy="259200"/>
+            <a:off x="5850000" y="4230000"/>
+            <a:ext cx="792000" cy="201600"/>
           </a:xfrm>
           <a:prstGeom prst="roundRect">
             <a:avLst/>
@@ -3875,14 +6019,14 @@
       </p:sp>
       <p:sp>
         <p:nvSpPr>
-          <p:cNvPr id="21" name="TextBox 20"/>
+          <p:cNvPr id="68" name="TextBox 67"/>
           <p:cNvSpPr txBox="1"/>
           <p:nvPr/>
         </p:nvSpPr>
         <p:spPr>
           <a:xfrm>
-            <a:off x="4500000" y="2062799"/>
-            <a:ext cx="259200" cy="125999"/>
+            <a:off x="5850000" y="4244400"/>
+            <a:ext cx="792000" cy="136800"/>
           </a:xfrm>
           <a:prstGeom prst="rect">
             <a:avLst/>
@@ -3897,111 +6041,33 @@
           <a:p>
             <a:pPr algn="ctr"/>
             <a:r>
-              <a:rPr sz="1100" b="1">
+              <a:rPr sz="930" b="1">
                 <a:solidFill>
                   <a:srgbClr val="FFFFFF"/>
                 </a:solidFill>
                 <a:latin typeface="Malgun Gothic"/>
               </a:rPr>
-              <a:t>3</a:t>
-            </a:r>
-          </a:p>
-        </p:txBody>
-      </p:sp>
-      <p:sp>
-        <p:nvSpPr>
-          <p:cNvPr id="22" name="TextBox 21"/>
-          <p:cNvSpPr txBox="1"/>
-          <p:nvPr/>
-        </p:nvSpPr>
-        <p:spPr>
-          <a:xfrm>
-            <a:off x="4824000" y="2030400"/>
-            <a:ext cx="1259999" cy="172800"/>
-          </a:xfrm>
-          <a:prstGeom prst="rect">
-            <a:avLst/>
-          </a:prstGeom>
-          <a:noFill/>
-        </p:spPr>
-        <p:txBody>
-          <a:bodyPr wrap="none" anchor="ctr">
-            <a:spAutoFit/>
-          </a:bodyPr>
-          <a:lstStyle/>
-          <a:p>
-            <a:pPr algn="l"/>
-            <a:r>
-              <a:rPr sz="1300" b="1">
-                <a:solidFill>
-                  <a:srgbClr val="12363F"/>
-                </a:solidFill>
-                <a:latin typeface="Malgun Gothic"/>
-              </a:rPr>
-              <a:t>활용</a:t>
-            </a:r>
-          </a:p>
-        </p:txBody>
-      </p:sp>
-      <p:sp>
-        <p:nvSpPr>
-          <p:cNvPr id="23" name="TextBox 22"/>
-          <p:cNvSpPr txBox="1"/>
-          <p:nvPr/>
-        </p:nvSpPr>
-        <p:spPr>
-          <a:xfrm>
-            <a:off x="4536000" y="2278800"/>
-            <a:ext cx="1511999" cy="259200"/>
-          </a:xfrm>
-          <a:prstGeom prst="rect">
-            <a:avLst/>
-          </a:prstGeom>
-          <a:noFill/>
-        </p:spPr>
-        <p:txBody>
-          <a:bodyPr wrap="square">
-            <a:spAutoFit/>
-          </a:bodyPr>
-          <a:lstStyle/>
-          <a:p>
-            <a:pPr>
-              <a:spcAft>
-                <a:spcPts val="300"/>
-              </a:spcAft>
-              <a:defRPr sz="800">
-                <a:solidFill>
-                  <a:srgbClr val="232D34"/>
-                </a:solidFill>
-                <a:latin typeface="Malgun Gothic"/>
-              </a:defRPr>
-            </a:pPr>
-            <a:r>
-              <a:t>전표·정산·마감 업무에서</a:t>
-            </a:r>
-            <a:br/>
-            <a:r>
-              <a:t>바로 확인</a:t>
-            </a:r>
-          </a:p>
-        </p:txBody>
-      </p:sp>
-      <p:sp>
-        <p:nvSpPr>
-          <p:cNvPr id="24" name="Rounded Rectangle 23"/>
+              <a:t>전송</a:t>
+            </a:r>
+          </a:p>
+        </p:txBody>
+      </p:sp>
+      <p:sp>
+        <p:nvSpPr>
+          <p:cNvPr id="69" name="Rounded Rectangle 68"/>
           <p:cNvSpPr/>
           <p:nvPr/>
         </p:nvSpPr>
         <p:spPr>
           <a:xfrm>
-            <a:off x="6533999" y="630000"/>
-            <a:ext cx="2106000" cy="3150000"/>
+            <a:off x="6768000" y="4230000"/>
+            <a:ext cx="792000" cy="201600"/>
           </a:xfrm>
           <a:prstGeom prst="roundRect">
             <a:avLst/>
           </a:prstGeom>
           <a:solidFill>
-            <a:srgbClr val="E5F7F3"/>
+            <a:srgbClr val="00A888"/>
           </a:solidFill>
           <a:ln>
             <a:noFill/>
@@ -4029,63 +6095,128 @@
           </a:p>
         </p:txBody>
       </p:sp>
-      <p:pic>
-        <p:nvPicPr>
-          <p:cNvPr id="25" name="Picture 24" descr="corp_card_1.png"/>
-          <p:cNvPicPr>
-            <a:picLocks noChangeAspect="1"/>
-          </p:cNvPicPr>
-          <p:nvPr/>
-        </p:nvPicPr>
-        <p:blipFill>
-          <a:blip r:embed="rId2"/>
-          <a:stretch>
-            <a:fillRect/>
-          </a:stretch>
-        </p:blipFill>
-        <p:spPr>
-          <a:xfrm>
-            <a:off x="6678000" y="792000"/>
-            <a:ext cx="1818000" cy="1080000"/>
-          </a:xfrm>
-          <a:prstGeom prst="rect">
-            <a:avLst/>
-          </a:prstGeom>
-        </p:spPr>
-      </p:pic>
-      <p:pic>
-        <p:nvPicPr>
-          <p:cNvPr id="26" name="Picture 25" descr="bulk_transfer.png"/>
-          <p:cNvPicPr>
-            <a:picLocks noChangeAspect="1"/>
-          </p:cNvPicPr>
-          <p:nvPr/>
-        </p:nvPicPr>
-        <p:blipFill>
-          <a:blip r:embed="rId3"/>
-          <a:stretch>
-            <a:fillRect/>
-          </a:stretch>
-        </p:blipFill>
-        <p:spPr>
-          <a:xfrm>
-            <a:off x="6678000" y="2194565"/>
-            <a:ext cx="1818000" cy="974870"/>
-          </a:xfrm>
-          <a:prstGeom prst="rect">
-            <a:avLst/>
-          </a:prstGeom>
-        </p:spPr>
-      </p:pic>
-      <p:sp>
-        <p:nvSpPr>
-          <p:cNvPr id="27" name="TextBox 26"/>
+      <p:sp>
+        <p:nvSpPr>
+          <p:cNvPr id="70" name="TextBox 69"/>
           <p:cNvSpPr txBox="1"/>
           <p:nvPr/>
         </p:nvSpPr>
         <p:spPr>
           <a:xfrm>
-            <a:off x="450000" y="4572000"/>
+            <a:off x="6768000" y="4244400"/>
+            <a:ext cx="792000" cy="136800"/>
+          </a:xfrm>
+          <a:prstGeom prst="rect">
+            <a:avLst/>
+          </a:prstGeom>
+          <a:noFill/>
+        </p:spPr>
+        <p:txBody>
+          <a:bodyPr wrap="none" anchor="ctr">
+            <a:spAutoFit/>
+          </a:bodyPr>
+          <a:lstStyle/>
+          <a:p>
+            <a:pPr algn="ctr"/>
+            <a:r>
+              <a:rPr sz="930" b="1">
+                <a:solidFill>
+                  <a:srgbClr val="FFFFFF"/>
+                </a:solidFill>
+                <a:latin typeface="Malgun Gothic"/>
+              </a:rPr>
+              <a:t>정산</a:t>
+            </a:r>
+          </a:p>
+        </p:txBody>
+      </p:sp>
+      <p:sp>
+        <p:nvSpPr>
+          <p:cNvPr id="71" name="Rounded Rectangle 70"/>
+          <p:cNvSpPr/>
+          <p:nvPr/>
+        </p:nvSpPr>
+        <p:spPr>
+          <a:xfrm>
+            <a:off x="7686000" y="4230000"/>
+            <a:ext cx="792000" cy="201600"/>
+          </a:xfrm>
+          <a:prstGeom prst="roundRect">
+            <a:avLst/>
+          </a:prstGeom>
+          <a:solidFill>
+            <a:srgbClr val="00A888"/>
+          </a:solidFill>
+          <a:ln>
+            <a:noFill/>
+          </a:ln>
+        </p:spPr>
+        <p:style>
+          <a:lnRef idx="1">
+            <a:schemeClr val="accent1"/>
+          </a:lnRef>
+          <a:fillRef idx="3">
+            <a:schemeClr val="accent1"/>
+          </a:fillRef>
+          <a:effectRef idx="2">
+            <a:schemeClr val="accent1"/>
+          </a:effectRef>
+          <a:fontRef idx="minor">
+            <a:schemeClr val="lt1"/>
+          </a:fontRef>
+        </p:style>
+        <p:txBody>
+          <a:bodyPr rtlCol="0" anchor="ctr"/>
+          <a:lstStyle/>
+          <a:p>
+            <a:pPr algn="ctr"/>
+          </a:p>
+        </p:txBody>
+      </p:sp>
+      <p:sp>
+        <p:nvSpPr>
+          <p:cNvPr id="72" name="TextBox 71"/>
+          <p:cNvSpPr txBox="1"/>
+          <p:nvPr/>
+        </p:nvSpPr>
+        <p:spPr>
+          <a:xfrm>
+            <a:off x="7686000" y="4244400"/>
+            <a:ext cx="792000" cy="136800"/>
+          </a:xfrm>
+          <a:prstGeom prst="rect">
+            <a:avLst/>
+          </a:prstGeom>
+          <a:noFill/>
+        </p:spPr>
+        <p:txBody>
+          <a:bodyPr wrap="none" anchor="ctr">
+            <a:spAutoFit/>
+          </a:bodyPr>
+          <a:lstStyle/>
+          <a:p>
+            <a:pPr algn="ctr"/>
+            <a:r>
+              <a:rPr sz="930" b="1">
+                <a:solidFill>
+                  <a:srgbClr val="FFFFFF"/>
+                </a:solidFill>
+                <a:latin typeface="Malgun Gothic"/>
+              </a:rPr>
+              <a:t>마감</a:t>
+            </a:r>
+          </a:p>
+        </p:txBody>
+      </p:sp>
+      <p:sp>
+        <p:nvSpPr>
+          <p:cNvPr id="73" name="TextBox 72"/>
+          <p:cNvSpPr txBox="1"/>
+          <p:nvPr/>
+        </p:nvSpPr>
+        <p:spPr>
+          <a:xfrm>
+            <a:off x="450000" y="4680000"/>
             <a:ext cx="3600000" cy="129600"/>
           </a:xfrm>
           <a:prstGeom prst="rect">

--- a/docs/통합CMS_ERP연계_고객사_안내자료.pptx
+++ b/docs/통합CMS_ERP연계_고객사_안내자료.pptx
@@ -3112,7 +3112,7 @@
             <a:avLst/>
           </a:prstGeom>
           <a:solidFill>
-            <a:srgbClr val="12363F"/>
+            <a:srgbClr val="FFFFFF"/>
           </a:solidFill>
           <a:ln>
             <a:noFill/>
@@ -5797,10 +5797,12 @@
             <a:avLst/>
           </a:prstGeom>
           <a:solidFill>
-            <a:srgbClr val="12363F"/>
+            <a:srgbClr val="FFFFFF"/>
           </a:solidFill>
           <a:ln>
-            <a:noFill/>
+            <a:solidFill>
+              <a:srgbClr val="C6DCD8"/>
+            </a:solidFill>
           </a:ln>
         </p:spPr>
         <p:style>
@@ -5827,87 +5829,16 @@
       </p:sp>
       <p:sp>
         <p:nvSpPr>
-          <p:cNvPr id="63" name="TextBox 62"/>
-          <p:cNvSpPr txBox="1"/>
-          <p:nvPr/>
-        </p:nvSpPr>
-        <p:spPr>
-          <a:xfrm>
-            <a:off x="558000" y="3906000"/>
-            <a:ext cx="4031999" cy="342000"/>
-          </a:xfrm>
-          <a:prstGeom prst="rect">
-            <a:avLst/>
-          </a:prstGeom>
-          <a:noFill/>
-        </p:spPr>
-        <p:txBody>
-          <a:bodyPr wrap="none" anchor="ctr">
-            <a:spAutoFit/>
-          </a:bodyPr>
-          <a:lstStyle/>
-          <a:p>
-            <a:pPr algn="l"/>
-            <a:r>
-              <a:rPr sz="2200" b="1">
-                <a:solidFill>
-                  <a:srgbClr val="FFFFFF"/>
-                </a:solidFill>
-                <a:latin typeface="Malgun Gothic"/>
-              </a:rPr>
-              <a:t>통합CMS ERP연계
-고객사 안내자료</a:t>
-            </a:r>
-          </a:p>
-        </p:txBody>
-      </p:sp>
-      <p:sp>
-        <p:nvSpPr>
-          <p:cNvPr id="64" name="TextBox 63"/>
-          <p:cNvSpPr txBox="1"/>
-          <p:nvPr/>
-        </p:nvSpPr>
-        <p:spPr>
-          <a:xfrm>
-            <a:off x="4932000" y="3960000"/>
-            <a:ext cx="3420000" cy="172800"/>
-          </a:xfrm>
-          <a:prstGeom prst="rect">
-            <a:avLst/>
-          </a:prstGeom>
-          <a:noFill/>
-        </p:spPr>
-        <p:txBody>
-          <a:bodyPr wrap="none" anchor="ctr">
-            <a:spAutoFit/>
-          </a:bodyPr>
-          <a:lstStyle/>
-          <a:p>
-            <a:pPr algn="l"/>
-            <a:r>
-              <a:rPr sz="1120" b="0">
-                <a:solidFill>
-                  <a:srgbClr val="E5F7F3"/>
-                </a:solidFill>
-                <a:latin typeface="Malgun Gothic"/>
-              </a:rPr>
-              <a:t>은행 업무 결과를 ERP 회계·자금 업무로 연결합니다.</a:t>
-            </a:r>
-          </a:p>
-        </p:txBody>
-      </p:sp>
-      <p:sp>
-        <p:nvSpPr>
-          <p:cNvPr id="65" name="Rounded Rectangle 64"/>
+          <p:cNvPr id="63" name="Rectangle 62"/>
           <p:cNvSpPr/>
           <p:nvPr/>
         </p:nvSpPr>
         <p:spPr>
           <a:xfrm>
-            <a:off x="4932000" y="4230000"/>
-            <a:ext cx="792000" cy="201600"/>
-          </a:xfrm>
-          <a:prstGeom prst="roundRect">
+            <a:off x="360000" y="3761999"/>
+            <a:ext cx="43200" cy="810000"/>
+          </a:xfrm>
+          <a:prstGeom prst="rect">
             <a:avLst/>
           </a:prstGeom>
           <a:solidFill>
@@ -5941,14 +5872,14 @@
       </p:sp>
       <p:sp>
         <p:nvSpPr>
-          <p:cNvPr id="66" name="TextBox 65"/>
+          <p:cNvPr id="64" name="TextBox 63"/>
           <p:cNvSpPr txBox="1"/>
           <p:nvPr/>
         </p:nvSpPr>
         <p:spPr>
           <a:xfrm>
-            <a:off x="4932000" y="4244400"/>
-            <a:ext cx="792000" cy="136800"/>
+            <a:off x="558000" y="3906000"/>
+            <a:ext cx="4031999" cy="342000"/>
           </a:xfrm>
           <a:prstGeom prst="rect">
             <a:avLst/>
@@ -5961,28 +5892,64 @@
           </a:bodyPr>
           <a:lstStyle/>
           <a:p>
-            <a:pPr algn="ctr"/>
-            <a:r>
-              <a:rPr sz="930" b="1">
-                <a:solidFill>
-                  <a:srgbClr val="FFFFFF"/>
+            <a:pPr algn="l"/>
+            <a:r>
+              <a:rPr sz="2200" b="1">
+                <a:solidFill>
+                  <a:srgbClr val="12363F"/>
                 </a:solidFill>
                 <a:latin typeface="Malgun Gothic"/>
               </a:rPr>
-              <a:t>조회</a:t>
-            </a:r>
-          </a:p>
-        </p:txBody>
-      </p:sp>
-      <p:sp>
-        <p:nvSpPr>
-          <p:cNvPr id="67" name="Rounded Rectangle 66"/>
+              <a:t>통합CMS ERP연계
+고객사 안내자료</a:t>
+            </a:r>
+          </a:p>
+        </p:txBody>
+      </p:sp>
+      <p:sp>
+        <p:nvSpPr>
+          <p:cNvPr id="65" name="TextBox 64"/>
+          <p:cNvSpPr txBox="1"/>
+          <p:nvPr/>
+        </p:nvSpPr>
+        <p:spPr>
+          <a:xfrm>
+            <a:off x="4932000" y="3960000"/>
+            <a:ext cx="3420000" cy="172800"/>
+          </a:xfrm>
+          <a:prstGeom prst="rect">
+            <a:avLst/>
+          </a:prstGeom>
+          <a:noFill/>
+        </p:spPr>
+        <p:txBody>
+          <a:bodyPr wrap="none" anchor="ctr">
+            <a:spAutoFit/>
+          </a:bodyPr>
+          <a:lstStyle/>
+          <a:p>
+            <a:pPr algn="l"/>
+            <a:r>
+              <a:rPr sz="1120" b="0">
+                <a:solidFill>
+                  <a:srgbClr val="5F7179"/>
+                </a:solidFill>
+                <a:latin typeface="Malgun Gothic"/>
+              </a:rPr>
+              <a:t>은행 업무 결과를 ERP 회계·자금 업무로 연결합니다.</a:t>
+            </a:r>
+          </a:p>
+        </p:txBody>
+      </p:sp>
+      <p:sp>
+        <p:nvSpPr>
+          <p:cNvPr id="66" name="Rounded Rectangle 65"/>
           <p:cNvSpPr/>
           <p:nvPr/>
         </p:nvSpPr>
         <p:spPr>
           <a:xfrm>
-            <a:off x="5850000" y="4230000"/>
+            <a:off x="4932000" y="4230000"/>
             <a:ext cx="792000" cy="201600"/>
           </a:xfrm>
           <a:prstGeom prst="roundRect">
@@ -6019,13 +5986,13 @@
       </p:sp>
       <p:sp>
         <p:nvSpPr>
-          <p:cNvPr id="68" name="TextBox 67"/>
+          <p:cNvPr id="67" name="TextBox 66"/>
           <p:cNvSpPr txBox="1"/>
           <p:nvPr/>
         </p:nvSpPr>
         <p:spPr>
           <a:xfrm>
-            <a:off x="5850000" y="4244400"/>
+            <a:off x="4932000" y="4244400"/>
             <a:ext cx="792000" cy="136800"/>
           </a:xfrm>
           <a:prstGeom prst="rect">
@@ -6047,20 +6014,20 @@
                 </a:solidFill>
                 <a:latin typeface="Malgun Gothic"/>
               </a:rPr>
-              <a:t>전송</a:t>
-            </a:r>
-          </a:p>
-        </p:txBody>
-      </p:sp>
-      <p:sp>
-        <p:nvSpPr>
-          <p:cNvPr id="69" name="Rounded Rectangle 68"/>
+              <a:t>조회</a:t>
+            </a:r>
+          </a:p>
+        </p:txBody>
+      </p:sp>
+      <p:sp>
+        <p:nvSpPr>
+          <p:cNvPr id="68" name="Rounded Rectangle 67"/>
           <p:cNvSpPr/>
           <p:nvPr/>
         </p:nvSpPr>
         <p:spPr>
           <a:xfrm>
-            <a:off x="6768000" y="4230000"/>
+            <a:off x="5850000" y="4230000"/>
             <a:ext cx="792000" cy="201600"/>
           </a:xfrm>
           <a:prstGeom prst="roundRect">
@@ -6097,13 +6064,13 @@
       </p:sp>
       <p:sp>
         <p:nvSpPr>
-          <p:cNvPr id="70" name="TextBox 69"/>
+          <p:cNvPr id="69" name="TextBox 68"/>
           <p:cNvSpPr txBox="1"/>
           <p:nvPr/>
         </p:nvSpPr>
         <p:spPr>
           <a:xfrm>
-            <a:off x="6768000" y="4244400"/>
+            <a:off x="5850000" y="4244400"/>
             <a:ext cx="792000" cy="136800"/>
           </a:xfrm>
           <a:prstGeom prst="rect">
@@ -6125,20 +6092,20 @@
                 </a:solidFill>
                 <a:latin typeface="Malgun Gothic"/>
               </a:rPr>
-              <a:t>정산</a:t>
-            </a:r>
-          </a:p>
-        </p:txBody>
-      </p:sp>
-      <p:sp>
-        <p:nvSpPr>
-          <p:cNvPr id="71" name="Rounded Rectangle 70"/>
+              <a:t>전송</a:t>
+            </a:r>
+          </a:p>
+        </p:txBody>
+      </p:sp>
+      <p:sp>
+        <p:nvSpPr>
+          <p:cNvPr id="70" name="Rounded Rectangle 69"/>
           <p:cNvSpPr/>
           <p:nvPr/>
         </p:nvSpPr>
         <p:spPr>
           <a:xfrm>
-            <a:off x="7686000" y="4230000"/>
+            <a:off x="6768000" y="4230000"/>
             <a:ext cx="792000" cy="201600"/>
           </a:xfrm>
           <a:prstGeom prst="roundRect">
@@ -6175,13 +6142,13 @@
       </p:sp>
       <p:sp>
         <p:nvSpPr>
-          <p:cNvPr id="72" name="TextBox 71"/>
+          <p:cNvPr id="71" name="TextBox 70"/>
           <p:cNvSpPr txBox="1"/>
           <p:nvPr/>
         </p:nvSpPr>
         <p:spPr>
           <a:xfrm>
-            <a:off x="7686000" y="4244400"/>
+            <a:off x="6768000" y="4244400"/>
             <a:ext cx="792000" cy="136800"/>
           </a:xfrm>
           <a:prstGeom prst="rect">
@@ -6203,8 +6170,51 @@
                 </a:solidFill>
                 <a:latin typeface="Malgun Gothic"/>
               </a:rPr>
-              <a:t>마감</a:t>
-            </a:r>
+              <a:t>정산</a:t>
+            </a:r>
+          </a:p>
+        </p:txBody>
+      </p:sp>
+      <p:sp>
+        <p:nvSpPr>
+          <p:cNvPr id="72" name="Rounded Rectangle 71"/>
+          <p:cNvSpPr/>
+          <p:nvPr/>
+        </p:nvSpPr>
+        <p:spPr>
+          <a:xfrm>
+            <a:off x="7686000" y="4230000"/>
+            <a:ext cx="792000" cy="201600"/>
+          </a:xfrm>
+          <a:prstGeom prst="roundRect">
+            <a:avLst/>
+          </a:prstGeom>
+          <a:solidFill>
+            <a:srgbClr val="00A888"/>
+          </a:solidFill>
+          <a:ln>
+            <a:noFill/>
+          </a:ln>
+        </p:spPr>
+        <p:style>
+          <a:lnRef idx="1">
+            <a:schemeClr val="accent1"/>
+          </a:lnRef>
+          <a:fillRef idx="3">
+            <a:schemeClr val="accent1"/>
+          </a:fillRef>
+          <a:effectRef idx="2">
+            <a:schemeClr val="accent1"/>
+          </a:effectRef>
+          <a:fontRef idx="minor">
+            <a:schemeClr val="lt1"/>
+          </a:fontRef>
+        </p:style>
+        <p:txBody>
+          <a:bodyPr rtlCol="0" anchor="ctr"/>
+          <a:lstStyle/>
+          <a:p>
+            <a:pPr algn="ctr"/>
           </a:p>
         </p:txBody>
       </p:sp>
@@ -6216,8 +6226,8 @@
         </p:nvSpPr>
         <p:spPr>
           <a:xfrm>
-            <a:off x="450000" y="4680000"/>
-            <a:ext cx="3600000" cy="129600"/>
+            <a:off x="7686000" y="4244400"/>
+            <a:ext cx="792000" cy="136800"/>
           </a:xfrm>
           <a:prstGeom prst="rect">
             <a:avLst/>
@@ -6230,11 +6240,46 @@
           </a:bodyPr>
           <a:lstStyle/>
           <a:p>
+            <a:pPr algn="ctr"/>
+            <a:r>
+              <a:rPr sz="930" b="1">
+                <a:solidFill>
+                  <a:srgbClr val="FFFFFF"/>
+                </a:solidFill>
+                <a:latin typeface="Malgun Gothic"/>
+              </a:rPr>
+              <a:t>마감</a:t>
+            </a:r>
+          </a:p>
+        </p:txBody>
+      </p:sp>
+      <p:sp>
+        <p:nvSpPr>
+          <p:cNvPr id="74" name="TextBox 73"/>
+          <p:cNvSpPr txBox="1"/>
+          <p:nvPr/>
+        </p:nvSpPr>
+        <p:spPr>
+          <a:xfrm>
+            <a:off x="450000" y="4680000"/>
+            <a:ext cx="3600000" cy="129600"/>
+          </a:xfrm>
+          <a:prstGeom prst="rect">
+            <a:avLst/>
+          </a:prstGeom>
+          <a:noFill/>
+        </p:spPr>
+        <p:txBody>
+          <a:bodyPr wrap="none" anchor="ctr">
+            <a:spAutoFit/>
+          </a:bodyPr>
+          <a:lstStyle/>
+          <a:p>
             <a:pPr algn="l"/>
             <a:r>
               <a:rPr sz="1000" b="1">
                 <a:solidFill>
-                  <a:srgbClr val="E5F7F3"/>
+                  <a:srgbClr val="006052"/>
                 </a:solidFill>
                 <a:latin typeface="Malgun Gothic"/>
               </a:rPr>
@@ -6276,7 +6321,7 @@
             <a:avLst/>
           </a:prstGeom>
           <a:solidFill>
-            <a:srgbClr val="F5FAF9"/>
+            <a:srgbClr val="FFFFFF"/>
           </a:solidFill>
           <a:ln>
             <a:noFill/>
@@ -7782,7 +7827,7 @@
             <a:avLst/>
           </a:prstGeom>
           <a:solidFill>
-            <a:srgbClr val="F5FAF9"/>
+            <a:srgbClr val="FFFFFF"/>
           </a:solidFill>
           <a:ln>
             <a:noFill/>
@@ -9394,7 +9439,7 @@
             <a:avLst/>
           </a:prstGeom>
           <a:solidFill>
-            <a:srgbClr val="F5FAF9"/>
+            <a:srgbClr val="FFFFFF"/>
           </a:solidFill>
           <a:ln>
             <a:noFill/>
@@ -10629,7 +10674,7 @@
             <a:avLst/>
           </a:prstGeom>
           <a:solidFill>
-            <a:srgbClr val="F5FAF9"/>
+            <a:srgbClr val="FFFFFF"/>
           </a:solidFill>
           <a:ln>
             <a:noFill/>
@@ -11680,7 +11725,7 @@
             <a:avLst/>
           </a:prstGeom>
           <a:solidFill>
-            <a:srgbClr val="F5FAF9"/>
+            <a:srgbClr val="FFFFFF"/>
           </a:solidFill>
           <a:ln>
             <a:noFill/>
@@ -12731,7 +12776,7 @@
             <a:avLst/>
           </a:prstGeom>
           <a:solidFill>
-            <a:srgbClr val="F5FAF9"/>
+            <a:srgbClr val="FFFFFF"/>
           </a:solidFill>
           <a:ln>
             <a:noFill/>
@@ -13782,7 +13827,7 @@
             <a:avLst/>
           </a:prstGeom>
           <a:solidFill>
-            <a:srgbClr val="F5FAF9"/>
+            <a:srgbClr val="FFFFFF"/>
           </a:solidFill>
           <a:ln>
             <a:noFill/>
@@ -14833,7 +14878,7 @@
             <a:avLst/>
           </a:prstGeom>
           <a:solidFill>
-            <a:srgbClr val="F5FAF9"/>
+            <a:srgbClr val="FFFFFF"/>
           </a:solidFill>
           <a:ln>
             <a:noFill/>
@@ -15884,7 +15929,7 @@
             <a:avLst/>
           </a:prstGeom>
           <a:solidFill>
-            <a:srgbClr val="F5FAF9"/>
+            <a:srgbClr val="FFFFFF"/>
           </a:solidFill>
           <a:ln>
             <a:noFill/>

--- a/docs/통합CMS_ERP연계_고객사_안내자료.pptx
+++ b/docs/통합CMS_ERP연계_고객사_안내자료.pptx
@@ -6255,7 +6255,165 @@
       </p:sp>
       <p:sp>
         <p:nvSpPr>
-          <p:cNvPr id="74" name="TextBox 73"/>
+          <p:cNvPr id="74" name="Rounded Rectangle 73"/>
+          <p:cNvSpPr/>
+          <p:nvPr/>
+        </p:nvSpPr>
+        <p:spPr>
+          <a:xfrm>
+            <a:off x="4932000" y="4471200"/>
+            <a:ext cx="3546000" cy="280800"/>
+          </a:xfrm>
+          <a:prstGeom prst="roundRect">
+            <a:avLst/>
+          </a:prstGeom>
+          <a:solidFill>
+            <a:srgbClr val="FFFFFF"/>
+          </a:solidFill>
+          <a:ln>
+            <a:solidFill>
+              <a:srgbClr val="C6DCD8"/>
+            </a:solidFill>
+          </a:ln>
+        </p:spPr>
+        <p:style>
+          <a:lnRef idx="1">
+            <a:schemeClr val="accent1"/>
+          </a:lnRef>
+          <a:fillRef idx="3">
+            <a:schemeClr val="accent1"/>
+          </a:fillRef>
+          <a:effectRef idx="2">
+            <a:schemeClr val="accent1"/>
+          </a:effectRef>
+          <a:fontRef idx="minor">
+            <a:schemeClr val="lt1"/>
+          </a:fontRef>
+        </p:style>
+        <p:txBody>
+          <a:bodyPr rtlCol="0" anchor="ctr"/>
+          <a:lstStyle/>
+          <a:p>
+            <a:pPr algn="ctr"/>
+          </a:p>
+        </p:txBody>
+      </p:sp>
+      <p:sp>
+        <p:nvSpPr>
+          <p:cNvPr id="75" name="Rectangle 74"/>
+          <p:cNvSpPr/>
+          <p:nvPr/>
+        </p:nvSpPr>
+        <p:spPr>
+          <a:xfrm>
+            <a:off x="4932000" y="4471200"/>
+            <a:ext cx="28800" cy="280800"/>
+          </a:xfrm>
+          <a:prstGeom prst="rect">
+            <a:avLst/>
+          </a:prstGeom>
+          <a:solidFill>
+            <a:srgbClr val="00A888"/>
+          </a:solidFill>
+          <a:ln>
+            <a:noFill/>
+          </a:ln>
+        </p:spPr>
+        <p:style>
+          <a:lnRef idx="1">
+            <a:schemeClr val="accent1"/>
+          </a:lnRef>
+          <a:fillRef idx="3">
+            <a:schemeClr val="accent1"/>
+          </a:fillRef>
+          <a:effectRef idx="2">
+            <a:schemeClr val="accent1"/>
+          </a:effectRef>
+          <a:fontRef idx="minor">
+            <a:schemeClr val="lt1"/>
+          </a:fontRef>
+        </p:style>
+        <p:txBody>
+          <a:bodyPr rtlCol="0" anchor="ctr"/>
+          <a:lstStyle/>
+          <a:p>
+            <a:pPr algn="ctr"/>
+          </a:p>
+        </p:txBody>
+      </p:sp>
+      <p:sp>
+        <p:nvSpPr>
+          <p:cNvPr id="76" name="TextBox 75"/>
+          <p:cNvSpPr txBox="1"/>
+          <p:nvPr/>
+        </p:nvSpPr>
+        <p:spPr>
+          <a:xfrm>
+            <a:off x="5040000" y="4514400"/>
+            <a:ext cx="612000" cy="79200"/>
+          </a:xfrm>
+          <a:prstGeom prst="rect">
+            <a:avLst/>
+          </a:prstGeom>
+          <a:noFill/>
+        </p:spPr>
+        <p:txBody>
+          <a:bodyPr wrap="none" anchor="ctr">
+            <a:spAutoFit/>
+          </a:bodyPr>
+          <a:lstStyle/>
+          <a:p>
+            <a:pPr algn="l"/>
+            <a:r>
+              <a:rPr sz="780" b="1">
+                <a:solidFill>
+                  <a:srgbClr val="006052"/>
+                </a:solidFill>
+                <a:latin typeface="Malgun Gothic"/>
+              </a:rPr>
+              <a:t>핵심 효과</a:t>
+            </a:r>
+          </a:p>
+        </p:txBody>
+      </p:sp>
+      <p:sp>
+        <p:nvSpPr>
+          <p:cNvPr id="77" name="TextBox 76"/>
+          <p:cNvSpPr txBox="1"/>
+          <p:nvPr/>
+        </p:nvSpPr>
+        <p:spPr>
+          <a:xfrm>
+            <a:off x="5688000" y="4514400"/>
+            <a:ext cx="2646000" cy="79200"/>
+          </a:xfrm>
+          <a:prstGeom prst="rect">
+            <a:avLst/>
+          </a:prstGeom>
+          <a:noFill/>
+        </p:spPr>
+        <p:txBody>
+          <a:bodyPr wrap="none" anchor="ctr">
+            <a:spAutoFit/>
+          </a:bodyPr>
+          <a:lstStyle/>
+          <a:p>
+            <a:pPr algn="l"/>
+            <a:r>
+              <a:rPr sz="760" b="0">
+                <a:solidFill>
+                  <a:srgbClr val="232D34"/>
+                </a:solidFill>
+                <a:latin typeface="Malgun Gothic"/>
+              </a:rPr>
+              <a:t>수기입력 감소  ·  데이터 정합성 확보  ·  마감시간 단축</a:t>
+            </a:r>
+          </a:p>
+        </p:txBody>
+      </p:sp>
+      <p:sp>
+        <p:nvSpPr>
+          <p:cNvPr id="78" name="TextBox 77"/>
           <p:cNvSpPr txBox="1"/>
           <p:nvPr/>
         </p:nvSpPr>
